--- a/Slides/Aula 05 - encapsulamento.pptx
+++ b/Slides/Aula 05 - encapsulamento.pptx
@@ -5,7 +5,7 @@
     <p:sldMasterId id="2147483654" r:id="rId1"/>
   </p:sldMasterIdLst>
   <p:notesMasterIdLst>
-    <p:notesMasterId r:id="rId34"/>
+    <p:notesMasterId r:id="rId18"/>
   </p:notesMasterIdLst>
   <p:sldIdLst>
     <p:sldId id="256" r:id="rId2"/>
@@ -19,27 +19,11 @@
     <p:sldId id="270" r:id="rId10"/>
     <p:sldId id="271" r:id="rId11"/>
     <p:sldId id="287" r:id="rId12"/>
-    <p:sldId id="272" r:id="rId13"/>
-    <p:sldId id="273" r:id="rId14"/>
+    <p:sldId id="273" r:id="rId13"/>
+    <p:sldId id="272" r:id="rId14"/>
     <p:sldId id="274" r:id="rId15"/>
-    <p:sldId id="275" r:id="rId16"/>
-    <p:sldId id="276" r:id="rId17"/>
-    <p:sldId id="277" r:id="rId18"/>
-    <p:sldId id="278" r:id="rId19"/>
-    <p:sldId id="279" r:id="rId20"/>
-    <p:sldId id="280" r:id="rId21"/>
-    <p:sldId id="281" r:id="rId22"/>
-    <p:sldId id="282" r:id="rId23"/>
-    <p:sldId id="283" r:id="rId24"/>
-    <p:sldId id="284" r:id="rId25"/>
-    <p:sldId id="285" r:id="rId26"/>
-    <p:sldId id="286" r:id="rId27"/>
-    <p:sldId id="267" r:id="rId28"/>
-    <p:sldId id="268" r:id="rId29"/>
-    <p:sldId id="259" r:id="rId30"/>
-    <p:sldId id="257" r:id="rId31"/>
-    <p:sldId id="260" r:id="rId32"/>
-    <p:sldId id="261" r:id="rId33"/>
+    <p:sldId id="276" r:id="rId16"/>
+    <p:sldId id="261" r:id="rId17"/>
   </p:sldIdLst>
   <p:sldSz cx="9144000" cy="5143500" type="screen16x9"/>
   <p:notesSz cx="6858000" cy="9144000"/>
@@ -1098,6 +1082,133 @@
         <p:cNvPr id="1" name="Shape 50">
           <a:extLst>
             <a:ext uri="{FF2B5EF4-FFF2-40B4-BE49-F238E27FC236}">
+              <a16:creationId xmlns:a16="http://schemas.microsoft.com/office/drawing/2014/main" id="{AACCC827-295E-CE1B-589F-3044B38FF6A2}"/>
+            </a:ext>
+          </a:extLst>
+        </p:cNvPr>
+        <p:cNvGrpSpPr/>
+        <p:nvPr/>
+      </p:nvGrpSpPr>
+      <p:grpSpPr>
+        <a:xfrm>
+          <a:off x="0" y="0"/>
+          <a:ext cx="0" cy="0"/>
+          <a:chOff x="0" y="0"/>
+          <a:chExt cx="0" cy="0"/>
+        </a:xfrm>
+      </p:grpSpPr>
+      <p:sp>
+        <p:nvSpPr>
+          <p:cNvPr id="51" name="Google Shape;51;g3af032c298c_0_50:notes">
+            <a:extLst>
+              <a:ext uri="{FF2B5EF4-FFF2-40B4-BE49-F238E27FC236}">
+                <a16:creationId xmlns:a16="http://schemas.microsoft.com/office/drawing/2014/main" id="{D57CA41A-EA7B-7D8D-667D-F59F411AE574}"/>
+              </a:ext>
+            </a:extLst>
+          </p:cNvPr>
+          <p:cNvSpPr>
+            <a:spLocks noGrp="1" noRot="1" noChangeAspect="1"/>
+          </p:cNvSpPr>
+          <p:nvPr>
+            <p:ph type="sldImg" idx="2"/>
+          </p:nvPr>
+        </p:nvSpPr>
+        <p:spPr>
+          <a:xfrm>
+            <a:off x="381000" y="685800"/>
+            <a:ext cx="6096000" cy="3429000"/>
+          </a:xfrm>
+          <a:custGeom>
+            <a:avLst/>
+            <a:gdLst/>
+            <a:ahLst/>
+            <a:cxnLst/>
+            <a:rect l="l" t="t" r="r" b="b"/>
+            <a:pathLst>
+              <a:path w="120000" h="120000" extrusionOk="0">
+                <a:moveTo>
+                  <a:pt x="0" y="0"/>
+                </a:moveTo>
+                <a:lnTo>
+                  <a:pt x="120000" y="0"/>
+                </a:lnTo>
+                <a:lnTo>
+                  <a:pt x="120000" y="120000"/>
+                </a:lnTo>
+                <a:lnTo>
+                  <a:pt x="0" y="120000"/>
+                </a:lnTo>
+                <a:close/>
+              </a:path>
+            </a:pathLst>
+          </a:custGeom>
+        </p:spPr>
+      </p:sp>
+      <p:sp>
+        <p:nvSpPr>
+          <p:cNvPr id="52" name="Google Shape;52;g3af032c298c_0_50:notes">
+            <a:extLst>
+              <a:ext uri="{FF2B5EF4-FFF2-40B4-BE49-F238E27FC236}">
+                <a16:creationId xmlns:a16="http://schemas.microsoft.com/office/drawing/2014/main" id="{78E0CB1A-8F5A-2032-C499-EED56EF8A86D}"/>
+              </a:ext>
+            </a:extLst>
+          </p:cNvPr>
+          <p:cNvSpPr txBox="1">
+            <a:spLocks noGrp="1"/>
+          </p:cNvSpPr>
+          <p:nvPr>
+            <p:ph type="body" idx="1"/>
+          </p:nvPr>
+        </p:nvSpPr>
+        <p:spPr>
+          <a:xfrm>
+            <a:off x="685800" y="4343400"/>
+            <a:ext cx="5486400" cy="4114800"/>
+          </a:xfrm>
+          <a:prstGeom prst="rect">
+            <a:avLst/>
+          </a:prstGeom>
+        </p:spPr>
+        <p:txBody>
+          <a:bodyPr spcFirstLastPara="1" wrap="square" lIns="91425" tIns="91425" rIns="91425" bIns="91425" anchor="t" anchorCtr="0">
+            <a:noAutofit/>
+          </a:bodyPr>
+          <a:lstStyle/>
+          <a:p>
+            <a:pPr marL="0" lvl="0" indent="0" algn="l" rtl="0">
+              <a:spcBef>
+                <a:spcPts val="0"/>
+              </a:spcBef>
+              <a:spcAft>
+                <a:spcPts val="0"/>
+              </a:spcAft>
+              <a:buNone/>
+            </a:pPr>
+            <a:endParaRPr/>
+          </a:p>
+        </p:txBody>
+      </p:sp>
+    </p:spTree>
+    <p:extLst>
+      <p:ext uri="{BB962C8B-B14F-4D97-AF65-F5344CB8AC3E}">
+        <p14:creationId xmlns:p14="http://schemas.microsoft.com/office/powerpoint/2010/main" val="826377465"/>
+      </p:ext>
+    </p:extLst>
+  </p:cSld>
+  <p:clrMapOvr>
+    <a:masterClrMapping/>
+  </p:clrMapOvr>
+</p:notes>
+</file>
+
+<file path=ppt/notesSlides/notesSlide13.xml><?xml version="1.0" encoding="utf-8"?>
+<p:notes xmlns:a="http://schemas.openxmlformats.org/drawingml/2006/main" xmlns:r="http://schemas.openxmlformats.org/officeDocument/2006/relationships" xmlns:p="http://schemas.openxmlformats.org/presentationml/2006/main" showMasterSp="0" showMasterPhAnim="0">
+  <p:cSld>
+    <p:spTree>
+      <p:nvGrpSpPr>
+        <p:cNvPr id="1" name="Shape 50">
+          <a:extLst>
+            <a:ext uri="{FF2B5EF4-FFF2-40B4-BE49-F238E27FC236}">
               <a16:creationId xmlns:a16="http://schemas.microsoft.com/office/drawing/2014/main" id="{A4D8F12F-AA84-ACD3-A8F5-0EA200764C24}"/>
             </a:ext>
           </a:extLst>
@@ -1208,133 +1319,6 @@
     <p:extLst>
       <p:ext uri="{BB962C8B-B14F-4D97-AF65-F5344CB8AC3E}">
         <p14:creationId xmlns:p14="http://schemas.microsoft.com/office/powerpoint/2010/main" val="4239268069"/>
-      </p:ext>
-    </p:extLst>
-  </p:cSld>
-  <p:clrMapOvr>
-    <a:masterClrMapping/>
-  </p:clrMapOvr>
-</p:notes>
-</file>
-
-<file path=ppt/notesSlides/notesSlide13.xml><?xml version="1.0" encoding="utf-8"?>
-<p:notes xmlns:a="http://schemas.openxmlformats.org/drawingml/2006/main" xmlns:r="http://schemas.openxmlformats.org/officeDocument/2006/relationships" xmlns:p="http://schemas.openxmlformats.org/presentationml/2006/main" showMasterSp="0" showMasterPhAnim="0">
-  <p:cSld>
-    <p:spTree>
-      <p:nvGrpSpPr>
-        <p:cNvPr id="1" name="Shape 50">
-          <a:extLst>
-            <a:ext uri="{FF2B5EF4-FFF2-40B4-BE49-F238E27FC236}">
-              <a16:creationId xmlns:a16="http://schemas.microsoft.com/office/drawing/2014/main" id="{AACCC827-295E-CE1B-589F-3044B38FF6A2}"/>
-            </a:ext>
-          </a:extLst>
-        </p:cNvPr>
-        <p:cNvGrpSpPr/>
-        <p:nvPr/>
-      </p:nvGrpSpPr>
-      <p:grpSpPr>
-        <a:xfrm>
-          <a:off x="0" y="0"/>
-          <a:ext cx="0" cy="0"/>
-          <a:chOff x="0" y="0"/>
-          <a:chExt cx="0" cy="0"/>
-        </a:xfrm>
-      </p:grpSpPr>
-      <p:sp>
-        <p:nvSpPr>
-          <p:cNvPr id="51" name="Google Shape;51;g3af032c298c_0_50:notes">
-            <a:extLst>
-              <a:ext uri="{FF2B5EF4-FFF2-40B4-BE49-F238E27FC236}">
-                <a16:creationId xmlns:a16="http://schemas.microsoft.com/office/drawing/2014/main" id="{D57CA41A-EA7B-7D8D-667D-F59F411AE574}"/>
-              </a:ext>
-            </a:extLst>
-          </p:cNvPr>
-          <p:cNvSpPr>
-            <a:spLocks noGrp="1" noRot="1" noChangeAspect="1"/>
-          </p:cNvSpPr>
-          <p:nvPr>
-            <p:ph type="sldImg" idx="2"/>
-          </p:nvPr>
-        </p:nvSpPr>
-        <p:spPr>
-          <a:xfrm>
-            <a:off x="381000" y="685800"/>
-            <a:ext cx="6096000" cy="3429000"/>
-          </a:xfrm>
-          <a:custGeom>
-            <a:avLst/>
-            <a:gdLst/>
-            <a:ahLst/>
-            <a:cxnLst/>
-            <a:rect l="l" t="t" r="r" b="b"/>
-            <a:pathLst>
-              <a:path w="120000" h="120000" extrusionOk="0">
-                <a:moveTo>
-                  <a:pt x="0" y="0"/>
-                </a:moveTo>
-                <a:lnTo>
-                  <a:pt x="120000" y="0"/>
-                </a:lnTo>
-                <a:lnTo>
-                  <a:pt x="120000" y="120000"/>
-                </a:lnTo>
-                <a:lnTo>
-                  <a:pt x="0" y="120000"/>
-                </a:lnTo>
-                <a:close/>
-              </a:path>
-            </a:pathLst>
-          </a:custGeom>
-        </p:spPr>
-      </p:sp>
-      <p:sp>
-        <p:nvSpPr>
-          <p:cNvPr id="52" name="Google Shape;52;g3af032c298c_0_50:notes">
-            <a:extLst>
-              <a:ext uri="{FF2B5EF4-FFF2-40B4-BE49-F238E27FC236}">
-                <a16:creationId xmlns:a16="http://schemas.microsoft.com/office/drawing/2014/main" id="{78E0CB1A-8F5A-2032-C499-EED56EF8A86D}"/>
-              </a:ext>
-            </a:extLst>
-          </p:cNvPr>
-          <p:cNvSpPr txBox="1">
-            <a:spLocks noGrp="1"/>
-          </p:cNvSpPr>
-          <p:nvPr>
-            <p:ph type="body" idx="1"/>
-          </p:nvPr>
-        </p:nvSpPr>
-        <p:spPr>
-          <a:xfrm>
-            <a:off x="685800" y="4343400"/>
-            <a:ext cx="5486400" cy="4114800"/>
-          </a:xfrm>
-          <a:prstGeom prst="rect">
-            <a:avLst/>
-          </a:prstGeom>
-        </p:spPr>
-        <p:txBody>
-          <a:bodyPr spcFirstLastPara="1" wrap="square" lIns="91425" tIns="91425" rIns="91425" bIns="91425" anchor="t" anchorCtr="0">
-            <a:noAutofit/>
-          </a:bodyPr>
-          <a:lstStyle/>
-          <a:p>
-            <a:pPr marL="0" lvl="0" indent="0" algn="l" rtl="0">
-              <a:spcBef>
-                <a:spcPts val="0"/>
-              </a:spcBef>
-              <a:spcAft>
-                <a:spcPts val="0"/>
-              </a:spcAft>
-              <a:buNone/>
-            </a:pPr>
-            <a:endParaRPr/>
-          </a:p>
-        </p:txBody>
-      </p:sp>
-    </p:spTree>
-    <p:extLst>
-      <p:ext uri="{BB962C8B-B14F-4D97-AF65-F5344CB8AC3E}">
-        <p14:creationId xmlns:p14="http://schemas.microsoft.com/office/powerpoint/2010/main" val="826377465"/>
       </p:ext>
     </p:extLst>
   </p:cSld>
@@ -1479,133 +1463,6 @@
         <p:cNvPr id="1" name="Shape 50">
           <a:extLst>
             <a:ext uri="{FF2B5EF4-FFF2-40B4-BE49-F238E27FC236}">
-              <a16:creationId xmlns:a16="http://schemas.microsoft.com/office/drawing/2014/main" id="{EFC663E6-8687-71A4-8904-5477C8A18135}"/>
-            </a:ext>
-          </a:extLst>
-        </p:cNvPr>
-        <p:cNvGrpSpPr/>
-        <p:nvPr/>
-      </p:nvGrpSpPr>
-      <p:grpSpPr>
-        <a:xfrm>
-          <a:off x="0" y="0"/>
-          <a:ext cx="0" cy="0"/>
-          <a:chOff x="0" y="0"/>
-          <a:chExt cx="0" cy="0"/>
-        </a:xfrm>
-      </p:grpSpPr>
-      <p:sp>
-        <p:nvSpPr>
-          <p:cNvPr id="51" name="Google Shape;51;g3af032c298c_0_50:notes">
-            <a:extLst>
-              <a:ext uri="{FF2B5EF4-FFF2-40B4-BE49-F238E27FC236}">
-                <a16:creationId xmlns:a16="http://schemas.microsoft.com/office/drawing/2014/main" id="{D150990A-35E0-7285-F783-2422F805F7C9}"/>
-              </a:ext>
-            </a:extLst>
-          </p:cNvPr>
-          <p:cNvSpPr>
-            <a:spLocks noGrp="1" noRot="1" noChangeAspect="1"/>
-          </p:cNvSpPr>
-          <p:nvPr>
-            <p:ph type="sldImg" idx="2"/>
-          </p:nvPr>
-        </p:nvSpPr>
-        <p:spPr>
-          <a:xfrm>
-            <a:off x="381000" y="685800"/>
-            <a:ext cx="6096000" cy="3429000"/>
-          </a:xfrm>
-          <a:custGeom>
-            <a:avLst/>
-            <a:gdLst/>
-            <a:ahLst/>
-            <a:cxnLst/>
-            <a:rect l="l" t="t" r="r" b="b"/>
-            <a:pathLst>
-              <a:path w="120000" h="120000" extrusionOk="0">
-                <a:moveTo>
-                  <a:pt x="0" y="0"/>
-                </a:moveTo>
-                <a:lnTo>
-                  <a:pt x="120000" y="0"/>
-                </a:lnTo>
-                <a:lnTo>
-                  <a:pt x="120000" y="120000"/>
-                </a:lnTo>
-                <a:lnTo>
-                  <a:pt x="0" y="120000"/>
-                </a:lnTo>
-                <a:close/>
-              </a:path>
-            </a:pathLst>
-          </a:custGeom>
-        </p:spPr>
-      </p:sp>
-      <p:sp>
-        <p:nvSpPr>
-          <p:cNvPr id="52" name="Google Shape;52;g3af032c298c_0_50:notes">
-            <a:extLst>
-              <a:ext uri="{FF2B5EF4-FFF2-40B4-BE49-F238E27FC236}">
-                <a16:creationId xmlns:a16="http://schemas.microsoft.com/office/drawing/2014/main" id="{EAA0101D-242C-805C-B34B-F0EB33D5CBF4}"/>
-              </a:ext>
-            </a:extLst>
-          </p:cNvPr>
-          <p:cNvSpPr txBox="1">
-            <a:spLocks noGrp="1"/>
-          </p:cNvSpPr>
-          <p:nvPr>
-            <p:ph type="body" idx="1"/>
-          </p:nvPr>
-        </p:nvSpPr>
-        <p:spPr>
-          <a:xfrm>
-            <a:off x="685800" y="4343400"/>
-            <a:ext cx="5486400" cy="4114800"/>
-          </a:xfrm>
-          <a:prstGeom prst="rect">
-            <a:avLst/>
-          </a:prstGeom>
-        </p:spPr>
-        <p:txBody>
-          <a:bodyPr spcFirstLastPara="1" wrap="square" lIns="91425" tIns="91425" rIns="91425" bIns="91425" anchor="t" anchorCtr="0">
-            <a:noAutofit/>
-          </a:bodyPr>
-          <a:lstStyle/>
-          <a:p>
-            <a:pPr marL="0" lvl="0" indent="0" algn="l" rtl="0">
-              <a:spcBef>
-                <a:spcPts val="0"/>
-              </a:spcBef>
-              <a:spcAft>
-                <a:spcPts val="0"/>
-              </a:spcAft>
-              <a:buNone/>
-            </a:pPr>
-            <a:endParaRPr/>
-          </a:p>
-        </p:txBody>
-      </p:sp>
-    </p:spTree>
-    <p:extLst>
-      <p:ext uri="{BB962C8B-B14F-4D97-AF65-F5344CB8AC3E}">
-        <p14:creationId xmlns:p14="http://schemas.microsoft.com/office/powerpoint/2010/main" val="1710976699"/>
-      </p:ext>
-    </p:extLst>
-  </p:cSld>
-  <p:clrMapOvr>
-    <a:masterClrMapping/>
-  </p:clrMapOvr>
-</p:notes>
-</file>
-
-<file path=ppt/notesSlides/notesSlide16.xml><?xml version="1.0" encoding="utf-8"?>
-<p:notes xmlns:a="http://schemas.openxmlformats.org/drawingml/2006/main" xmlns:r="http://schemas.openxmlformats.org/officeDocument/2006/relationships" xmlns:p="http://schemas.openxmlformats.org/presentationml/2006/main" showMasterSp="0" showMasterPhAnim="0">
-  <p:cSld>
-    <p:spTree>
-      <p:nvGrpSpPr>
-        <p:cNvPr id="1" name="Shape 50">
-          <a:extLst>
-            <a:ext uri="{FF2B5EF4-FFF2-40B4-BE49-F238E27FC236}">
               <a16:creationId xmlns:a16="http://schemas.microsoft.com/office/drawing/2014/main" id="{70A19FBF-6AEF-77AE-CA1D-FA39C02AC8EC}"/>
             </a:ext>
           </a:extLst>
@@ -1725,18 +1582,12 @@
 </p:notes>
 </file>
 
-<file path=ppt/notesSlides/notesSlide17.xml><?xml version="1.0" encoding="utf-8"?>
+<file path=ppt/notesSlides/notesSlide16.xml><?xml version="1.0" encoding="utf-8"?>
 <p:notes xmlns:a="http://schemas.openxmlformats.org/drawingml/2006/main" xmlns:r="http://schemas.openxmlformats.org/officeDocument/2006/relationships" xmlns:p="http://schemas.openxmlformats.org/presentationml/2006/main" showMasterSp="0" showMasterPhAnim="0">
   <p:cSld>
     <p:spTree>
       <p:nvGrpSpPr>
-        <p:cNvPr id="1" name="Shape 50">
-          <a:extLst>
-            <a:ext uri="{FF2B5EF4-FFF2-40B4-BE49-F238E27FC236}">
-              <a16:creationId xmlns:a16="http://schemas.microsoft.com/office/drawing/2014/main" id="{9E591F7B-B2C3-4CBA-A5C2-32E5C05A0752}"/>
-            </a:ext>
-          </a:extLst>
-        </p:cNvPr>
+        <p:cNvPr id="1" name="Shape 68"/>
         <p:cNvGrpSpPr/>
         <p:nvPr/>
       </p:nvGrpSpPr>
@@ -1750,13 +1601,7 @@
       </p:grpSpPr>
       <p:sp>
         <p:nvSpPr>
-          <p:cNvPr id="51" name="Google Shape;51;g3af032c298c_0_50:notes">
-            <a:extLst>
-              <a:ext uri="{FF2B5EF4-FFF2-40B4-BE49-F238E27FC236}">
-                <a16:creationId xmlns:a16="http://schemas.microsoft.com/office/drawing/2014/main" id="{52E58BD4-42B4-0E1C-3990-6E673188FAFC}"/>
-              </a:ext>
-            </a:extLst>
-          </p:cNvPr>
+          <p:cNvPr id="69" name="Google Shape;69;g3af032c298c_0_100:notes"/>
           <p:cNvSpPr>
             <a:spLocks noGrp="1" noRot="1" noChangeAspect="1"/>
           </p:cNvSpPr>
@@ -1797,13 +1642,7 @@
       </p:sp>
       <p:sp>
         <p:nvSpPr>
-          <p:cNvPr id="52" name="Google Shape;52;g3af032c298c_0_50:notes">
-            <a:extLst>
-              <a:ext uri="{FF2B5EF4-FFF2-40B4-BE49-F238E27FC236}">
-                <a16:creationId xmlns:a16="http://schemas.microsoft.com/office/drawing/2014/main" id="{B3DF7CBF-89DB-CD24-EB36-8095A82F9B2A}"/>
-              </a:ext>
-            </a:extLst>
-          </p:cNvPr>
+          <p:cNvPr id="70" name="Google Shape;70;g3af032c298c_0_100:notes"/>
           <p:cNvSpPr txBox="1">
             <a:spLocks noGrp="1"/>
           </p:cNvSpPr>
@@ -1840,265 +1679,6 @@
         </p:txBody>
       </p:sp>
     </p:spTree>
-    <p:extLst>
-      <p:ext uri="{BB962C8B-B14F-4D97-AF65-F5344CB8AC3E}">
-        <p14:creationId xmlns:p14="http://schemas.microsoft.com/office/powerpoint/2010/main" val="1142410222"/>
-      </p:ext>
-    </p:extLst>
-  </p:cSld>
-  <p:clrMapOvr>
-    <a:masterClrMapping/>
-  </p:clrMapOvr>
-</p:notes>
-</file>
-
-<file path=ppt/notesSlides/notesSlide18.xml><?xml version="1.0" encoding="utf-8"?>
-<p:notes xmlns:a="http://schemas.openxmlformats.org/drawingml/2006/main" xmlns:r="http://schemas.openxmlformats.org/officeDocument/2006/relationships" xmlns:p="http://schemas.openxmlformats.org/presentationml/2006/main" showMasterSp="0" showMasterPhAnim="0">
-  <p:cSld>
-    <p:spTree>
-      <p:nvGrpSpPr>
-        <p:cNvPr id="1" name="Shape 50">
-          <a:extLst>
-            <a:ext uri="{FF2B5EF4-FFF2-40B4-BE49-F238E27FC236}">
-              <a16:creationId xmlns:a16="http://schemas.microsoft.com/office/drawing/2014/main" id="{48037E1E-D2CE-42AC-6A31-58324B0483C4}"/>
-            </a:ext>
-          </a:extLst>
-        </p:cNvPr>
-        <p:cNvGrpSpPr/>
-        <p:nvPr/>
-      </p:nvGrpSpPr>
-      <p:grpSpPr>
-        <a:xfrm>
-          <a:off x="0" y="0"/>
-          <a:ext cx="0" cy="0"/>
-          <a:chOff x="0" y="0"/>
-          <a:chExt cx="0" cy="0"/>
-        </a:xfrm>
-      </p:grpSpPr>
-      <p:sp>
-        <p:nvSpPr>
-          <p:cNvPr id="51" name="Google Shape;51;g3af032c298c_0_50:notes">
-            <a:extLst>
-              <a:ext uri="{FF2B5EF4-FFF2-40B4-BE49-F238E27FC236}">
-                <a16:creationId xmlns:a16="http://schemas.microsoft.com/office/drawing/2014/main" id="{BA94FE31-0FBA-1435-C247-A54381D7D094}"/>
-              </a:ext>
-            </a:extLst>
-          </p:cNvPr>
-          <p:cNvSpPr>
-            <a:spLocks noGrp="1" noRot="1" noChangeAspect="1"/>
-          </p:cNvSpPr>
-          <p:nvPr>
-            <p:ph type="sldImg" idx="2"/>
-          </p:nvPr>
-        </p:nvSpPr>
-        <p:spPr>
-          <a:xfrm>
-            <a:off x="381000" y="685800"/>
-            <a:ext cx="6096000" cy="3429000"/>
-          </a:xfrm>
-          <a:custGeom>
-            <a:avLst/>
-            <a:gdLst/>
-            <a:ahLst/>
-            <a:cxnLst/>
-            <a:rect l="l" t="t" r="r" b="b"/>
-            <a:pathLst>
-              <a:path w="120000" h="120000" extrusionOk="0">
-                <a:moveTo>
-                  <a:pt x="0" y="0"/>
-                </a:moveTo>
-                <a:lnTo>
-                  <a:pt x="120000" y="0"/>
-                </a:lnTo>
-                <a:lnTo>
-                  <a:pt x="120000" y="120000"/>
-                </a:lnTo>
-                <a:lnTo>
-                  <a:pt x="0" y="120000"/>
-                </a:lnTo>
-                <a:close/>
-              </a:path>
-            </a:pathLst>
-          </a:custGeom>
-        </p:spPr>
-      </p:sp>
-      <p:sp>
-        <p:nvSpPr>
-          <p:cNvPr id="52" name="Google Shape;52;g3af032c298c_0_50:notes">
-            <a:extLst>
-              <a:ext uri="{FF2B5EF4-FFF2-40B4-BE49-F238E27FC236}">
-                <a16:creationId xmlns:a16="http://schemas.microsoft.com/office/drawing/2014/main" id="{8E8A7D87-48A6-B09E-1D12-86864245C54A}"/>
-              </a:ext>
-            </a:extLst>
-          </p:cNvPr>
-          <p:cNvSpPr txBox="1">
-            <a:spLocks noGrp="1"/>
-          </p:cNvSpPr>
-          <p:nvPr>
-            <p:ph type="body" idx="1"/>
-          </p:nvPr>
-        </p:nvSpPr>
-        <p:spPr>
-          <a:xfrm>
-            <a:off x="685800" y="4343400"/>
-            <a:ext cx="5486400" cy="4114800"/>
-          </a:xfrm>
-          <a:prstGeom prst="rect">
-            <a:avLst/>
-          </a:prstGeom>
-        </p:spPr>
-        <p:txBody>
-          <a:bodyPr spcFirstLastPara="1" wrap="square" lIns="91425" tIns="91425" rIns="91425" bIns="91425" anchor="t" anchorCtr="0">
-            <a:noAutofit/>
-          </a:bodyPr>
-          <a:lstStyle/>
-          <a:p>
-            <a:pPr marL="0" lvl="0" indent="0" algn="l" rtl="0">
-              <a:spcBef>
-                <a:spcPts val="0"/>
-              </a:spcBef>
-              <a:spcAft>
-                <a:spcPts val="0"/>
-              </a:spcAft>
-              <a:buNone/>
-            </a:pPr>
-            <a:endParaRPr/>
-          </a:p>
-        </p:txBody>
-      </p:sp>
-    </p:spTree>
-    <p:extLst>
-      <p:ext uri="{BB962C8B-B14F-4D97-AF65-F5344CB8AC3E}">
-        <p14:creationId xmlns:p14="http://schemas.microsoft.com/office/powerpoint/2010/main" val="1067465931"/>
-      </p:ext>
-    </p:extLst>
-  </p:cSld>
-  <p:clrMapOvr>
-    <a:masterClrMapping/>
-  </p:clrMapOvr>
-</p:notes>
-</file>
-
-<file path=ppt/notesSlides/notesSlide19.xml><?xml version="1.0" encoding="utf-8"?>
-<p:notes xmlns:a="http://schemas.openxmlformats.org/drawingml/2006/main" xmlns:r="http://schemas.openxmlformats.org/officeDocument/2006/relationships" xmlns:p="http://schemas.openxmlformats.org/presentationml/2006/main" showMasterSp="0" showMasterPhAnim="0">
-  <p:cSld>
-    <p:spTree>
-      <p:nvGrpSpPr>
-        <p:cNvPr id="1" name="Shape 50">
-          <a:extLst>
-            <a:ext uri="{FF2B5EF4-FFF2-40B4-BE49-F238E27FC236}">
-              <a16:creationId xmlns:a16="http://schemas.microsoft.com/office/drawing/2014/main" id="{7E20C100-ADBA-1FA8-4C09-B9F97B47235D}"/>
-            </a:ext>
-          </a:extLst>
-        </p:cNvPr>
-        <p:cNvGrpSpPr/>
-        <p:nvPr/>
-      </p:nvGrpSpPr>
-      <p:grpSpPr>
-        <a:xfrm>
-          <a:off x="0" y="0"/>
-          <a:ext cx="0" cy="0"/>
-          <a:chOff x="0" y="0"/>
-          <a:chExt cx="0" cy="0"/>
-        </a:xfrm>
-      </p:grpSpPr>
-      <p:sp>
-        <p:nvSpPr>
-          <p:cNvPr id="51" name="Google Shape;51;g3af032c298c_0_50:notes">
-            <a:extLst>
-              <a:ext uri="{FF2B5EF4-FFF2-40B4-BE49-F238E27FC236}">
-                <a16:creationId xmlns:a16="http://schemas.microsoft.com/office/drawing/2014/main" id="{7E420556-1D62-B095-FBD1-62787AEDF75E}"/>
-              </a:ext>
-            </a:extLst>
-          </p:cNvPr>
-          <p:cNvSpPr>
-            <a:spLocks noGrp="1" noRot="1" noChangeAspect="1"/>
-          </p:cNvSpPr>
-          <p:nvPr>
-            <p:ph type="sldImg" idx="2"/>
-          </p:nvPr>
-        </p:nvSpPr>
-        <p:spPr>
-          <a:xfrm>
-            <a:off x="381000" y="685800"/>
-            <a:ext cx="6096000" cy="3429000"/>
-          </a:xfrm>
-          <a:custGeom>
-            <a:avLst/>
-            <a:gdLst/>
-            <a:ahLst/>
-            <a:cxnLst/>
-            <a:rect l="l" t="t" r="r" b="b"/>
-            <a:pathLst>
-              <a:path w="120000" h="120000" extrusionOk="0">
-                <a:moveTo>
-                  <a:pt x="0" y="0"/>
-                </a:moveTo>
-                <a:lnTo>
-                  <a:pt x="120000" y="0"/>
-                </a:lnTo>
-                <a:lnTo>
-                  <a:pt x="120000" y="120000"/>
-                </a:lnTo>
-                <a:lnTo>
-                  <a:pt x="0" y="120000"/>
-                </a:lnTo>
-                <a:close/>
-              </a:path>
-            </a:pathLst>
-          </a:custGeom>
-        </p:spPr>
-      </p:sp>
-      <p:sp>
-        <p:nvSpPr>
-          <p:cNvPr id="52" name="Google Shape;52;g3af032c298c_0_50:notes">
-            <a:extLst>
-              <a:ext uri="{FF2B5EF4-FFF2-40B4-BE49-F238E27FC236}">
-                <a16:creationId xmlns:a16="http://schemas.microsoft.com/office/drawing/2014/main" id="{5C767D97-290B-D677-A870-A3E77B81DF8A}"/>
-              </a:ext>
-            </a:extLst>
-          </p:cNvPr>
-          <p:cNvSpPr txBox="1">
-            <a:spLocks noGrp="1"/>
-          </p:cNvSpPr>
-          <p:nvPr>
-            <p:ph type="body" idx="1"/>
-          </p:nvPr>
-        </p:nvSpPr>
-        <p:spPr>
-          <a:xfrm>
-            <a:off x="685800" y="4343400"/>
-            <a:ext cx="5486400" cy="4114800"/>
-          </a:xfrm>
-          <a:prstGeom prst="rect">
-            <a:avLst/>
-          </a:prstGeom>
-        </p:spPr>
-        <p:txBody>
-          <a:bodyPr spcFirstLastPara="1" wrap="square" lIns="91425" tIns="91425" rIns="91425" bIns="91425" anchor="t" anchorCtr="0">
-            <a:noAutofit/>
-          </a:bodyPr>
-          <a:lstStyle/>
-          <a:p>
-            <a:pPr marL="0" lvl="0" indent="0" algn="l" rtl="0">
-              <a:spcBef>
-                <a:spcPts val="0"/>
-              </a:spcBef>
-              <a:spcAft>
-                <a:spcPts val="0"/>
-              </a:spcAft>
-              <a:buNone/>
-            </a:pPr>
-            <a:endParaRPr/>
-          </a:p>
-        </p:txBody>
-      </p:sp>
-    </p:spTree>
-    <p:extLst>
-      <p:ext uri="{BB962C8B-B14F-4D97-AF65-F5344CB8AC3E}">
-        <p14:creationId xmlns:p14="http://schemas.microsoft.com/office/powerpoint/2010/main" val="676021482"/>
-      </p:ext>
-    </p:extLst>
   </p:cSld>
   <p:clrMapOvr>
     <a:masterClrMapping/>
@@ -2167,1253 +1747,6 @@
       <p:sp>
         <p:nvSpPr>
           <p:cNvPr id="52" name="Google Shape;52;g3af032c298c_0_50:notes"/>
-          <p:cNvSpPr txBox="1">
-            <a:spLocks noGrp="1"/>
-          </p:cNvSpPr>
-          <p:nvPr>
-            <p:ph type="body" idx="1"/>
-          </p:nvPr>
-        </p:nvSpPr>
-        <p:spPr>
-          <a:xfrm>
-            <a:off x="685800" y="4343400"/>
-            <a:ext cx="5486400" cy="4114800"/>
-          </a:xfrm>
-          <a:prstGeom prst="rect">
-            <a:avLst/>
-          </a:prstGeom>
-        </p:spPr>
-        <p:txBody>
-          <a:bodyPr spcFirstLastPara="1" wrap="square" lIns="91425" tIns="91425" rIns="91425" bIns="91425" anchor="t" anchorCtr="0">
-            <a:noAutofit/>
-          </a:bodyPr>
-          <a:lstStyle/>
-          <a:p>
-            <a:pPr marL="0" lvl="0" indent="0" algn="l" rtl="0">
-              <a:spcBef>
-                <a:spcPts val="0"/>
-              </a:spcBef>
-              <a:spcAft>
-                <a:spcPts val="0"/>
-              </a:spcAft>
-              <a:buNone/>
-            </a:pPr>
-            <a:endParaRPr/>
-          </a:p>
-        </p:txBody>
-      </p:sp>
-    </p:spTree>
-  </p:cSld>
-  <p:clrMapOvr>
-    <a:masterClrMapping/>
-  </p:clrMapOvr>
-</p:notes>
-</file>
-
-<file path=ppt/notesSlides/notesSlide20.xml><?xml version="1.0" encoding="utf-8"?>
-<p:notes xmlns:a="http://schemas.openxmlformats.org/drawingml/2006/main" xmlns:r="http://schemas.openxmlformats.org/officeDocument/2006/relationships" xmlns:p="http://schemas.openxmlformats.org/presentationml/2006/main" showMasterSp="0" showMasterPhAnim="0">
-  <p:cSld>
-    <p:spTree>
-      <p:nvGrpSpPr>
-        <p:cNvPr id="1" name="Shape 50">
-          <a:extLst>
-            <a:ext uri="{FF2B5EF4-FFF2-40B4-BE49-F238E27FC236}">
-              <a16:creationId xmlns:a16="http://schemas.microsoft.com/office/drawing/2014/main" id="{B205CED2-3C3A-67C8-C48A-E7A27F4B3490}"/>
-            </a:ext>
-          </a:extLst>
-        </p:cNvPr>
-        <p:cNvGrpSpPr/>
-        <p:nvPr/>
-      </p:nvGrpSpPr>
-      <p:grpSpPr>
-        <a:xfrm>
-          <a:off x="0" y="0"/>
-          <a:ext cx="0" cy="0"/>
-          <a:chOff x="0" y="0"/>
-          <a:chExt cx="0" cy="0"/>
-        </a:xfrm>
-      </p:grpSpPr>
-      <p:sp>
-        <p:nvSpPr>
-          <p:cNvPr id="51" name="Google Shape;51;g3af032c298c_0_50:notes">
-            <a:extLst>
-              <a:ext uri="{FF2B5EF4-FFF2-40B4-BE49-F238E27FC236}">
-                <a16:creationId xmlns:a16="http://schemas.microsoft.com/office/drawing/2014/main" id="{7B192ACD-4B35-92A3-9660-1738616A51A7}"/>
-              </a:ext>
-            </a:extLst>
-          </p:cNvPr>
-          <p:cNvSpPr>
-            <a:spLocks noGrp="1" noRot="1" noChangeAspect="1"/>
-          </p:cNvSpPr>
-          <p:nvPr>
-            <p:ph type="sldImg" idx="2"/>
-          </p:nvPr>
-        </p:nvSpPr>
-        <p:spPr>
-          <a:xfrm>
-            <a:off x="381000" y="685800"/>
-            <a:ext cx="6096000" cy="3429000"/>
-          </a:xfrm>
-          <a:custGeom>
-            <a:avLst/>
-            <a:gdLst/>
-            <a:ahLst/>
-            <a:cxnLst/>
-            <a:rect l="l" t="t" r="r" b="b"/>
-            <a:pathLst>
-              <a:path w="120000" h="120000" extrusionOk="0">
-                <a:moveTo>
-                  <a:pt x="0" y="0"/>
-                </a:moveTo>
-                <a:lnTo>
-                  <a:pt x="120000" y="0"/>
-                </a:lnTo>
-                <a:lnTo>
-                  <a:pt x="120000" y="120000"/>
-                </a:lnTo>
-                <a:lnTo>
-                  <a:pt x="0" y="120000"/>
-                </a:lnTo>
-                <a:close/>
-              </a:path>
-            </a:pathLst>
-          </a:custGeom>
-        </p:spPr>
-      </p:sp>
-      <p:sp>
-        <p:nvSpPr>
-          <p:cNvPr id="52" name="Google Shape;52;g3af032c298c_0_50:notes">
-            <a:extLst>
-              <a:ext uri="{FF2B5EF4-FFF2-40B4-BE49-F238E27FC236}">
-                <a16:creationId xmlns:a16="http://schemas.microsoft.com/office/drawing/2014/main" id="{45B06EBC-0DD0-21AA-855E-C37E4AC41EB9}"/>
-              </a:ext>
-            </a:extLst>
-          </p:cNvPr>
-          <p:cNvSpPr txBox="1">
-            <a:spLocks noGrp="1"/>
-          </p:cNvSpPr>
-          <p:nvPr>
-            <p:ph type="body" idx="1"/>
-          </p:nvPr>
-        </p:nvSpPr>
-        <p:spPr>
-          <a:xfrm>
-            <a:off x="685800" y="4343400"/>
-            <a:ext cx="5486400" cy="4114800"/>
-          </a:xfrm>
-          <a:prstGeom prst="rect">
-            <a:avLst/>
-          </a:prstGeom>
-        </p:spPr>
-        <p:txBody>
-          <a:bodyPr spcFirstLastPara="1" wrap="square" lIns="91425" tIns="91425" rIns="91425" bIns="91425" anchor="t" anchorCtr="0">
-            <a:noAutofit/>
-          </a:bodyPr>
-          <a:lstStyle/>
-          <a:p>
-            <a:pPr marL="0" lvl="0" indent="0" algn="l" rtl="0">
-              <a:spcBef>
-                <a:spcPts val="0"/>
-              </a:spcBef>
-              <a:spcAft>
-                <a:spcPts val="0"/>
-              </a:spcAft>
-              <a:buNone/>
-            </a:pPr>
-            <a:endParaRPr/>
-          </a:p>
-        </p:txBody>
-      </p:sp>
-    </p:spTree>
-    <p:extLst>
-      <p:ext uri="{BB962C8B-B14F-4D97-AF65-F5344CB8AC3E}">
-        <p14:creationId xmlns:p14="http://schemas.microsoft.com/office/powerpoint/2010/main" val="3738649212"/>
-      </p:ext>
-    </p:extLst>
-  </p:cSld>
-  <p:clrMapOvr>
-    <a:masterClrMapping/>
-  </p:clrMapOvr>
-</p:notes>
-</file>
-
-<file path=ppt/notesSlides/notesSlide21.xml><?xml version="1.0" encoding="utf-8"?>
-<p:notes xmlns:a="http://schemas.openxmlformats.org/drawingml/2006/main" xmlns:r="http://schemas.openxmlformats.org/officeDocument/2006/relationships" xmlns:p="http://schemas.openxmlformats.org/presentationml/2006/main" showMasterSp="0" showMasterPhAnim="0">
-  <p:cSld>
-    <p:spTree>
-      <p:nvGrpSpPr>
-        <p:cNvPr id="1" name="Shape 50">
-          <a:extLst>
-            <a:ext uri="{FF2B5EF4-FFF2-40B4-BE49-F238E27FC236}">
-              <a16:creationId xmlns:a16="http://schemas.microsoft.com/office/drawing/2014/main" id="{01AAEBD6-9B6E-A846-6962-A96901A0E803}"/>
-            </a:ext>
-          </a:extLst>
-        </p:cNvPr>
-        <p:cNvGrpSpPr/>
-        <p:nvPr/>
-      </p:nvGrpSpPr>
-      <p:grpSpPr>
-        <a:xfrm>
-          <a:off x="0" y="0"/>
-          <a:ext cx="0" cy="0"/>
-          <a:chOff x="0" y="0"/>
-          <a:chExt cx="0" cy="0"/>
-        </a:xfrm>
-      </p:grpSpPr>
-      <p:sp>
-        <p:nvSpPr>
-          <p:cNvPr id="51" name="Google Shape;51;g3af032c298c_0_50:notes">
-            <a:extLst>
-              <a:ext uri="{FF2B5EF4-FFF2-40B4-BE49-F238E27FC236}">
-                <a16:creationId xmlns:a16="http://schemas.microsoft.com/office/drawing/2014/main" id="{DDBF6CE7-E6F2-3F8F-BB36-B809CC154675}"/>
-              </a:ext>
-            </a:extLst>
-          </p:cNvPr>
-          <p:cNvSpPr>
-            <a:spLocks noGrp="1" noRot="1" noChangeAspect="1"/>
-          </p:cNvSpPr>
-          <p:nvPr>
-            <p:ph type="sldImg" idx="2"/>
-          </p:nvPr>
-        </p:nvSpPr>
-        <p:spPr>
-          <a:xfrm>
-            <a:off x="381000" y="685800"/>
-            <a:ext cx="6096000" cy="3429000"/>
-          </a:xfrm>
-          <a:custGeom>
-            <a:avLst/>
-            <a:gdLst/>
-            <a:ahLst/>
-            <a:cxnLst/>
-            <a:rect l="l" t="t" r="r" b="b"/>
-            <a:pathLst>
-              <a:path w="120000" h="120000" extrusionOk="0">
-                <a:moveTo>
-                  <a:pt x="0" y="0"/>
-                </a:moveTo>
-                <a:lnTo>
-                  <a:pt x="120000" y="0"/>
-                </a:lnTo>
-                <a:lnTo>
-                  <a:pt x="120000" y="120000"/>
-                </a:lnTo>
-                <a:lnTo>
-                  <a:pt x="0" y="120000"/>
-                </a:lnTo>
-                <a:close/>
-              </a:path>
-            </a:pathLst>
-          </a:custGeom>
-        </p:spPr>
-      </p:sp>
-      <p:sp>
-        <p:nvSpPr>
-          <p:cNvPr id="52" name="Google Shape;52;g3af032c298c_0_50:notes">
-            <a:extLst>
-              <a:ext uri="{FF2B5EF4-FFF2-40B4-BE49-F238E27FC236}">
-                <a16:creationId xmlns:a16="http://schemas.microsoft.com/office/drawing/2014/main" id="{C9DDF69B-58CE-BB3B-FD8E-3FABBC4E773D}"/>
-              </a:ext>
-            </a:extLst>
-          </p:cNvPr>
-          <p:cNvSpPr txBox="1">
-            <a:spLocks noGrp="1"/>
-          </p:cNvSpPr>
-          <p:nvPr>
-            <p:ph type="body" idx="1"/>
-          </p:nvPr>
-        </p:nvSpPr>
-        <p:spPr>
-          <a:xfrm>
-            <a:off x="685800" y="4343400"/>
-            <a:ext cx="5486400" cy="4114800"/>
-          </a:xfrm>
-          <a:prstGeom prst="rect">
-            <a:avLst/>
-          </a:prstGeom>
-        </p:spPr>
-        <p:txBody>
-          <a:bodyPr spcFirstLastPara="1" wrap="square" lIns="91425" tIns="91425" rIns="91425" bIns="91425" anchor="t" anchorCtr="0">
-            <a:noAutofit/>
-          </a:bodyPr>
-          <a:lstStyle/>
-          <a:p>
-            <a:pPr marL="0" lvl="0" indent="0" algn="l" rtl="0">
-              <a:spcBef>
-                <a:spcPts val="0"/>
-              </a:spcBef>
-              <a:spcAft>
-                <a:spcPts val="0"/>
-              </a:spcAft>
-              <a:buNone/>
-            </a:pPr>
-            <a:endParaRPr/>
-          </a:p>
-        </p:txBody>
-      </p:sp>
-    </p:spTree>
-    <p:extLst>
-      <p:ext uri="{BB962C8B-B14F-4D97-AF65-F5344CB8AC3E}">
-        <p14:creationId xmlns:p14="http://schemas.microsoft.com/office/powerpoint/2010/main" val="1463425744"/>
-      </p:ext>
-    </p:extLst>
-  </p:cSld>
-  <p:clrMapOvr>
-    <a:masterClrMapping/>
-  </p:clrMapOvr>
-</p:notes>
-</file>
-
-<file path=ppt/notesSlides/notesSlide22.xml><?xml version="1.0" encoding="utf-8"?>
-<p:notes xmlns:a="http://schemas.openxmlformats.org/drawingml/2006/main" xmlns:r="http://schemas.openxmlformats.org/officeDocument/2006/relationships" xmlns:p="http://schemas.openxmlformats.org/presentationml/2006/main" showMasterSp="0" showMasterPhAnim="0">
-  <p:cSld>
-    <p:spTree>
-      <p:nvGrpSpPr>
-        <p:cNvPr id="1" name="Shape 50">
-          <a:extLst>
-            <a:ext uri="{FF2B5EF4-FFF2-40B4-BE49-F238E27FC236}">
-              <a16:creationId xmlns:a16="http://schemas.microsoft.com/office/drawing/2014/main" id="{7581C004-5E47-D6BD-411F-674E3339374A}"/>
-            </a:ext>
-          </a:extLst>
-        </p:cNvPr>
-        <p:cNvGrpSpPr/>
-        <p:nvPr/>
-      </p:nvGrpSpPr>
-      <p:grpSpPr>
-        <a:xfrm>
-          <a:off x="0" y="0"/>
-          <a:ext cx="0" cy="0"/>
-          <a:chOff x="0" y="0"/>
-          <a:chExt cx="0" cy="0"/>
-        </a:xfrm>
-      </p:grpSpPr>
-      <p:sp>
-        <p:nvSpPr>
-          <p:cNvPr id="51" name="Google Shape;51;g3af032c298c_0_50:notes">
-            <a:extLst>
-              <a:ext uri="{FF2B5EF4-FFF2-40B4-BE49-F238E27FC236}">
-                <a16:creationId xmlns:a16="http://schemas.microsoft.com/office/drawing/2014/main" id="{872B4068-DC21-B90D-25D8-6E765A5C9095}"/>
-              </a:ext>
-            </a:extLst>
-          </p:cNvPr>
-          <p:cNvSpPr>
-            <a:spLocks noGrp="1" noRot="1" noChangeAspect="1"/>
-          </p:cNvSpPr>
-          <p:nvPr>
-            <p:ph type="sldImg" idx="2"/>
-          </p:nvPr>
-        </p:nvSpPr>
-        <p:spPr>
-          <a:xfrm>
-            <a:off x="381000" y="685800"/>
-            <a:ext cx="6096000" cy="3429000"/>
-          </a:xfrm>
-          <a:custGeom>
-            <a:avLst/>
-            <a:gdLst/>
-            <a:ahLst/>
-            <a:cxnLst/>
-            <a:rect l="l" t="t" r="r" b="b"/>
-            <a:pathLst>
-              <a:path w="120000" h="120000" extrusionOk="0">
-                <a:moveTo>
-                  <a:pt x="0" y="0"/>
-                </a:moveTo>
-                <a:lnTo>
-                  <a:pt x="120000" y="0"/>
-                </a:lnTo>
-                <a:lnTo>
-                  <a:pt x="120000" y="120000"/>
-                </a:lnTo>
-                <a:lnTo>
-                  <a:pt x="0" y="120000"/>
-                </a:lnTo>
-                <a:close/>
-              </a:path>
-            </a:pathLst>
-          </a:custGeom>
-        </p:spPr>
-      </p:sp>
-      <p:sp>
-        <p:nvSpPr>
-          <p:cNvPr id="52" name="Google Shape;52;g3af032c298c_0_50:notes">
-            <a:extLst>
-              <a:ext uri="{FF2B5EF4-FFF2-40B4-BE49-F238E27FC236}">
-                <a16:creationId xmlns:a16="http://schemas.microsoft.com/office/drawing/2014/main" id="{57BD29AB-57A0-3C16-5C83-72BD9C26F285}"/>
-              </a:ext>
-            </a:extLst>
-          </p:cNvPr>
-          <p:cNvSpPr txBox="1">
-            <a:spLocks noGrp="1"/>
-          </p:cNvSpPr>
-          <p:nvPr>
-            <p:ph type="body" idx="1"/>
-          </p:nvPr>
-        </p:nvSpPr>
-        <p:spPr>
-          <a:xfrm>
-            <a:off x="685800" y="4343400"/>
-            <a:ext cx="5486400" cy="4114800"/>
-          </a:xfrm>
-          <a:prstGeom prst="rect">
-            <a:avLst/>
-          </a:prstGeom>
-        </p:spPr>
-        <p:txBody>
-          <a:bodyPr spcFirstLastPara="1" wrap="square" lIns="91425" tIns="91425" rIns="91425" bIns="91425" anchor="t" anchorCtr="0">
-            <a:noAutofit/>
-          </a:bodyPr>
-          <a:lstStyle/>
-          <a:p>
-            <a:pPr marL="0" lvl="0" indent="0" algn="l" rtl="0">
-              <a:spcBef>
-                <a:spcPts val="0"/>
-              </a:spcBef>
-              <a:spcAft>
-                <a:spcPts val="0"/>
-              </a:spcAft>
-              <a:buNone/>
-            </a:pPr>
-            <a:endParaRPr/>
-          </a:p>
-        </p:txBody>
-      </p:sp>
-    </p:spTree>
-    <p:extLst>
-      <p:ext uri="{BB962C8B-B14F-4D97-AF65-F5344CB8AC3E}">
-        <p14:creationId xmlns:p14="http://schemas.microsoft.com/office/powerpoint/2010/main" val="2071908142"/>
-      </p:ext>
-    </p:extLst>
-  </p:cSld>
-  <p:clrMapOvr>
-    <a:masterClrMapping/>
-  </p:clrMapOvr>
-</p:notes>
-</file>
-
-<file path=ppt/notesSlides/notesSlide23.xml><?xml version="1.0" encoding="utf-8"?>
-<p:notes xmlns:a="http://schemas.openxmlformats.org/drawingml/2006/main" xmlns:r="http://schemas.openxmlformats.org/officeDocument/2006/relationships" xmlns:p="http://schemas.openxmlformats.org/presentationml/2006/main" showMasterSp="0" showMasterPhAnim="0">
-  <p:cSld>
-    <p:spTree>
-      <p:nvGrpSpPr>
-        <p:cNvPr id="1" name="Shape 50">
-          <a:extLst>
-            <a:ext uri="{FF2B5EF4-FFF2-40B4-BE49-F238E27FC236}">
-              <a16:creationId xmlns:a16="http://schemas.microsoft.com/office/drawing/2014/main" id="{7F517F03-DFA7-88BA-FD76-B65EB13A01E0}"/>
-            </a:ext>
-          </a:extLst>
-        </p:cNvPr>
-        <p:cNvGrpSpPr/>
-        <p:nvPr/>
-      </p:nvGrpSpPr>
-      <p:grpSpPr>
-        <a:xfrm>
-          <a:off x="0" y="0"/>
-          <a:ext cx="0" cy="0"/>
-          <a:chOff x="0" y="0"/>
-          <a:chExt cx="0" cy="0"/>
-        </a:xfrm>
-      </p:grpSpPr>
-      <p:sp>
-        <p:nvSpPr>
-          <p:cNvPr id="51" name="Google Shape;51;g3af032c298c_0_50:notes">
-            <a:extLst>
-              <a:ext uri="{FF2B5EF4-FFF2-40B4-BE49-F238E27FC236}">
-                <a16:creationId xmlns:a16="http://schemas.microsoft.com/office/drawing/2014/main" id="{6D8F3BF2-86E7-7D67-9A65-C3C9E18A713C}"/>
-              </a:ext>
-            </a:extLst>
-          </p:cNvPr>
-          <p:cNvSpPr>
-            <a:spLocks noGrp="1" noRot="1" noChangeAspect="1"/>
-          </p:cNvSpPr>
-          <p:nvPr>
-            <p:ph type="sldImg" idx="2"/>
-          </p:nvPr>
-        </p:nvSpPr>
-        <p:spPr>
-          <a:xfrm>
-            <a:off x="381000" y="685800"/>
-            <a:ext cx="6096000" cy="3429000"/>
-          </a:xfrm>
-          <a:custGeom>
-            <a:avLst/>
-            <a:gdLst/>
-            <a:ahLst/>
-            <a:cxnLst/>
-            <a:rect l="l" t="t" r="r" b="b"/>
-            <a:pathLst>
-              <a:path w="120000" h="120000" extrusionOk="0">
-                <a:moveTo>
-                  <a:pt x="0" y="0"/>
-                </a:moveTo>
-                <a:lnTo>
-                  <a:pt x="120000" y="0"/>
-                </a:lnTo>
-                <a:lnTo>
-                  <a:pt x="120000" y="120000"/>
-                </a:lnTo>
-                <a:lnTo>
-                  <a:pt x="0" y="120000"/>
-                </a:lnTo>
-                <a:close/>
-              </a:path>
-            </a:pathLst>
-          </a:custGeom>
-        </p:spPr>
-      </p:sp>
-      <p:sp>
-        <p:nvSpPr>
-          <p:cNvPr id="52" name="Google Shape;52;g3af032c298c_0_50:notes">
-            <a:extLst>
-              <a:ext uri="{FF2B5EF4-FFF2-40B4-BE49-F238E27FC236}">
-                <a16:creationId xmlns:a16="http://schemas.microsoft.com/office/drawing/2014/main" id="{13F2A3CD-B283-58D3-EB45-0BBA7AC7C44F}"/>
-              </a:ext>
-            </a:extLst>
-          </p:cNvPr>
-          <p:cNvSpPr txBox="1">
-            <a:spLocks noGrp="1"/>
-          </p:cNvSpPr>
-          <p:nvPr>
-            <p:ph type="body" idx="1"/>
-          </p:nvPr>
-        </p:nvSpPr>
-        <p:spPr>
-          <a:xfrm>
-            <a:off x="685800" y="4343400"/>
-            <a:ext cx="5486400" cy="4114800"/>
-          </a:xfrm>
-          <a:prstGeom prst="rect">
-            <a:avLst/>
-          </a:prstGeom>
-        </p:spPr>
-        <p:txBody>
-          <a:bodyPr spcFirstLastPara="1" wrap="square" lIns="91425" tIns="91425" rIns="91425" bIns="91425" anchor="t" anchorCtr="0">
-            <a:noAutofit/>
-          </a:bodyPr>
-          <a:lstStyle/>
-          <a:p>
-            <a:pPr marL="0" lvl="0" indent="0" algn="l" rtl="0">
-              <a:spcBef>
-                <a:spcPts val="0"/>
-              </a:spcBef>
-              <a:spcAft>
-                <a:spcPts val="0"/>
-              </a:spcAft>
-              <a:buNone/>
-            </a:pPr>
-            <a:endParaRPr/>
-          </a:p>
-        </p:txBody>
-      </p:sp>
-    </p:spTree>
-    <p:extLst>
-      <p:ext uri="{BB962C8B-B14F-4D97-AF65-F5344CB8AC3E}">
-        <p14:creationId xmlns:p14="http://schemas.microsoft.com/office/powerpoint/2010/main" val="3582330643"/>
-      </p:ext>
-    </p:extLst>
-  </p:cSld>
-  <p:clrMapOvr>
-    <a:masterClrMapping/>
-  </p:clrMapOvr>
-</p:notes>
-</file>
-
-<file path=ppt/notesSlides/notesSlide24.xml><?xml version="1.0" encoding="utf-8"?>
-<p:notes xmlns:a="http://schemas.openxmlformats.org/drawingml/2006/main" xmlns:r="http://schemas.openxmlformats.org/officeDocument/2006/relationships" xmlns:p="http://schemas.openxmlformats.org/presentationml/2006/main" showMasterSp="0" showMasterPhAnim="0">
-  <p:cSld>
-    <p:spTree>
-      <p:nvGrpSpPr>
-        <p:cNvPr id="1" name="Shape 50">
-          <a:extLst>
-            <a:ext uri="{FF2B5EF4-FFF2-40B4-BE49-F238E27FC236}">
-              <a16:creationId xmlns:a16="http://schemas.microsoft.com/office/drawing/2014/main" id="{770B596B-6591-B56A-185C-D1783B42EFB1}"/>
-            </a:ext>
-          </a:extLst>
-        </p:cNvPr>
-        <p:cNvGrpSpPr/>
-        <p:nvPr/>
-      </p:nvGrpSpPr>
-      <p:grpSpPr>
-        <a:xfrm>
-          <a:off x="0" y="0"/>
-          <a:ext cx="0" cy="0"/>
-          <a:chOff x="0" y="0"/>
-          <a:chExt cx="0" cy="0"/>
-        </a:xfrm>
-      </p:grpSpPr>
-      <p:sp>
-        <p:nvSpPr>
-          <p:cNvPr id="51" name="Google Shape;51;g3af032c298c_0_50:notes">
-            <a:extLst>
-              <a:ext uri="{FF2B5EF4-FFF2-40B4-BE49-F238E27FC236}">
-                <a16:creationId xmlns:a16="http://schemas.microsoft.com/office/drawing/2014/main" id="{A566358C-50B4-B4C5-220B-AC8A0DC3213A}"/>
-              </a:ext>
-            </a:extLst>
-          </p:cNvPr>
-          <p:cNvSpPr>
-            <a:spLocks noGrp="1" noRot="1" noChangeAspect="1"/>
-          </p:cNvSpPr>
-          <p:nvPr>
-            <p:ph type="sldImg" idx="2"/>
-          </p:nvPr>
-        </p:nvSpPr>
-        <p:spPr>
-          <a:xfrm>
-            <a:off x="381000" y="685800"/>
-            <a:ext cx="6096000" cy="3429000"/>
-          </a:xfrm>
-          <a:custGeom>
-            <a:avLst/>
-            <a:gdLst/>
-            <a:ahLst/>
-            <a:cxnLst/>
-            <a:rect l="l" t="t" r="r" b="b"/>
-            <a:pathLst>
-              <a:path w="120000" h="120000" extrusionOk="0">
-                <a:moveTo>
-                  <a:pt x="0" y="0"/>
-                </a:moveTo>
-                <a:lnTo>
-                  <a:pt x="120000" y="0"/>
-                </a:lnTo>
-                <a:lnTo>
-                  <a:pt x="120000" y="120000"/>
-                </a:lnTo>
-                <a:lnTo>
-                  <a:pt x="0" y="120000"/>
-                </a:lnTo>
-                <a:close/>
-              </a:path>
-            </a:pathLst>
-          </a:custGeom>
-        </p:spPr>
-      </p:sp>
-      <p:sp>
-        <p:nvSpPr>
-          <p:cNvPr id="52" name="Google Shape;52;g3af032c298c_0_50:notes">
-            <a:extLst>
-              <a:ext uri="{FF2B5EF4-FFF2-40B4-BE49-F238E27FC236}">
-                <a16:creationId xmlns:a16="http://schemas.microsoft.com/office/drawing/2014/main" id="{BB676E75-979D-0548-595D-BAAF4190FDD8}"/>
-              </a:ext>
-            </a:extLst>
-          </p:cNvPr>
-          <p:cNvSpPr txBox="1">
-            <a:spLocks noGrp="1"/>
-          </p:cNvSpPr>
-          <p:nvPr>
-            <p:ph type="body" idx="1"/>
-          </p:nvPr>
-        </p:nvSpPr>
-        <p:spPr>
-          <a:xfrm>
-            <a:off x="685800" y="4343400"/>
-            <a:ext cx="5486400" cy="4114800"/>
-          </a:xfrm>
-          <a:prstGeom prst="rect">
-            <a:avLst/>
-          </a:prstGeom>
-        </p:spPr>
-        <p:txBody>
-          <a:bodyPr spcFirstLastPara="1" wrap="square" lIns="91425" tIns="91425" rIns="91425" bIns="91425" anchor="t" anchorCtr="0">
-            <a:noAutofit/>
-          </a:bodyPr>
-          <a:lstStyle/>
-          <a:p>
-            <a:pPr marL="0" lvl="0" indent="0" algn="l" rtl="0">
-              <a:spcBef>
-                <a:spcPts val="0"/>
-              </a:spcBef>
-              <a:spcAft>
-                <a:spcPts val="0"/>
-              </a:spcAft>
-              <a:buNone/>
-            </a:pPr>
-            <a:endParaRPr/>
-          </a:p>
-        </p:txBody>
-      </p:sp>
-    </p:spTree>
-    <p:extLst>
-      <p:ext uri="{BB962C8B-B14F-4D97-AF65-F5344CB8AC3E}">
-        <p14:creationId xmlns:p14="http://schemas.microsoft.com/office/powerpoint/2010/main" val="402140020"/>
-      </p:ext>
-    </p:extLst>
-  </p:cSld>
-  <p:clrMapOvr>
-    <a:masterClrMapping/>
-  </p:clrMapOvr>
-</p:notes>
-</file>
-
-<file path=ppt/notesSlides/notesSlide25.xml><?xml version="1.0" encoding="utf-8"?>
-<p:notes xmlns:a="http://schemas.openxmlformats.org/drawingml/2006/main" xmlns:r="http://schemas.openxmlformats.org/officeDocument/2006/relationships" xmlns:p="http://schemas.openxmlformats.org/presentationml/2006/main" showMasterSp="0" showMasterPhAnim="0">
-  <p:cSld>
-    <p:spTree>
-      <p:nvGrpSpPr>
-        <p:cNvPr id="1" name="Shape 50">
-          <a:extLst>
-            <a:ext uri="{FF2B5EF4-FFF2-40B4-BE49-F238E27FC236}">
-              <a16:creationId xmlns:a16="http://schemas.microsoft.com/office/drawing/2014/main" id="{1F4AB6F7-87EC-B420-9992-856E3BEA8B90}"/>
-            </a:ext>
-          </a:extLst>
-        </p:cNvPr>
-        <p:cNvGrpSpPr/>
-        <p:nvPr/>
-      </p:nvGrpSpPr>
-      <p:grpSpPr>
-        <a:xfrm>
-          <a:off x="0" y="0"/>
-          <a:ext cx="0" cy="0"/>
-          <a:chOff x="0" y="0"/>
-          <a:chExt cx="0" cy="0"/>
-        </a:xfrm>
-      </p:grpSpPr>
-      <p:sp>
-        <p:nvSpPr>
-          <p:cNvPr id="51" name="Google Shape;51;g3af032c298c_0_50:notes">
-            <a:extLst>
-              <a:ext uri="{FF2B5EF4-FFF2-40B4-BE49-F238E27FC236}">
-                <a16:creationId xmlns:a16="http://schemas.microsoft.com/office/drawing/2014/main" id="{17C565D0-5B89-69DD-F2DC-0527020B7B67}"/>
-              </a:ext>
-            </a:extLst>
-          </p:cNvPr>
-          <p:cNvSpPr>
-            <a:spLocks noGrp="1" noRot="1" noChangeAspect="1"/>
-          </p:cNvSpPr>
-          <p:nvPr>
-            <p:ph type="sldImg" idx="2"/>
-          </p:nvPr>
-        </p:nvSpPr>
-        <p:spPr>
-          <a:xfrm>
-            <a:off x="381000" y="685800"/>
-            <a:ext cx="6096000" cy="3429000"/>
-          </a:xfrm>
-          <a:custGeom>
-            <a:avLst/>
-            <a:gdLst/>
-            <a:ahLst/>
-            <a:cxnLst/>
-            <a:rect l="l" t="t" r="r" b="b"/>
-            <a:pathLst>
-              <a:path w="120000" h="120000" extrusionOk="0">
-                <a:moveTo>
-                  <a:pt x="0" y="0"/>
-                </a:moveTo>
-                <a:lnTo>
-                  <a:pt x="120000" y="0"/>
-                </a:lnTo>
-                <a:lnTo>
-                  <a:pt x="120000" y="120000"/>
-                </a:lnTo>
-                <a:lnTo>
-                  <a:pt x="0" y="120000"/>
-                </a:lnTo>
-                <a:close/>
-              </a:path>
-            </a:pathLst>
-          </a:custGeom>
-        </p:spPr>
-      </p:sp>
-      <p:sp>
-        <p:nvSpPr>
-          <p:cNvPr id="52" name="Google Shape;52;g3af032c298c_0_50:notes">
-            <a:extLst>
-              <a:ext uri="{FF2B5EF4-FFF2-40B4-BE49-F238E27FC236}">
-                <a16:creationId xmlns:a16="http://schemas.microsoft.com/office/drawing/2014/main" id="{C71E87A4-2DE6-004D-152A-F6ABEC61182A}"/>
-              </a:ext>
-            </a:extLst>
-          </p:cNvPr>
-          <p:cNvSpPr txBox="1">
-            <a:spLocks noGrp="1"/>
-          </p:cNvSpPr>
-          <p:nvPr>
-            <p:ph type="body" idx="1"/>
-          </p:nvPr>
-        </p:nvSpPr>
-        <p:spPr>
-          <a:xfrm>
-            <a:off x="685800" y="4343400"/>
-            <a:ext cx="5486400" cy="4114800"/>
-          </a:xfrm>
-          <a:prstGeom prst="rect">
-            <a:avLst/>
-          </a:prstGeom>
-        </p:spPr>
-        <p:txBody>
-          <a:bodyPr spcFirstLastPara="1" wrap="square" lIns="91425" tIns="91425" rIns="91425" bIns="91425" anchor="t" anchorCtr="0">
-            <a:noAutofit/>
-          </a:bodyPr>
-          <a:lstStyle/>
-          <a:p>
-            <a:pPr marL="0" lvl="0" indent="0" algn="l" rtl="0">
-              <a:spcBef>
-                <a:spcPts val="0"/>
-              </a:spcBef>
-              <a:spcAft>
-                <a:spcPts val="0"/>
-              </a:spcAft>
-              <a:buNone/>
-            </a:pPr>
-            <a:endParaRPr/>
-          </a:p>
-        </p:txBody>
-      </p:sp>
-    </p:spTree>
-    <p:extLst>
-      <p:ext uri="{BB962C8B-B14F-4D97-AF65-F5344CB8AC3E}">
-        <p14:creationId xmlns:p14="http://schemas.microsoft.com/office/powerpoint/2010/main" val="3473779054"/>
-      </p:ext>
-    </p:extLst>
-  </p:cSld>
-  <p:clrMapOvr>
-    <a:masterClrMapping/>
-  </p:clrMapOvr>
-</p:notes>
-</file>
-
-<file path=ppt/notesSlides/notesSlide26.xml><?xml version="1.0" encoding="utf-8"?>
-<p:notes xmlns:a="http://schemas.openxmlformats.org/drawingml/2006/main" xmlns:r="http://schemas.openxmlformats.org/officeDocument/2006/relationships" xmlns:p="http://schemas.openxmlformats.org/presentationml/2006/main" showMasterSp="0" showMasterPhAnim="0">
-  <p:cSld>
-    <p:spTree>
-      <p:nvGrpSpPr>
-        <p:cNvPr id="1" name="Shape 50">
-          <a:extLst>
-            <a:ext uri="{FF2B5EF4-FFF2-40B4-BE49-F238E27FC236}">
-              <a16:creationId xmlns:a16="http://schemas.microsoft.com/office/drawing/2014/main" id="{19F3F661-DB49-F98A-339A-1568F0E573A9}"/>
-            </a:ext>
-          </a:extLst>
-        </p:cNvPr>
-        <p:cNvGrpSpPr/>
-        <p:nvPr/>
-      </p:nvGrpSpPr>
-      <p:grpSpPr>
-        <a:xfrm>
-          <a:off x="0" y="0"/>
-          <a:ext cx="0" cy="0"/>
-          <a:chOff x="0" y="0"/>
-          <a:chExt cx="0" cy="0"/>
-        </a:xfrm>
-      </p:grpSpPr>
-      <p:sp>
-        <p:nvSpPr>
-          <p:cNvPr id="51" name="Google Shape;51;g3af032c298c_0_50:notes">
-            <a:extLst>
-              <a:ext uri="{FF2B5EF4-FFF2-40B4-BE49-F238E27FC236}">
-                <a16:creationId xmlns:a16="http://schemas.microsoft.com/office/drawing/2014/main" id="{7093C805-DB59-F932-21F4-35C0DBAB4FF5}"/>
-              </a:ext>
-            </a:extLst>
-          </p:cNvPr>
-          <p:cNvSpPr>
-            <a:spLocks noGrp="1" noRot="1" noChangeAspect="1"/>
-          </p:cNvSpPr>
-          <p:nvPr>
-            <p:ph type="sldImg" idx="2"/>
-          </p:nvPr>
-        </p:nvSpPr>
-        <p:spPr>
-          <a:xfrm>
-            <a:off x="381000" y="685800"/>
-            <a:ext cx="6096000" cy="3429000"/>
-          </a:xfrm>
-          <a:custGeom>
-            <a:avLst/>
-            <a:gdLst/>
-            <a:ahLst/>
-            <a:cxnLst/>
-            <a:rect l="l" t="t" r="r" b="b"/>
-            <a:pathLst>
-              <a:path w="120000" h="120000" extrusionOk="0">
-                <a:moveTo>
-                  <a:pt x="0" y="0"/>
-                </a:moveTo>
-                <a:lnTo>
-                  <a:pt x="120000" y="0"/>
-                </a:lnTo>
-                <a:lnTo>
-                  <a:pt x="120000" y="120000"/>
-                </a:lnTo>
-                <a:lnTo>
-                  <a:pt x="0" y="120000"/>
-                </a:lnTo>
-                <a:close/>
-              </a:path>
-            </a:pathLst>
-          </a:custGeom>
-        </p:spPr>
-      </p:sp>
-      <p:sp>
-        <p:nvSpPr>
-          <p:cNvPr id="52" name="Google Shape;52;g3af032c298c_0_50:notes">
-            <a:extLst>
-              <a:ext uri="{FF2B5EF4-FFF2-40B4-BE49-F238E27FC236}">
-                <a16:creationId xmlns:a16="http://schemas.microsoft.com/office/drawing/2014/main" id="{7FBEB75E-24E0-0C19-B08B-5DC8523922C4}"/>
-              </a:ext>
-            </a:extLst>
-          </p:cNvPr>
-          <p:cNvSpPr txBox="1">
-            <a:spLocks noGrp="1"/>
-          </p:cNvSpPr>
-          <p:nvPr>
-            <p:ph type="body" idx="1"/>
-          </p:nvPr>
-        </p:nvSpPr>
-        <p:spPr>
-          <a:xfrm>
-            <a:off x="685800" y="4343400"/>
-            <a:ext cx="5486400" cy="4114800"/>
-          </a:xfrm>
-          <a:prstGeom prst="rect">
-            <a:avLst/>
-          </a:prstGeom>
-        </p:spPr>
-        <p:txBody>
-          <a:bodyPr spcFirstLastPara="1" wrap="square" lIns="91425" tIns="91425" rIns="91425" bIns="91425" anchor="t" anchorCtr="0">
-            <a:noAutofit/>
-          </a:bodyPr>
-          <a:lstStyle/>
-          <a:p>
-            <a:pPr marL="0" lvl="0" indent="0" algn="l" rtl="0">
-              <a:spcBef>
-                <a:spcPts val="0"/>
-              </a:spcBef>
-              <a:spcAft>
-                <a:spcPts val="0"/>
-              </a:spcAft>
-              <a:buNone/>
-            </a:pPr>
-            <a:endParaRPr/>
-          </a:p>
-        </p:txBody>
-      </p:sp>
-    </p:spTree>
-    <p:extLst>
-      <p:ext uri="{BB962C8B-B14F-4D97-AF65-F5344CB8AC3E}">
-        <p14:creationId xmlns:p14="http://schemas.microsoft.com/office/powerpoint/2010/main" val="2450224182"/>
-      </p:ext>
-    </p:extLst>
-  </p:cSld>
-  <p:clrMapOvr>
-    <a:masterClrMapping/>
-  </p:clrMapOvr>
-</p:notes>
-</file>
-
-<file path=ppt/notesSlides/notesSlide27.xml><?xml version="1.0" encoding="utf-8"?>
-<p:notes xmlns:a="http://schemas.openxmlformats.org/drawingml/2006/main" xmlns:r="http://schemas.openxmlformats.org/officeDocument/2006/relationships" xmlns:p="http://schemas.openxmlformats.org/presentationml/2006/main" showMasterSp="0" showMasterPhAnim="0">
-  <p:cSld>
-    <p:spTree>
-      <p:nvGrpSpPr>
-        <p:cNvPr id="1" name="Shape 50">
-          <a:extLst>
-            <a:ext uri="{FF2B5EF4-FFF2-40B4-BE49-F238E27FC236}">
-              <a16:creationId xmlns:a16="http://schemas.microsoft.com/office/drawing/2014/main" id="{6359DD58-C10A-FC34-525C-F25DD9651477}"/>
-            </a:ext>
-          </a:extLst>
-        </p:cNvPr>
-        <p:cNvGrpSpPr/>
-        <p:nvPr/>
-      </p:nvGrpSpPr>
-      <p:grpSpPr>
-        <a:xfrm>
-          <a:off x="0" y="0"/>
-          <a:ext cx="0" cy="0"/>
-          <a:chOff x="0" y="0"/>
-          <a:chExt cx="0" cy="0"/>
-        </a:xfrm>
-      </p:grpSpPr>
-      <p:sp>
-        <p:nvSpPr>
-          <p:cNvPr id="51" name="Google Shape;51;g3af032c298c_0_50:notes">
-            <a:extLst>
-              <a:ext uri="{FF2B5EF4-FFF2-40B4-BE49-F238E27FC236}">
-                <a16:creationId xmlns:a16="http://schemas.microsoft.com/office/drawing/2014/main" id="{92DC1323-E028-480C-90D3-F4599FAE4835}"/>
-              </a:ext>
-            </a:extLst>
-          </p:cNvPr>
-          <p:cNvSpPr>
-            <a:spLocks noGrp="1" noRot="1" noChangeAspect="1"/>
-          </p:cNvSpPr>
-          <p:nvPr>
-            <p:ph type="sldImg" idx="2"/>
-          </p:nvPr>
-        </p:nvSpPr>
-        <p:spPr>
-          <a:xfrm>
-            <a:off x="381000" y="685800"/>
-            <a:ext cx="6096000" cy="3429000"/>
-          </a:xfrm>
-          <a:custGeom>
-            <a:avLst/>
-            <a:gdLst/>
-            <a:ahLst/>
-            <a:cxnLst/>
-            <a:rect l="l" t="t" r="r" b="b"/>
-            <a:pathLst>
-              <a:path w="120000" h="120000" extrusionOk="0">
-                <a:moveTo>
-                  <a:pt x="0" y="0"/>
-                </a:moveTo>
-                <a:lnTo>
-                  <a:pt x="120000" y="0"/>
-                </a:lnTo>
-                <a:lnTo>
-                  <a:pt x="120000" y="120000"/>
-                </a:lnTo>
-                <a:lnTo>
-                  <a:pt x="0" y="120000"/>
-                </a:lnTo>
-                <a:close/>
-              </a:path>
-            </a:pathLst>
-          </a:custGeom>
-        </p:spPr>
-      </p:sp>
-      <p:sp>
-        <p:nvSpPr>
-          <p:cNvPr id="52" name="Google Shape;52;g3af032c298c_0_50:notes">
-            <a:extLst>
-              <a:ext uri="{FF2B5EF4-FFF2-40B4-BE49-F238E27FC236}">
-                <a16:creationId xmlns:a16="http://schemas.microsoft.com/office/drawing/2014/main" id="{B80F5581-6DE5-4875-21D0-F9CFE2D095F9}"/>
-              </a:ext>
-            </a:extLst>
-          </p:cNvPr>
-          <p:cNvSpPr txBox="1">
-            <a:spLocks noGrp="1"/>
-          </p:cNvSpPr>
-          <p:nvPr>
-            <p:ph type="body" idx="1"/>
-          </p:nvPr>
-        </p:nvSpPr>
-        <p:spPr>
-          <a:xfrm>
-            <a:off x="685800" y="4343400"/>
-            <a:ext cx="5486400" cy="4114800"/>
-          </a:xfrm>
-          <a:prstGeom prst="rect">
-            <a:avLst/>
-          </a:prstGeom>
-        </p:spPr>
-        <p:txBody>
-          <a:bodyPr spcFirstLastPara="1" wrap="square" lIns="91425" tIns="91425" rIns="91425" bIns="91425" anchor="t" anchorCtr="0">
-            <a:noAutofit/>
-          </a:bodyPr>
-          <a:lstStyle/>
-          <a:p>
-            <a:pPr marL="0" lvl="0" indent="0" algn="l" rtl="0">
-              <a:spcBef>
-                <a:spcPts val="0"/>
-              </a:spcBef>
-              <a:spcAft>
-                <a:spcPts val="0"/>
-              </a:spcAft>
-              <a:buNone/>
-            </a:pPr>
-            <a:endParaRPr/>
-          </a:p>
-        </p:txBody>
-      </p:sp>
-    </p:spTree>
-    <p:extLst>
-      <p:ext uri="{BB962C8B-B14F-4D97-AF65-F5344CB8AC3E}">
-        <p14:creationId xmlns:p14="http://schemas.microsoft.com/office/powerpoint/2010/main" val="1148279847"/>
-      </p:ext>
-    </p:extLst>
-  </p:cSld>
-  <p:clrMapOvr>
-    <a:masterClrMapping/>
-  </p:clrMapOvr>
-</p:notes>
-</file>
-
-<file path=ppt/notesSlides/notesSlide28.xml><?xml version="1.0" encoding="utf-8"?>
-<p:notes xmlns:a="http://schemas.openxmlformats.org/drawingml/2006/main" xmlns:r="http://schemas.openxmlformats.org/officeDocument/2006/relationships" xmlns:p="http://schemas.openxmlformats.org/presentationml/2006/main" showMasterSp="0" showMasterPhAnim="0">
-  <p:cSld>
-    <p:spTree>
-      <p:nvGrpSpPr>
-        <p:cNvPr id="1" name="Shape 50">
-          <a:extLst>
-            <a:ext uri="{FF2B5EF4-FFF2-40B4-BE49-F238E27FC236}">
-              <a16:creationId xmlns:a16="http://schemas.microsoft.com/office/drawing/2014/main" id="{2BE48222-6B61-796F-A50D-F01A108C8183}"/>
-            </a:ext>
-          </a:extLst>
-        </p:cNvPr>
-        <p:cNvGrpSpPr/>
-        <p:nvPr/>
-      </p:nvGrpSpPr>
-      <p:grpSpPr>
-        <a:xfrm>
-          <a:off x="0" y="0"/>
-          <a:ext cx="0" cy="0"/>
-          <a:chOff x="0" y="0"/>
-          <a:chExt cx="0" cy="0"/>
-        </a:xfrm>
-      </p:grpSpPr>
-      <p:sp>
-        <p:nvSpPr>
-          <p:cNvPr id="51" name="Google Shape;51;g3af032c298c_0_50:notes">
-            <a:extLst>
-              <a:ext uri="{FF2B5EF4-FFF2-40B4-BE49-F238E27FC236}">
-                <a16:creationId xmlns:a16="http://schemas.microsoft.com/office/drawing/2014/main" id="{34099831-B2E7-C73C-53CD-FAB9BAFAF4D5}"/>
-              </a:ext>
-            </a:extLst>
-          </p:cNvPr>
-          <p:cNvSpPr>
-            <a:spLocks noGrp="1" noRot="1" noChangeAspect="1"/>
-          </p:cNvSpPr>
-          <p:nvPr>
-            <p:ph type="sldImg" idx="2"/>
-          </p:nvPr>
-        </p:nvSpPr>
-        <p:spPr>
-          <a:xfrm>
-            <a:off x="381000" y="685800"/>
-            <a:ext cx="6096000" cy="3429000"/>
-          </a:xfrm>
-          <a:custGeom>
-            <a:avLst/>
-            <a:gdLst/>
-            <a:ahLst/>
-            <a:cxnLst/>
-            <a:rect l="l" t="t" r="r" b="b"/>
-            <a:pathLst>
-              <a:path w="120000" h="120000" extrusionOk="0">
-                <a:moveTo>
-                  <a:pt x="0" y="0"/>
-                </a:moveTo>
-                <a:lnTo>
-                  <a:pt x="120000" y="0"/>
-                </a:lnTo>
-                <a:lnTo>
-                  <a:pt x="120000" y="120000"/>
-                </a:lnTo>
-                <a:lnTo>
-                  <a:pt x="0" y="120000"/>
-                </a:lnTo>
-                <a:close/>
-              </a:path>
-            </a:pathLst>
-          </a:custGeom>
-        </p:spPr>
-      </p:sp>
-      <p:sp>
-        <p:nvSpPr>
-          <p:cNvPr id="52" name="Google Shape;52;g3af032c298c_0_50:notes">
-            <a:extLst>
-              <a:ext uri="{FF2B5EF4-FFF2-40B4-BE49-F238E27FC236}">
-                <a16:creationId xmlns:a16="http://schemas.microsoft.com/office/drawing/2014/main" id="{8BE4BF6B-D3D3-569B-3D32-82D381198284}"/>
-              </a:ext>
-            </a:extLst>
-          </p:cNvPr>
-          <p:cNvSpPr txBox="1">
-            <a:spLocks noGrp="1"/>
-          </p:cNvSpPr>
-          <p:nvPr>
-            <p:ph type="body" idx="1"/>
-          </p:nvPr>
-        </p:nvSpPr>
-        <p:spPr>
-          <a:xfrm>
-            <a:off x="685800" y="4343400"/>
-            <a:ext cx="5486400" cy="4114800"/>
-          </a:xfrm>
-          <a:prstGeom prst="rect">
-            <a:avLst/>
-          </a:prstGeom>
-        </p:spPr>
-        <p:txBody>
-          <a:bodyPr spcFirstLastPara="1" wrap="square" lIns="91425" tIns="91425" rIns="91425" bIns="91425" anchor="t" anchorCtr="0">
-            <a:noAutofit/>
-          </a:bodyPr>
-          <a:lstStyle/>
-          <a:p>
-            <a:pPr marL="0" lvl="0" indent="0" algn="l" rtl="0">
-              <a:spcBef>
-                <a:spcPts val="0"/>
-              </a:spcBef>
-              <a:spcAft>
-                <a:spcPts val="0"/>
-              </a:spcAft>
-              <a:buNone/>
-            </a:pPr>
-            <a:endParaRPr/>
-          </a:p>
-        </p:txBody>
-      </p:sp>
-    </p:spTree>
-    <p:extLst>
-      <p:ext uri="{BB962C8B-B14F-4D97-AF65-F5344CB8AC3E}">
-        <p14:creationId xmlns:p14="http://schemas.microsoft.com/office/powerpoint/2010/main" val="3367243618"/>
-      </p:ext>
-    </p:extLst>
-  </p:cSld>
-  <p:clrMapOvr>
-    <a:masterClrMapping/>
-  </p:clrMapOvr>
-</p:notes>
-</file>
-
-<file path=ppt/notesSlides/notesSlide29.xml><?xml version="1.0" encoding="utf-8"?>
-<p:notes xmlns:a="http://schemas.openxmlformats.org/drawingml/2006/main" xmlns:r="http://schemas.openxmlformats.org/officeDocument/2006/relationships" xmlns:p="http://schemas.openxmlformats.org/presentationml/2006/main" showMasterSp="0" showMasterPhAnim="0">
-  <p:cSld>
-    <p:spTree>
-      <p:nvGrpSpPr>
-        <p:cNvPr id="1" name="Shape 56"/>
-        <p:cNvGrpSpPr/>
-        <p:nvPr/>
-      </p:nvGrpSpPr>
-      <p:grpSpPr>
-        <a:xfrm>
-          <a:off x="0" y="0"/>
-          <a:ext cx="0" cy="0"/>
-          <a:chOff x="0" y="0"/>
-          <a:chExt cx="0" cy="0"/>
-        </a:xfrm>
-      </p:grpSpPr>
-      <p:sp>
-        <p:nvSpPr>
-          <p:cNvPr id="57" name="Google Shape;57;g3af032c298c_0_60:notes"/>
-          <p:cNvSpPr>
-            <a:spLocks noGrp="1" noRot="1" noChangeAspect="1"/>
-          </p:cNvSpPr>
-          <p:nvPr>
-            <p:ph type="sldImg" idx="2"/>
-          </p:nvPr>
-        </p:nvSpPr>
-        <p:spPr>
-          <a:xfrm>
-            <a:off x="381300" y="685800"/>
-            <a:ext cx="6096000" cy="3429000"/>
-          </a:xfrm>
-          <a:custGeom>
-            <a:avLst/>
-            <a:gdLst/>
-            <a:ahLst/>
-            <a:cxnLst/>
-            <a:rect l="l" t="t" r="r" b="b"/>
-            <a:pathLst>
-              <a:path w="120000" h="120000" extrusionOk="0">
-                <a:moveTo>
-                  <a:pt x="0" y="0"/>
-                </a:moveTo>
-                <a:lnTo>
-                  <a:pt x="120000" y="0"/>
-                </a:lnTo>
-                <a:lnTo>
-                  <a:pt x="120000" y="120000"/>
-                </a:lnTo>
-                <a:lnTo>
-                  <a:pt x="0" y="120000"/>
-                </a:lnTo>
-                <a:close/>
-              </a:path>
-            </a:pathLst>
-          </a:custGeom>
-        </p:spPr>
-      </p:sp>
-      <p:sp>
-        <p:nvSpPr>
-          <p:cNvPr id="58" name="Google Shape;58;g3af032c298c_0_60:notes"/>
           <p:cNvSpPr txBox="1">
             <a:spLocks noGrp="1"/>
           </p:cNvSpPr>
@@ -3577,318 +1910,6 @@
         <p14:creationId xmlns:p14="http://schemas.microsoft.com/office/powerpoint/2010/main" val="1763264595"/>
       </p:ext>
     </p:extLst>
-  </p:cSld>
-  <p:clrMapOvr>
-    <a:masterClrMapping/>
-  </p:clrMapOvr>
-</p:notes>
-</file>
-
-<file path=ppt/notesSlides/notesSlide30.xml><?xml version="1.0" encoding="utf-8"?>
-<p:notes xmlns:a="http://schemas.openxmlformats.org/drawingml/2006/main" xmlns:r="http://schemas.openxmlformats.org/officeDocument/2006/relationships" xmlns:p="http://schemas.openxmlformats.org/presentationml/2006/main" showMasterSp="0" showMasterPhAnim="0">
-  <p:cSld>
-    <p:spTree>
-      <p:nvGrpSpPr>
-        <p:cNvPr id="1" name="Shape 45"/>
-        <p:cNvGrpSpPr/>
-        <p:nvPr/>
-      </p:nvGrpSpPr>
-      <p:grpSpPr>
-        <a:xfrm>
-          <a:off x="0" y="0"/>
-          <a:ext cx="0" cy="0"/>
-          <a:chOff x="0" y="0"/>
-          <a:chExt cx="0" cy="0"/>
-        </a:xfrm>
-      </p:grpSpPr>
-      <p:sp>
-        <p:nvSpPr>
-          <p:cNvPr id="46" name="Google Shape;46;g3af032c298c_0_89:notes"/>
-          <p:cNvSpPr>
-            <a:spLocks noGrp="1" noRot="1" noChangeAspect="1"/>
-          </p:cNvSpPr>
-          <p:nvPr>
-            <p:ph type="sldImg" idx="2"/>
-          </p:nvPr>
-        </p:nvSpPr>
-        <p:spPr>
-          <a:xfrm>
-            <a:off x="381000" y="685800"/>
-            <a:ext cx="6096000" cy="3429000"/>
-          </a:xfrm>
-          <a:custGeom>
-            <a:avLst/>
-            <a:gdLst/>
-            <a:ahLst/>
-            <a:cxnLst/>
-            <a:rect l="l" t="t" r="r" b="b"/>
-            <a:pathLst>
-              <a:path w="120000" h="120000" extrusionOk="0">
-                <a:moveTo>
-                  <a:pt x="0" y="0"/>
-                </a:moveTo>
-                <a:lnTo>
-                  <a:pt x="120000" y="0"/>
-                </a:lnTo>
-                <a:lnTo>
-                  <a:pt x="120000" y="120000"/>
-                </a:lnTo>
-                <a:lnTo>
-                  <a:pt x="0" y="120000"/>
-                </a:lnTo>
-                <a:close/>
-              </a:path>
-            </a:pathLst>
-          </a:custGeom>
-        </p:spPr>
-      </p:sp>
-      <p:sp>
-        <p:nvSpPr>
-          <p:cNvPr id="47" name="Google Shape;47;g3af032c298c_0_89:notes"/>
-          <p:cNvSpPr txBox="1">
-            <a:spLocks noGrp="1"/>
-          </p:cNvSpPr>
-          <p:nvPr>
-            <p:ph type="body" idx="1"/>
-          </p:nvPr>
-        </p:nvSpPr>
-        <p:spPr>
-          <a:xfrm>
-            <a:off x="685800" y="4343400"/>
-            <a:ext cx="5486400" cy="4114800"/>
-          </a:xfrm>
-          <a:prstGeom prst="rect">
-            <a:avLst/>
-          </a:prstGeom>
-        </p:spPr>
-        <p:txBody>
-          <a:bodyPr spcFirstLastPara="1" wrap="square" lIns="91425" tIns="91425" rIns="91425" bIns="91425" anchor="t" anchorCtr="0">
-            <a:noAutofit/>
-          </a:bodyPr>
-          <a:lstStyle/>
-          <a:p>
-            <a:pPr marL="0" lvl="0" indent="0" algn="l" rtl="0">
-              <a:spcBef>
-                <a:spcPts val="0"/>
-              </a:spcBef>
-              <a:spcAft>
-                <a:spcPts val="0"/>
-              </a:spcAft>
-              <a:buNone/>
-            </a:pPr>
-            <a:endParaRPr/>
-          </a:p>
-        </p:txBody>
-      </p:sp>
-    </p:spTree>
-  </p:cSld>
-  <p:clrMapOvr>
-    <a:masterClrMapping/>
-  </p:clrMapOvr>
-</p:notes>
-</file>
-
-<file path=ppt/notesSlides/notesSlide31.xml><?xml version="1.0" encoding="utf-8"?>
-<p:notes xmlns:a="http://schemas.openxmlformats.org/drawingml/2006/main" xmlns:r="http://schemas.openxmlformats.org/officeDocument/2006/relationships" xmlns:p="http://schemas.openxmlformats.org/presentationml/2006/main" showMasterSp="0" showMasterPhAnim="0">
-  <p:cSld>
-    <p:spTree>
-      <p:nvGrpSpPr>
-        <p:cNvPr id="1" name="Shape 61"/>
-        <p:cNvGrpSpPr/>
-        <p:nvPr/>
-      </p:nvGrpSpPr>
-      <p:grpSpPr>
-        <a:xfrm>
-          <a:off x="0" y="0"/>
-          <a:ext cx="0" cy="0"/>
-          <a:chOff x="0" y="0"/>
-          <a:chExt cx="0" cy="0"/>
-        </a:xfrm>
-      </p:grpSpPr>
-      <p:sp>
-        <p:nvSpPr>
-          <p:cNvPr id="62" name="Google Shape;62;g3af032c298c_0_70:notes"/>
-          <p:cNvSpPr>
-            <a:spLocks noGrp="1" noRot="1" noChangeAspect="1"/>
-          </p:cNvSpPr>
-          <p:nvPr>
-            <p:ph type="sldImg" idx="2"/>
-          </p:nvPr>
-        </p:nvSpPr>
-        <p:spPr>
-          <a:xfrm>
-            <a:off x="381300" y="685800"/>
-            <a:ext cx="6096000" cy="3429000"/>
-          </a:xfrm>
-          <a:custGeom>
-            <a:avLst/>
-            <a:gdLst/>
-            <a:ahLst/>
-            <a:cxnLst/>
-            <a:rect l="l" t="t" r="r" b="b"/>
-            <a:pathLst>
-              <a:path w="120000" h="120000" extrusionOk="0">
-                <a:moveTo>
-                  <a:pt x="0" y="0"/>
-                </a:moveTo>
-                <a:lnTo>
-                  <a:pt x="120000" y="0"/>
-                </a:lnTo>
-                <a:lnTo>
-                  <a:pt x="120000" y="120000"/>
-                </a:lnTo>
-                <a:lnTo>
-                  <a:pt x="0" y="120000"/>
-                </a:lnTo>
-                <a:close/>
-              </a:path>
-            </a:pathLst>
-          </a:custGeom>
-        </p:spPr>
-      </p:sp>
-      <p:sp>
-        <p:nvSpPr>
-          <p:cNvPr id="63" name="Google Shape;63;g3af032c298c_0_70:notes"/>
-          <p:cNvSpPr txBox="1">
-            <a:spLocks noGrp="1"/>
-          </p:cNvSpPr>
-          <p:nvPr>
-            <p:ph type="body" idx="1"/>
-          </p:nvPr>
-        </p:nvSpPr>
-        <p:spPr>
-          <a:xfrm>
-            <a:off x="685800" y="4343400"/>
-            <a:ext cx="5486400" cy="4114800"/>
-          </a:xfrm>
-          <a:prstGeom prst="rect">
-            <a:avLst/>
-          </a:prstGeom>
-        </p:spPr>
-        <p:txBody>
-          <a:bodyPr spcFirstLastPara="1" wrap="square" lIns="91425" tIns="91425" rIns="91425" bIns="91425" anchor="t" anchorCtr="0">
-            <a:noAutofit/>
-          </a:bodyPr>
-          <a:lstStyle/>
-          <a:p>
-            <a:pPr marL="0" lvl="0" indent="0" algn="l" rtl="0">
-              <a:spcBef>
-                <a:spcPts val="0"/>
-              </a:spcBef>
-              <a:spcAft>
-                <a:spcPts val="0"/>
-              </a:spcAft>
-              <a:buNone/>
-            </a:pPr>
-            <a:endParaRPr/>
-          </a:p>
-        </p:txBody>
-      </p:sp>
-    </p:spTree>
-  </p:cSld>
-  <p:clrMapOvr>
-    <a:masterClrMapping/>
-  </p:clrMapOvr>
-</p:notes>
-</file>
-
-<file path=ppt/notesSlides/notesSlide32.xml><?xml version="1.0" encoding="utf-8"?>
-<p:notes xmlns:a="http://schemas.openxmlformats.org/drawingml/2006/main" xmlns:r="http://schemas.openxmlformats.org/officeDocument/2006/relationships" xmlns:p="http://schemas.openxmlformats.org/presentationml/2006/main" showMasterSp="0" showMasterPhAnim="0">
-  <p:cSld>
-    <p:spTree>
-      <p:nvGrpSpPr>
-        <p:cNvPr id="1" name="Shape 68"/>
-        <p:cNvGrpSpPr/>
-        <p:nvPr/>
-      </p:nvGrpSpPr>
-      <p:grpSpPr>
-        <a:xfrm>
-          <a:off x="0" y="0"/>
-          <a:ext cx="0" cy="0"/>
-          <a:chOff x="0" y="0"/>
-          <a:chExt cx="0" cy="0"/>
-        </a:xfrm>
-      </p:grpSpPr>
-      <p:sp>
-        <p:nvSpPr>
-          <p:cNvPr id="69" name="Google Shape;69;g3af032c298c_0_100:notes"/>
-          <p:cNvSpPr>
-            <a:spLocks noGrp="1" noRot="1" noChangeAspect="1"/>
-          </p:cNvSpPr>
-          <p:nvPr>
-            <p:ph type="sldImg" idx="2"/>
-          </p:nvPr>
-        </p:nvSpPr>
-        <p:spPr>
-          <a:xfrm>
-            <a:off x="381300" y="685800"/>
-            <a:ext cx="6096000" cy="3429000"/>
-          </a:xfrm>
-          <a:custGeom>
-            <a:avLst/>
-            <a:gdLst/>
-            <a:ahLst/>
-            <a:cxnLst/>
-            <a:rect l="l" t="t" r="r" b="b"/>
-            <a:pathLst>
-              <a:path w="120000" h="120000" extrusionOk="0">
-                <a:moveTo>
-                  <a:pt x="0" y="0"/>
-                </a:moveTo>
-                <a:lnTo>
-                  <a:pt x="120000" y="0"/>
-                </a:lnTo>
-                <a:lnTo>
-                  <a:pt x="120000" y="120000"/>
-                </a:lnTo>
-                <a:lnTo>
-                  <a:pt x="0" y="120000"/>
-                </a:lnTo>
-                <a:close/>
-              </a:path>
-            </a:pathLst>
-          </a:custGeom>
-        </p:spPr>
-      </p:sp>
-      <p:sp>
-        <p:nvSpPr>
-          <p:cNvPr id="70" name="Google Shape;70;g3af032c298c_0_100:notes"/>
-          <p:cNvSpPr txBox="1">
-            <a:spLocks noGrp="1"/>
-          </p:cNvSpPr>
-          <p:nvPr>
-            <p:ph type="body" idx="1"/>
-          </p:nvPr>
-        </p:nvSpPr>
-        <p:spPr>
-          <a:xfrm>
-            <a:off x="685800" y="4343400"/>
-            <a:ext cx="5486400" cy="4114800"/>
-          </a:xfrm>
-          <a:prstGeom prst="rect">
-            <a:avLst/>
-          </a:prstGeom>
-        </p:spPr>
-        <p:txBody>
-          <a:bodyPr spcFirstLastPara="1" wrap="square" lIns="91425" tIns="91425" rIns="91425" bIns="91425" anchor="t" anchorCtr="0">
-            <a:noAutofit/>
-          </a:bodyPr>
-          <a:lstStyle/>
-          <a:p>
-            <a:pPr marL="0" lvl="0" indent="0" algn="l" rtl="0">
-              <a:spcBef>
-                <a:spcPts val="0"/>
-              </a:spcBef>
-              <a:spcAft>
-                <a:spcPts val="0"/>
-              </a:spcAft>
-              <a:buNone/>
-            </a:pPr>
-            <a:endParaRPr/>
-          </a:p>
-        </p:txBody>
-      </p:sp>
-    </p:spTree>
   </p:cSld>
   <p:clrMapOvr>
     <a:masterClrMapping/>
@@ -5178,378 +3199,6 @@
 </file>
 
 <file path=ppt/slideLayouts/slideLayout2.xml><?xml version="1.0" encoding="utf-8"?>
-<p:sldLayout xmlns:a="http://schemas.openxmlformats.org/drawingml/2006/main" xmlns:r="http://schemas.openxmlformats.org/officeDocument/2006/relationships" xmlns:p="http://schemas.openxmlformats.org/presentationml/2006/main" matchingName="Section header" type="secHead">
-  <p:cSld name="SECTION_HEADER">
-    <p:bg>
-      <p:bgPr>
-        <a:blipFill>
-          <a:blip r:embed="rId2">
-            <a:alphaModFix/>
-          </a:blip>
-          <a:stretch>
-            <a:fillRect/>
-          </a:stretch>
-        </a:blipFill>
-        <a:effectLst/>
-      </p:bgPr>
-    </p:bg>
-    <p:spTree>
-      <p:nvGrpSpPr>
-        <p:cNvPr id="1" name="Shape 15"/>
-        <p:cNvGrpSpPr/>
-        <p:nvPr/>
-      </p:nvGrpSpPr>
-      <p:grpSpPr>
-        <a:xfrm>
-          <a:off x="0" y="0"/>
-          <a:ext cx="0" cy="0"/>
-          <a:chOff x="0" y="0"/>
-          <a:chExt cx="0" cy="0"/>
-        </a:xfrm>
-      </p:grpSpPr>
-      <p:sp>
-        <p:nvSpPr>
-          <p:cNvPr id="16" name="Google Shape;16;p3"/>
-          <p:cNvSpPr txBox="1">
-            <a:spLocks noGrp="1"/>
-          </p:cNvSpPr>
-          <p:nvPr>
-            <p:ph type="title"/>
-          </p:nvPr>
-        </p:nvSpPr>
-        <p:spPr>
-          <a:xfrm>
-            <a:off x="311700" y="2150850"/>
-            <a:ext cx="8520600" cy="841800"/>
-          </a:xfrm>
-          <a:prstGeom prst="rect">
-            <a:avLst/>
-          </a:prstGeom>
-        </p:spPr>
-        <p:txBody>
-          <a:bodyPr spcFirstLastPara="1" wrap="square" lIns="91425" tIns="91425" rIns="91425" bIns="91425" anchor="ctr" anchorCtr="0">
-            <a:normAutofit/>
-          </a:bodyPr>
-          <a:lstStyle>
-            <a:lvl1pPr lvl="0" algn="ctr">
-              <a:spcBef>
-                <a:spcPts val="0"/>
-              </a:spcBef>
-              <a:spcAft>
-                <a:spcPts val="0"/>
-              </a:spcAft>
-              <a:buClr>
-                <a:srgbClr val="841C39"/>
-              </a:buClr>
-              <a:buSzPts val="3600"/>
-              <a:buNone/>
-              <a:defRPr sz="3600">
-                <a:solidFill>
-                  <a:srgbClr val="841C39"/>
-                </a:solidFill>
-              </a:defRPr>
-            </a:lvl1pPr>
-            <a:lvl2pPr lvl="1" algn="ctr">
-              <a:spcBef>
-                <a:spcPts val="0"/>
-              </a:spcBef>
-              <a:spcAft>
-                <a:spcPts val="0"/>
-              </a:spcAft>
-              <a:buClr>
-                <a:srgbClr val="841C39"/>
-              </a:buClr>
-              <a:buSzPts val="3600"/>
-              <a:buNone/>
-              <a:defRPr sz="3600">
-                <a:solidFill>
-                  <a:srgbClr val="841C39"/>
-                </a:solidFill>
-              </a:defRPr>
-            </a:lvl2pPr>
-            <a:lvl3pPr lvl="2" algn="ctr">
-              <a:spcBef>
-                <a:spcPts val="0"/>
-              </a:spcBef>
-              <a:spcAft>
-                <a:spcPts val="0"/>
-              </a:spcAft>
-              <a:buClr>
-                <a:srgbClr val="841C39"/>
-              </a:buClr>
-              <a:buSzPts val="3600"/>
-              <a:buNone/>
-              <a:defRPr sz="3600">
-                <a:solidFill>
-                  <a:srgbClr val="841C39"/>
-                </a:solidFill>
-              </a:defRPr>
-            </a:lvl3pPr>
-            <a:lvl4pPr lvl="3" algn="ctr">
-              <a:spcBef>
-                <a:spcPts val="0"/>
-              </a:spcBef>
-              <a:spcAft>
-                <a:spcPts val="0"/>
-              </a:spcAft>
-              <a:buClr>
-                <a:srgbClr val="841C39"/>
-              </a:buClr>
-              <a:buSzPts val="3600"/>
-              <a:buNone/>
-              <a:defRPr sz="3600">
-                <a:solidFill>
-                  <a:srgbClr val="841C39"/>
-                </a:solidFill>
-              </a:defRPr>
-            </a:lvl4pPr>
-            <a:lvl5pPr lvl="4" algn="ctr">
-              <a:spcBef>
-                <a:spcPts val="0"/>
-              </a:spcBef>
-              <a:spcAft>
-                <a:spcPts val="0"/>
-              </a:spcAft>
-              <a:buClr>
-                <a:srgbClr val="841C39"/>
-              </a:buClr>
-              <a:buSzPts val="3600"/>
-              <a:buNone/>
-              <a:defRPr sz="3600">
-                <a:solidFill>
-                  <a:srgbClr val="841C39"/>
-                </a:solidFill>
-              </a:defRPr>
-            </a:lvl5pPr>
-            <a:lvl6pPr lvl="5" algn="ctr">
-              <a:spcBef>
-                <a:spcPts val="0"/>
-              </a:spcBef>
-              <a:spcAft>
-                <a:spcPts val="0"/>
-              </a:spcAft>
-              <a:buClr>
-                <a:srgbClr val="841C39"/>
-              </a:buClr>
-              <a:buSzPts val="3600"/>
-              <a:buNone/>
-              <a:defRPr sz="3600">
-                <a:solidFill>
-                  <a:srgbClr val="841C39"/>
-                </a:solidFill>
-              </a:defRPr>
-            </a:lvl6pPr>
-            <a:lvl7pPr lvl="6" algn="ctr">
-              <a:spcBef>
-                <a:spcPts val="0"/>
-              </a:spcBef>
-              <a:spcAft>
-                <a:spcPts val="0"/>
-              </a:spcAft>
-              <a:buClr>
-                <a:srgbClr val="841C39"/>
-              </a:buClr>
-              <a:buSzPts val="3600"/>
-              <a:buNone/>
-              <a:defRPr sz="3600">
-                <a:solidFill>
-                  <a:srgbClr val="841C39"/>
-                </a:solidFill>
-              </a:defRPr>
-            </a:lvl7pPr>
-            <a:lvl8pPr lvl="7" algn="ctr">
-              <a:spcBef>
-                <a:spcPts val="0"/>
-              </a:spcBef>
-              <a:spcAft>
-                <a:spcPts val="0"/>
-              </a:spcAft>
-              <a:buClr>
-                <a:srgbClr val="841C39"/>
-              </a:buClr>
-              <a:buSzPts val="3600"/>
-              <a:buNone/>
-              <a:defRPr sz="3600">
-                <a:solidFill>
-                  <a:srgbClr val="841C39"/>
-                </a:solidFill>
-              </a:defRPr>
-            </a:lvl8pPr>
-            <a:lvl9pPr lvl="8" algn="ctr">
-              <a:spcBef>
-                <a:spcPts val="0"/>
-              </a:spcBef>
-              <a:spcAft>
-                <a:spcPts val="0"/>
-              </a:spcAft>
-              <a:buClr>
-                <a:srgbClr val="841C39"/>
-              </a:buClr>
-              <a:buSzPts val="3600"/>
-              <a:buNone/>
-              <a:defRPr sz="3600">
-                <a:solidFill>
-                  <a:srgbClr val="841C39"/>
-                </a:solidFill>
-              </a:defRPr>
-            </a:lvl9pPr>
-          </a:lstStyle>
-          <a:p>
-            <a:endParaRPr/>
-          </a:p>
-        </p:txBody>
-      </p:sp>
-      <p:sp>
-        <p:nvSpPr>
-          <p:cNvPr id="17" name="Google Shape;17;p3"/>
-          <p:cNvSpPr txBox="1">
-            <a:spLocks noGrp="1"/>
-          </p:cNvSpPr>
-          <p:nvPr>
-            <p:ph type="sldNum" idx="12"/>
-          </p:nvPr>
-        </p:nvSpPr>
-        <p:spPr>
-          <a:xfrm>
-            <a:off x="8472458" y="4663217"/>
-            <a:ext cx="548700" cy="393600"/>
-          </a:xfrm>
-          <a:prstGeom prst="rect">
-            <a:avLst/>
-          </a:prstGeom>
-        </p:spPr>
-        <p:txBody>
-          <a:bodyPr spcFirstLastPara="1" wrap="square" lIns="91425" tIns="91425" rIns="91425" bIns="91425" anchor="ctr" anchorCtr="0">
-            <a:normAutofit/>
-          </a:bodyPr>
-          <a:lstStyle>
-            <a:lvl1pPr lvl="0">
-              <a:buNone/>
-              <a:defRPr/>
-            </a:lvl1pPr>
-            <a:lvl2pPr lvl="1">
-              <a:buNone/>
-              <a:defRPr/>
-            </a:lvl2pPr>
-            <a:lvl3pPr lvl="2">
-              <a:buNone/>
-              <a:defRPr/>
-            </a:lvl3pPr>
-            <a:lvl4pPr lvl="3">
-              <a:buNone/>
-              <a:defRPr/>
-            </a:lvl4pPr>
-            <a:lvl5pPr lvl="4">
-              <a:buNone/>
-              <a:defRPr/>
-            </a:lvl5pPr>
-            <a:lvl6pPr lvl="5">
-              <a:buNone/>
-              <a:defRPr/>
-            </a:lvl6pPr>
-            <a:lvl7pPr lvl="6">
-              <a:buNone/>
-              <a:defRPr/>
-            </a:lvl7pPr>
-            <a:lvl8pPr lvl="7">
-              <a:buNone/>
-              <a:defRPr/>
-            </a:lvl8pPr>
-            <a:lvl9pPr lvl="8">
-              <a:buNone/>
-              <a:defRPr/>
-            </a:lvl9pPr>
-          </a:lstStyle>
-          <a:p>
-            <a:pPr marL="0" lvl="0" indent="0" algn="r" rtl="0">
-              <a:spcBef>
-                <a:spcPts val="0"/>
-              </a:spcBef>
-              <a:spcAft>
-                <a:spcPts val="0"/>
-              </a:spcAft>
-              <a:buNone/>
-            </a:pPr>
-            <a:fld id="{00000000-1234-1234-1234-123412341234}" type="slidenum">
-              <a:rPr lang="pt-BR"/>
-              <a:t>‹nº›</a:t>
-            </a:fld>
-            <a:endParaRPr/>
-          </a:p>
-        </p:txBody>
-      </p:sp>
-      <p:pic>
-        <p:nvPicPr>
-          <p:cNvPr id="18" name="Google Shape;18;p3" title="Logo Libertas 185x75.png"/>
-          <p:cNvPicPr preferRelativeResize="0"/>
-          <p:nvPr/>
-        </p:nvPicPr>
-        <p:blipFill>
-          <a:blip r:embed="rId3">
-            <a:alphaModFix/>
-          </a:blip>
-          <a:stretch>
-            <a:fillRect/>
-          </a:stretch>
-        </p:blipFill>
-        <p:spPr>
-          <a:xfrm>
-            <a:off x="3425388" y="4068275"/>
-            <a:ext cx="2172676" cy="882300"/>
-          </a:xfrm>
-          <a:prstGeom prst="rect">
-            <a:avLst/>
-          </a:prstGeom>
-          <a:noFill/>
-          <a:ln>
-            <a:noFill/>
-          </a:ln>
-        </p:spPr>
-      </p:pic>
-      <p:pic>
-        <p:nvPicPr>
-          <p:cNvPr id="19" name="Google Shape;19;p3" title="Sem título-1.png"/>
-          <p:cNvPicPr preferRelativeResize="0"/>
-          <p:nvPr/>
-        </p:nvPicPr>
-        <p:blipFill>
-          <a:blip r:embed="rId4">
-            <a:alphaModFix/>
-          </a:blip>
-          <a:stretch>
-            <a:fillRect/>
-          </a:stretch>
-        </p:blipFill>
-        <p:spPr>
-          <a:xfrm rot="-5400000">
-            <a:off x="532063" y="-582590"/>
-            <a:ext cx="1769851" cy="2833976"/>
-          </a:xfrm>
-          <a:prstGeom prst="rect">
-            <a:avLst/>
-          </a:prstGeom>
-          <a:noFill/>
-          <a:ln>
-            <a:noFill/>
-          </a:ln>
-          <a:effectLst>
-            <a:outerShdw blurRad="57150" dist="19050" dir="5400000" algn="bl" rotWithShape="0">
-              <a:srgbClr val="000000">
-                <a:alpha val="50000"/>
-              </a:srgbClr>
-            </a:outerShdw>
-          </a:effectLst>
-        </p:spPr>
-      </p:pic>
-    </p:spTree>
-  </p:cSld>
-  <p:clrMapOvr>
-    <a:masterClrMapping/>
-  </p:clrMapOvr>
-</p:sldLayout>
-</file>
-
-<file path=ppt/slideLayouts/slideLayout3.xml><?xml version="1.0" encoding="utf-8"?>
 <p:sldLayout xmlns:a="http://schemas.openxmlformats.org/drawingml/2006/main" xmlns:r="http://schemas.openxmlformats.org/officeDocument/2006/relationships" xmlns:p="http://schemas.openxmlformats.org/presentationml/2006/main" matchingName="Title and body" type="tx">
   <p:cSld name="TITLE_AND_BODY">
     <p:bg>
@@ -6057,771 +3706,7 @@
 </p:sldLayout>
 </file>
 
-<file path=ppt/slideLayouts/slideLayout4.xml><?xml version="1.0" encoding="utf-8"?>
-<p:sldLayout xmlns:a="http://schemas.openxmlformats.org/drawingml/2006/main" xmlns:r="http://schemas.openxmlformats.org/officeDocument/2006/relationships" xmlns:p="http://schemas.openxmlformats.org/presentationml/2006/main" matchingName="Frase Grande">
-  <p:cSld name="CUSTOM">
-    <p:bg>
-      <p:bgPr>
-        <a:blipFill>
-          <a:blip r:embed="rId2">
-            <a:alphaModFix/>
-          </a:blip>
-          <a:stretch>
-            <a:fillRect/>
-          </a:stretch>
-        </a:blipFill>
-        <a:effectLst/>
-      </p:bgPr>
-    </p:bg>
-    <p:spTree>
-      <p:nvGrpSpPr>
-        <p:cNvPr id="1" name="Shape 26"/>
-        <p:cNvGrpSpPr/>
-        <p:nvPr/>
-      </p:nvGrpSpPr>
-      <p:grpSpPr>
-        <a:xfrm>
-          <a:off x="0" y="0"/>
-          <a:ext cx="0" cy="0"/>
-          <a:chOff x="0" y="0"/>
-          <a:chExt cx="0" cy="0"/>
-        </a:xfrm>
-      </p:grpSpPr>
-      <p:sp>
-        <p:nvSpPr>
-          <p:cNvPr id="27" name="Google Shape;27;p5"/>
-          <p:cNvSpPr txBox="1">
-            <a:spLocks noGrp="1"/>
-          </p:cNvSpPr>
-          <p:nvPr>
-            <p:ph type="title"/>
-          </p:nvPr>
-        </p:nvSpPr>
-        <p:spPr>
-          <a:xfrm>
-            <a:off x="371975" y="525675"/>
-            <a:ext cx="5128500" cy="4207800"/>
-          </a:xfrm>
-          <a:prstGeom prst="rect">
-            <a:avLst/>
-          </a:prstGeom>
-        </p:spPr>
-        <p:txBody>
-          <a:bodyPr spcFirstLastPara="1" wrap="square" lIns="91425" tIns="91425" rIns="91425" bIns="91425" anchor="t" anchorCtr="0">
-            <a:normAutofit/>
-          </a:bodyPr>
-          <a:lstStyle>
-            <a:lvl1pPr lvl="0" algn="ctr">
-              <a:spcBef>
-                <a:spcPts val="0"/>
-              </a:spcBef>
-              <a:spcAft>
-                <a:spcPts val="0"/>
-              </a:spcAft>
-              <a:buClr>
-                <a:srgbClr val="3C5258"/>
-              </a:buClr>
-              <a:buSzPts val="4400"/>
-              <a:buNone/>
-              <a:defRPr sz="4400">
-                <a:solidFill>
-                  <a:srgbClr val="3C5258"/>
-                </a:solidFill>
-              </a:defRPr>
-            </a:lvl1pPr>
-            <a:lvl2pPr lvl="1">
-              <a:spcBef>
-                <a:spcPts val="0"/>
-              </a:spcBef>
-              <a:spcAft>
-                <a:spcPts val="0"/>
-              </a:spcAft>
-              <a:buClr>
-                <a:srgbClr val="3C5258"/>
-              </a:buClr>
-              <a:buSzPts val="2800"/>
-              <a:buNone/>
-              <a:defRPr>
-                <a:solidFill>
-                  <a:srgbClr val="3C5258"/>
-                </a:solidFill>
-              </a:defRPr>
-            </a:lvl2pPr>
-            <a:lvl3pPr lvl="2">
-              <a:spcBef>
-                <a:spcPts val="0"/>
-              </a:spcBef>
-              <a:spcAft>
-                <a:spcPts val="0"/>
-              </a:spcAft>
-              <a:buClr>
-                <a:srgbClr val="3C5258"/>
-              </a:buClr>
-              <a:buSzPts val="2800"/>
-              <a:buNone/>
-              <a:defRPr>
-                <a:solidFill>
-                  <a:srgbClr val="3C5258"/>
-                </a:solidFill>
-              </a:defRPr>
-            </a:lvl3pPr>
-            <a:lvl4pPr lvl="3">
-              <a:spcBef>
-                <a:spcPts val="0"/>
-              </a:spcBef>
-              <a:spcAft>
-                <a:spcPts val="0"/>
-              </a:spcAft>
-              <a:buClr>
-                <a:srgbClr val="3C5258"/>
-              </a:buClr>
-              <a:buSzPts val="2800"/>
-              <a:buNone/>
-              <a:defRPr>
-                <a:solidFill>
-                  <a:srgbClr val="3C5258"/>
-                </a:solidFill>
-              </a:defRPr>
-            </a:lvl4pPr>
-            <a:lvl5pPr lvl="4">
-              <a:spcBef>
-                <a:spcPts val="0"/>
-              </a:spcBef>
-              <a:spcAft>
-                <a:spcPts val="0"/>
-              </a:spcAft>
-              <a:buClr>
-                <a:srgbClr val="3C5258"/>
-              </a:buClr>
-              <a:buSzPts val="2800"/>
-              <a:buNone/>
-              <a:defRPr>
-                <a:solidFill>
-                  <a:srgbClr val="3C5258"/>
-                </a:solidFill>
-              </a:defRPr>
-            </a:lvl5pPr>
-            <a:lvl6pPr lvl="5">
-              <a:spcBef>
-                <a:spcPts val="0"/>
-              </a:spcBef>
-              <a:spcAft>
-                <a:spcPts val="0"/>
-              </a:spcAft>
-              <a:buClr>
-                <a:srgbClr val="3C5258"/>
-              </a:buClr>
-              <a:buSzPts val="2800"/>
-              <a:buNone/>
-              <a:defRPr>
-                <a:solidFill>
-                  <a:srgbClr val="3C5258"/>
-                </a:solidFill>
-              </a:defRPr>
-            </a:lvl6pPr>
-            <a:lvl7pPr lvl="6">
-              <a:spcBef>
-                <a:spcPts val="0"/>
-              </a:spcBef>
-              <a:spcAft>
-                <a:spcPts val="0"/>
-              </a:spcAft>
-              <a:buClr>
-                <a:srgbClr val="3C5258"/>
-              </a:buClr>
-              <a:buSzPts val="2800"/>
-              <a:buNone/>
-              <a:defRPr>
-                <a:solidFill>
-                  <a:srgbClr val="3C5258"/>
-                </a:solidFill>
-              </a:defRPr>
-            </a:lvl7pPr>
-            <a:lvl8pPr lvl="7">
-              <a:spcBef>
-                <a:spcPts val="0"/>
-              </a:spcBef>
-              <a:spcAft>
-                <a:spcPts val="0"/>
-              </a:spcAft>
-              <a:buClr>
-                <a:srgbClr val="3C5258"/>
-              </a:buClr>
-              <a:buSzPts val="2800"/>
-              <a:buNone/>
-              <a:defRPr>
-                <a:solidFill>
-                  <a:srgbClr val="3C5258"/>
-                </a:solidFill>
-              </a:defRPr>
-            </a:lvl8pPr>
-            <a:lvl9pPr lvl="8">
-              <a:spcBef>
-                <a:spcPts val="0"/>
-              </a:spcBef>
-              <a:spcAft>
-                <a:spcPts val="0"/>
-              </a:spcAft>
-              <a:buClr>
-                <a:srgbClr val="3C5258"/>
-              </a:buClr>
-              <a:buSzPts val="2800"/>
-              <a:buNone/>
-              <a:defRPr>
-                <a:solidFill>
-                  <a:srgbClr val="3C5258"/>
-                </a:solidFill>
-              </a:defRPr>
-            </a:lvl9pPr>
-          </a:lstStyle>
-          <a:p>
-            <a:endParaRPr/>
-          </a:p>
-        </p:txBody>
-      </p:sp>
-      <p:pic>
-        <p:nvPicPr>
-          <p:cNvPr id="28" name="Google Shape;28;p5" title="Sem título-1.png"/>
-          <p:cNvPicPr preferRelativeResize="0"/>
-          <p:nvPr/>
-        </p:nvPicPr>
-        <p:blipFill>
-          <a:blip r:embed="rId3">
-            <a:alphaModFix/>
-          </a:blip>
-          <a:stretch>
-            <a:fillRect/>
-          </a:stretch>
-        </p:blipFill>
-        <p:spPr>
-          <a:xfrm>
-            <a:off x="5931818" y="0"/>
-            <a:ext cx="3212183" cy="5143501"/>
-          </a:xfrm>
-          <a:prstGeom prst="rect">
-            <a:avLst/>
-          </a:prstGeom>
-          <a:noFill/>
-          <a:ln>
-            <a:noFill/>
-          </a:ln>
-        </p:spPr>
-      </p:pic>
-      <p:pic>
-        <p:nvPicPr>
-          <p:cNvPr id="29" name="Google Shape;29;p5" title="Logo Libertas 185x75.png"/>
-          <p:cNvPicPr preferRelativeResize="0"/>
-          <p:nvPr/>
-        </p:nvPicPr>
-        <p:blipFill>
-          <a:blip r:embed="rId4">
-            <a:alphaModFix/>
-          </a:blip>
-          <a:stretch>
-            <a:fillRect/>
-          </a:stretch>
-        </p:blipFill>
-        <p:spPr>
-          <a:xfrm>
-            <a:off x="85607" y="4568524"/>
-            <a:ext cx="1410280" cy="572700"/>
-          </a:xfrm>
-          <a:prstGeom prst="rect">
-            <a:avLst/>
-          </a:prstGeom>
-          <a:noFill/>
-          <a:ln>
-            <a:noFill/>
-          </a:ln>
-        </p:spPr>
-      </p:pic>
-    </p:spTree>
-  </p:cSld>
-  <p:clrMapOvr>
-    <a:masterClrMapping/>
-  </p:clrMapOvr>
-</p:sldLayout>
-</file>
-
-<file path=ppt/slideLayouts/slideLayout5.xml><?xml version="1.0" encoding="utf-8"?>
-<p:sldLayout xmlns:a="http://schemas.openxmlformats.org/drawingml/2006/main" xmlns:r="http://schemas.openxmlformats.org/officeDocument/2006/relationships" xmlns:p="http://schemas.openxmlformats.org/presentationml/2006/main" matchingName="Imagem">
-  <p:cSld name="CUSTOM_1">
-    <p:bg>
-      <p:bgPr>
-        <a:blipFill>
-          <a:blip r:embed="rId2">
-            <a:alphaModFix/>
-          </a:blip>
-          <a:stretch>
-            <a:fillRect/>
-          </a:stretch>
-        </a:blipFill>
-        <a:effectLst/>
-      </p:bgPr>
-    </p:bg>
-    <p:spTree>
-      <p:nvGrpSpPr>
-        <p:cNvPr id="1" name="Shape 30"/>
-        <p:cNvGrpSpPr/>
-        <p:nvPr/>
-      </p:nvGrpSpPr>
-      <p:grpSpPr>
-        <a:xfrm>
-          <a:off x="0" y="0"/>
-          <a:ext cx="0" cy="0"/>
-          <a:chOff x="0" y="0"/>
-          <a:chExt cx="0" cy="0"/>
-        </a:xfrm>
-      </p:grpSpPr>
-      <p:sp>
-        <p:nvSpPr>
-          <p:cNvPr id="31" name="Google Shape;31;p6"/>
-          <p:cNvSpPr txBox="1">
-            <a:spLocks noGrp="1"/>
-          </p:cNvSpPr>
-          <p:nvPr>
-            <p:ph type="title"/>
-          </p:nvPr>
-        </p:nvSpPr>
-        <p:spPr>
-          <a:xfrm>
-            <a:off x="1063425" y="324450"/>
-            <a:ext cx="4213800" cy="876300"/>
-          </a:xfrm>
-          <a:prstGeom prst="rect">
-            <a:avLst/>
-          </a:prstGeom>
-        </p:spPr>
-        <p:txBody>
-          <a:bodyPr spcFirstLastPara="1" wrap="square" lIns="91425" tIns="91425" rIns="91425" bIns="91425" anchor="t" anchorCtr="0">
-            <a:normAutofit/>
-          </a:bodyPr>
-          <a:lstStyle>
-            <a:lvl1pPr lvl="0">
-              <a:spcBef>
-                <a:spcPts val="0"/>
-              </a:spcBef>
-              <a:spcAft>
-                <a:spcPts val="0"/>
-              </a:spcAft>
-              <a:buClr>
-                <a:srgbClr val="841C39"/>
-              </a:buClr>
-              <a:buSzPts val="2200"/>
-              <a:buNone/>
-              <a:defRPr sz="2200">
-                <a:solidFill>
-                  <a:srgbClr val="841C39"/>
-                </a:solidFill>
-              </a:defRPr>
-            </a:lvl1pPr>
-            <a:lvl2pPr lvl="1">
-              <a:spcBef>
-                <a:spcPts val="0"/>
-              </a:spcBef>
-              <a:spcAft>
-                <a:spcPts val="0"/>
-              </a:spcAft>
-              <a:buClr>
-                <a:srgbClr val="841C39"/>
-              </a:buClr>
-              <a:buSzPts val="2800"/>
-              <a:buNone/>
-              <a:defRPr>
-                <a:solidFill>
-                  <a:srgbClr val="841C39"/>
-                </a:solidFill>
-              </a:defRPr>
-            </a:lvl2pPr>
-            <a:lvl3pPr lvl="2">
-              <a:spcBef>
-                <a:spcPts val="0"/>
-              </a:spcBef>
-              <a:spcAft>
-                <a:spcPts val="0"/>
-              </a:spcAft>
-              <a:buClr>
-                <a:srgbClr val="841C39"/>
-              </a:buClr>
-              <a:buSzPts val="2800"/>
-              <a:buNone/>
-              <a:defRPr>
-                <a:solidFill>
-                  <a:srgbClr val="841C39"/>
-                </a:solidFill>
-              </a:defRPr>
-            </a:lvl3pPr>
-            <a:lvl4pPr lvl="3">
-              <a:spcBef>
-                <a:spcPts val="0"/>
-              </a:spcBef>
-              <a:spcAft>
-                <a:spcPts val="0"/>
-              </a:spcAft>
-              <a:buClr>
-                <a:srgbClr val="841C39"/>
-              </a:buClr>
-              <a:buSzPts val="2800"/>
-              <a:buNone/>
-              <a:defRPr>
-                <a:solidFill>
-                  <a:srgbClr val="841C39"/>
-                </a:solidFill>
-              </a:defRPr>
-            </a:lvl4pPr>
-            <a:lvl5pPr lvl="4">
-              <a:spcBef>
-                <a:spcPts val="0"/>
-              </a:spcBef>
-              <a:spcAft>
-                <a:spcPts val="0"/>
-              </a:spcAft>
-              <a:buClr>
-                <a:srgbClr val="841C39"/>
-              </a:buClr>
-              <a:buSzPts val="2800"/>
-              <a:buNone/>
-              <a:defRPr>
-                <a:solidFill>
-                  <a:srgbClr val="841C39"/>
-                </a:solidFill>
-              </a:defRPr>
-            </a:lvl5pPr>
-            <a:lvl6pPr lvl="5">
-              <a:spcBef>
-                <a:spcPts val="0"/>
-              </a:spcBef>
-              <a:spcAft>
-                <a:spcPts val="0"/>
-              </a:spcAft>
-              <a:buClr>
-                <a:srgbClr val="841C39"/>
-              </a:buClr>
-              <a:buSzPts val="2800"/>
-              <a:buNone/>
-              <a:defRPr>
-                <a:solidFill>
-                  <a:srgbClr val="841C39"/>
-                </a:solidFill>
-              </a:defRPr>
-            </a:lvl6pPr>
-            <a:lvl7pPr lvl="6">
-              <a:spcBef>
-                <a:spcPts val="0"/>
-              </a:spcBef>
-              <a:spcAft>
-                <a:spcPts val="0"/>
-              </a:spcAft>
-              <a:buClr>
-                <a:srgbClr val="841C39"/>
-              </a:buClr>
-              <a:buSzPts val="2800"/>
-              <a:buNone/>
-              <a:defRPr>
-                <a:solidFill>
-                  <a:srgbClr val="841C39"/>
-                </a:solidFill>
-              </a:defRPr>
-            </a:lvl7pPr>
-            <a:lvl8pPr lvl="7">
-              <a:spcBef>
-                <a:spcPts val="0"/>
-              </a:spcBef>
-              <a:spcAft>
-                <a:spcPts val="0"/>
-              </a:spcAft>
-              <a:buClr>
-                <a:srgbClr val="841C39"/>
-              </a:buClr>
-              <a:buSzPts val="2800"/>
-              <a:buNone/>
-              <a:defRPr>
-                <a:solidFill>
-                  <a:srgbClr val="841C39"/>
-                </a:solidFill>
-              </a:defRPr>
-            </a:lvl8pPr>
-            <a:lvl9pPr lvl="8">
-              <a:spcBef>
-                <a:spcPts val="0"/>
-              </a:spcBef>
-              <a:spcAft>
-                <a:spcPts val="0"/>
-              </a:spcAft>
-              <a:buClr>
-                <a:srgbClr val="841C39"/>
-              </a:buClr>
-              <a:buSzPts val="2800"/>
-              <a:buNone/>
-              <a:defRPr>
-                <a:solidFill>
-                  <a:srgbClr val="841C39"/>
-                </a:solidFill>
-              </a:defRPr>
-            </a:lvl9pPr>
-          </a:lstStyle>
-          <a:p>
-            <a:endParaRPr/>
-          </a:p>
-        </p:txBody>
-      </p:sp>
-      <p:pic>
-        <p:nvPicPr>
-          <p:cNvPr id="32" name="Google Shape;32;p6" title="Sem título-1.png"/>
-          <p:cNvPicPr preferRelativeResize="0"/>
-          <p:nvPr/>
-        </p:nvPicPr>
-        <p:blipFill>
-          <a:blip r:embed="rId3">
-            <a:alphaModFix/>
-          </a:blip>
-          <a:stretch>
-            <a:fillRect/>
-          </a:stretch>
-        </p:blipFill>
-        <p:spPr>
-          <a:xfrm rot="10800000">
-            <a:off x="-1" y="1815774"/>
-            <a:ext cx="2081851" cy="3333576"/>
-          </a:xfrm>
-          <a:prstGeom prst="rect">
-            <a:avLst/>
-          </a:prstGeom>
-          <a:noFill/>
-          <a:ln>
-            <a:noFill/>
-          </a:ln>
-        </p:spPr>
-      </p:pic>
-      <p:pic>
-        <p:nvPicPr>
-          <p:cNvPr id="33" name="Google Shape;33;p6" title="Logo Libertas 185x75.png"/>
-          <p:cNvPicPr preferRelativeResize="0"/>
-          <p:nvPr/>
-        </p:nvPicPr>
-        <p:blipFill>
-          <a:blip r:embed="rId4">
-            <a:alphaModFix/>
-          </a:blip>
-          <a:stretch>
-            <a:fillRect/>
-          </a:stretch>
-        </p:blipFill>
-        <p:spPr>
-          <a:xfrm>
-            <a:off x="3866869" y="4576649"/>
-            <a:ext cx="1410280" cy="572700"/>
-          </a:xfrm>
-          <a:prstGeom prst="rect">
-            <a:avLst/>
-          </a:prstGeom>
-          <a:noFill/>
-          <a:ln>
-            <a:noFill/>
-          </a:ln>
-        </p:spPr>
-      </p:pic>
-      <p:sp>
-        <p:nvSpPr>
-          <p:cNvPr id="34" name="Google Shape;34;p6"/>
-          <p:cNvSpPr txBox="1">
-            <a:spLocks noGrp="1"/>
-          </p:cNvSpPr>
-          <p:nvPr>
-            <p:ph type="body" idx="1"/>
-          </p:nvPr>
-        </p:nvSpPr>
-        <p:spPr>
-          <a:xfrm>
-            <a:off x="1063425" y="1152475"/>
-            <a:ext cx="4213800" cy="3416400"/>
-          </a:xfrm>
-          <a:prstGeom prst="rect">
-            <a:avLst/>
-          </a:prstGeom>
-        </p:spPr>
-        <p:txBody>
-          <a:bodyPr spcFirstLastPara="1" wrap="square" lIns="91425" tIns="91425" rIns="91425" bIns="91425" anchor="t" anchorCtr="0">
-            <a:normAutofit/>
-          </a:bodyPr>
-          <a:lstStyle>
-            <a:lvl1pPr marL="457200" lvl="0" indent="-342900">
-              <a:spcBef>
-                <a:spcPts val="0"/>
-              </a:spcBef>
-              <a:spcAft>
-                <a:spcPts val="0"/>
-              </a:spcAft>
-              <a:buClr>
-                <a:srgbClr val="3C5258"/>
-              </a:buClr>
-              <a:buSzPts val="1800"/>
-              <a:buChar char="●"/>
-              <a:defRPr>
-                <a:solidFill>
-                  <a:srgbClr val="3C5258"/>
-                </a:solidFill>
-              </a:defRPr>
-            </a:lvl1pPr>
-            <a:lvl2pPr marL="914400" lvl="1" indent="-317500">
-              <a:spcBef>
-                <a:spcPts val="0"/>
-              </a:spcBef>
-              <a:spcAft>
-                <a:spcPts val="0"/>
-              </a:spcAft>
-              <a:buClr>
-                <a:srgbClr val="3C5258"/>
-              </a:buClr>
-              <a:buSzPts val="1400"/>
-              <a:buChar char="○"/>
-              <a:defRPr>
-                <a:solidFill>
-                  <a:srgbClr val="3C5258"/>
-                </a:solidFill>
-              </a:defRPr>
-            </a:lvl2pPr>
-            <a:lvl3pPr marL="1371600" lvl="2" indent="-317500">
-              <a:spcBef>
-                <a:spcPts val="0"/>
-              </a:spcBef>
-              <a:spcAft>
-                <a:spcPts val="0"/>
-              </a:spcAft>
-              <a:buClr>
-                <a:srgbClr val="3C5258"/>
-              </a:buClr>
-              <a:buSzPts val="1400"/>
-              <a:buChar char="■"/>
-              <a:defRPr>
-                <a:solidFill>
-                  <a:srgbClr val="3C5258"/>
-                </a:solidFill>
-              </a:defRPr>
-            </a:lvl3pPr>
-            <a:lvl4pPr marL="1828800" lvl="3" indent="-317500">
-              <a:spcBef>
-                <a:spcPts val="0"/>
-              </a:spcBef>
-              <a:spcAft>
-                <a:spcPts val="0"/>
-              </a:spcAft>
-              <a:buClr>
-                <a:srgbClr val="3C5258"/>
-              </a:buClr>
-              <a:buSzPts val="1400"/>
-              <a:buChar char="●"/>
-              <a:defRPr>
-                <a:solidFill>
-                  <a:srgbClr val="3C5258"/>
-                </a:solidFill>
-              </a:defRPr>
-            </a:lvl4pPr>
-            <a:lvl5pPr marL="2286000" lvl="4" indent="-317500">
-              <a:spcBef>
-                <a:spcPts val="0"/>
-              </a:spcBef>
-              <a:spcAft>
-                <a:spcPts val="0"/>
-              </a:spcAft>
-              <a:buClr>
-                <a:srgbClr val="3C5258"/>
-              </a:buClr>
-              <a:buSzPts val="1400"/>
-              <a:buChar char="○"/>
-              <a:defRPr>
-                <a:solidFill>
-                  <a:srgbClr val="3C5258"/>
-                </a:solidFill>
-              </a:defRPr>
-            </a:lvl5pPr>
-            <a:lvl6pPr marL="2743200" lvl="5" indent="-317500">
-              <a:spcBef>
-                <a:spcPts val="0"/>
-              </a:spcBef>
-              <a:spcAft>
-                <a:spcPts val="0"/>
-              </a:spcAft>
-              <a:buClr>
-                <a:srgbClr val="3C5258"/>
-              </a:buClr>
-              <a:buSzPts val="1400"/>
-              <a:buChar char="■"/>
-              <a:defRPr>
-                <a:solidFill>
-                  <a:srgbClr val="3C5258"/>
-                </a:solidFill>
-              </a:defRPr>
-            </a:lvl6pPr>
-            <a:lvl7pPr marL="3200400" lvl="6" indent="-317500">
-              <a:spcBef>
-                <a:spcPts val="0"/>
-              </a:spcBef>
-              <a:spcAft>
-                <a:spcPts val="0"/>
-              </a:spcAft>
-              <a:buClr>
-                <a:srgbClr val="3C5258"/>
-              </a:buClr>
-              <a:buSzPts val="1400"/>
-              <a:buChar char="●"/>
-              <a:defRPr>
-                <a:solidFill>
-                  <a:srgbClr val="3C5258"/>
-                </a:solidFill>
-              </a:defRPr>
-            </a:lvl7pPr>
-            <a:lvl8pPr marL="3657600" lvl="7" indent="-317500">
-              <a:spcBef>
-                <a:spcPts val="0"/>
-              </a:spcBef>
-              <a:spcAft>
-                <a:spcPts val="0"/>
-              </a:spcAft>
-              <a:buClr>
-                <a:srgbClr val="3C5258"/>
-              </a:buClr>
-              <a:buSzPts val="1400"/>
-              <a:buChar char="○"/>
-              <a:defRPr>
-                <a:solidFill>
-                  <a:srgbClr val="3C5258"/>
-                </a:solidFill>
-              </a:defRPr>
-            </a:lvl8pPr>
-            <a:lvl9pPr marL="4114800" lvl="8" indent="-317500">
-              <a:spcBef>
-                <a:spcPts val="0"/>
-              </a:spcBef>
-              <a:spcAft>
-                <a:spcPts val="0"/>
-              </a:spcAft>
-              <a:buClr>
-                <a:srgbClr val="3C5258"/>
-              </a:buClr>
-              <a:buSzPts val="1400"/>
-              <a:buChar char="■"/>
-              <a:defRPr>
-                <a:solidFill>
-                  <a:srgbClr val="3C5258"/>
-                </a:solidFill>
-              </a:defRPr>
-            </a:lvl9pPr>
-          </a:lstStyle>
-          <a:p>
-            <a:endParaRPr/>
-          </a:p>
-        </p:txBody>
-      </p:sp>
-    </p:spTree>
-  </p:cSld>
-  <p:clrMapOvr>
-    <a:masterClrMapping/>
-  </p:clrMapOvr>
-</p:sldLayout>
-</file>
-
-<file path=ppt/slideLayouts/slideLayout6.xml><?xml version="1.0" encoding="utf-8"?>
+<file path=ppt/slideLayouts/slideLayout3.xml><?xml version="1.0" encoding="utf-8"?>
 <p:sldLayout xmlns:a="http://schemas.openxmlformats.org/drawingml/2006/main" xmlns:r="http://schemas.openxmlformats.org/officeDocument/2006/relationships" xmlns:p="http://schemas.openxmlformats.org/presentationml/2006/main" matchingName="Blank" type="blank">
   <p:cSld name="BLANK">
     <p:bg>
@@ -7561,11 +4446,8 @@
   <p:clrMap bg1="lt1" tx1="dk1" bg2="dk2" tx2="lt2" accent1="accent1" accent2="accent2" accent3="accent3" accent4="accent4" accent5="accent5" accent6="accent6" hlink="hlink" folHlink="folHlink"/>
   <p:sldLayoutIdLst>
     <p:sldLayoutId id="2147483648" r:id="rId1"/>
-    <p:sldLayoutId id="2147483649" r:id="rId2"/>
-    <p:sldLayoutId id="2147483650" r:id="rId3"/>
-    <p:sldLayoutId id="2147483651" r:id="rId4"/>
-    <p:sldLayoutId id="2147483652" r:id="rId5"/>
-    <p:sldLayoutId id="2147483653" r:id="rId6"/>
+    <p:sldLayoutId id="2147483650" r:id="rId2"/>
+    <p:sldLayoutId id="2147483653" r:id="rId3"/>
   </p:sldLayoutIdLst>
   <p:transition spd="med">
     <p:fade thruBlk="1"/>
@@ -8906,7 +5788,7 @@
                 <a:latin typeface="Courier New" panose="02070309020205020404" pitchFamily="49" charset="0"/>
                 <a:cs typeface="Courier New" panose="02070309020205020404" pitchFamily="49" charset="0"/>
               </a:rPr>
-              <a:t>novoNnome</a:t>
+              <a:t>novoNome</a:t>
             </a:r>
             <a:r>
               <a:rPr lang="en-GB" b="1" dirty="0">
@@ -9844,7 +6726,7 @@
                 <a:latin typeface="Courier New" panose="02070309020205020404" pitchFamily="49" charset="0"/>
                 <a:cs typeface="Courier New" panose="02070309020205020404" pitchFamily="49" charset="0"/>
               </a:rPr>
-              <a:t>novoNnome</a:t>
+              <a:t>novoNome</a:t>
             </a:r>
             <a:r>
               <a:rPr lang="en-GB" b="1" dirty="0">
@@ -10342,6 +7224,156 @@
 </file>
 
 <file path=ppt/slides/slide12.xml><?xml version="1.0" encoding="utf-8"?>
+<p:sld xmlns:a="http://schemas.openxmlformats.org/drawingml/2006/main" xmlns:r="http://schemas.openxmlformats.org/officeDocument/2006/relationships" xmlns:p="http://schemas.openxmlformats.org/presentationml/2006/main">
+  <p:cSld>
+    <p:spTree>
+      <p:nvGrpSpPr>
+        <p:cNvPr id="1" name="Shape 53">
+          <a:extLst>
+            <a:ext uri="{FF2B5EF4-FFF2-40B4-BE49-F238E27FC236}">
+              <a16:creationId xmlns:a16="http://schemas.microsoft.com/office/drawing/2014/main" id="{F703F1BC-5418-1765-861E-37AAC3690545}"/>
+            </a:ext>
+          </a:extLst>
+        </p:cNvPr>
+        <p:cNvGrpSpPr/>
+        <p:nvPr/>
+      </p:nvGrpSpPr>
+      <p:grpSpPr>
+        <a:xfrm>
+          <a:off x="0" y="0"/>
+          <a:ext cx="0" cy="0"/>
+          <a:chOff x="0" y="0"/>
+          <a:chExt cx="0" cy="0"/>
+        </a:xfrm>
+      </p:grpSpPr>
+      <p:sp>
+        <p:nvSpPr>
+          <p:cNvPr id="54" name="Google Shape;54;p10">
+            <a:extLst>
+              <a:ext uri="{FF2B5EF4-FFF2-40B4-BE49-F238E27FC236}">
+                <a16:creationId xmlns:a16="http://schemas.microsoft.com/office/drawing/2014/main" id="{CA452516-89F0-80BF-1942-C4D94E1158A6}"/>
+              </a:ext>
+            </a:extLst>
+          </p:cNvPr>
+          <p:cNvSpPr txBox="1">
+            <a:spLocks noGrp="1"/>
+          </p:cNvSpPr>
+          <p:nvPr>
+            <p:ph type="title"/>
+          </p:nvPr>
+        </p:nvSpPr>
+        <p:spPr>
+          <a:xfrm>
+            <a:off x="311700" y="445025"/>
+            <a:ext cx="8520600" cy="572700"/>
+          </a:xfrm>
+          <a:prstGeom prst="rect">
+            <a:avLst/>
+          </a:prstGeom>
+        </p:spPr>
+        <p:txBody>
+          <a:bodyPr spcFirstLastPara="1" wrap="square" lIns="91425" tIns="91425" rIns="91425" bIns="91425" anchor="t" anchorCtr="0">
+            <a:normAutofit fontScale="90000"/>
+          </a:bodyPr>
+          <a:lstStyle/>
+          <a:p>
+            <a:pPr lvl="0"/>
+            <a:r>
+              <a:rPr lang="pt-BR" dirty="0"/>
+              <a:t>Encapsulamento</a:t>
+            </a:r>
+            <a:endParaRPr dirty="0"/>
+          </a:p>
+        </p:txBody>
+      </p:sp>
+      <p:sp>
+        <p:nvSpPr>
+          <p:cNvPr id="55" name="Google Shape;55;p10">
+            <a:extLst>
+              <a:ext uri="{FF2B5EF4-FFF2-40B4-BE49-F238E27FC236}">
+                <a16:creationId xmlns:a16="http://schemas.microsoft.com/office/drawing/2014/main" id="{12B9CDAB-D9B7-4474-0D8F-FD9162FE6D62}"/>
+              </a:ext>
+            </a:extLst>
+          </p:cNvPr>
+          <p:cNvSpPr txBox="1">
+            <a:spLocks noGrp="1"/>
+          </p:cNvSpPr>
+          <p:nvPr>
+            <p:ph type="body" idx="1"/>
+          </p:nvPr>
+        </p:nvSpPr>
+        <p:spPr>
+          <a:xfrm>
+            <a:off x="311700" y="1152475"/>
+            <a:ext cx="8520600" cy="3416400"/>
+          </a:xfrm>
+          <a:prstGeom prst="rect">
+            <a:avLst/>
+          </a:prstGeom>
+        </p:spPr>
+        <p:txBody>
+          <a:bodyPr spcFirstLastPara="1" wrap="square" lIns="91425" tIns="91425" rIns="91425" bIns="91425" anchor="t" anchorCtr="0">
+            <a:normAutofit/>
+          </a:bodyPr>
+          <a:lstStyle/>
+          <a:p>
+            <a:pPr>
+              <a:buFont typeface="Arial" panose="020B0604020202020204" pitchFamily="34" charset="0"/>
+              <a:buChar char="•"/>
+            </a:pPr>
+            <a:r>
+              <a:rPr lang="pt-BR" dirty="0"/>
+              <a:t>Proteger os atributos através de métodos de acesso. Ou seja, outras classes não terão acesso direto aos atributos (privados) e deverão ser criados método públicos GET e SET.</a:t>
+            </a:r>
+          </a:p>
+          <a:p>
+            <a:pPr lvl="1">
+              <a:buFont typeface="Arial" panose="020B0604020202020204" pitchFamily="34" charset="0"/>
+              <a:buChar char="•"/>
+            </a:pPr>
+            <a:r>
+              <a:rPr lang="pt-BR" dirty="0"/>
+              <a:t>GET: pegar</a:t>
+            </a:r>
+          </a:p>
+          <a:p>
+            <a:pPr lvl="1">
+              <a:buFont typeface="Arial" panose="020B0604020202020204" pitchFamily="34" charset="0"/>
+              <a:buChar char="•"/>
+            </a:pPr>
+            <a:r>
+              <a:rPr lang="pt-BR" dirty="0"/>
+              <a:t>SET: atribuir</a:t>
+            </a:r>
+          </a:p>
+          <a:p>
+            <a:pPr marL="0" lvl="0" indent="0" algn="l" rtl="0">
+              <a:spcBef>
+                <a:spcPts val="0"/>
+              </a:spcBef>
+              <a:spcAft>
+                <a:spcPts val="1200"/>
+              </a:spcAft>
+              <a:buNone/>
+            </a:pPr>
+            <a:endParaRPr dirty="0"/>
+          </a:p>
+        </p:txBody>
+      </p:sp>
+    </p:spTree>
+    <p:extLst>
+      <p:ext uri="{BB962C8B-B14F-4D97-AF65-F5344CB8AC3E}">
+        <p14:creationId xmlns:p14="http://schemas.microsoft.com/office/powerpoint/2010/main" val="1996802702"/>
+      </p:ext>
+    </p:extLst>
+  </p:cSld>
+  <p:clrMapOvr>
+    <a:masterClrMapping/>
+  </p:clrMapOvr>
+</p:sld>
+</file>
+
+<file path=ppt/slides/slide13.xml><?xml version="1.0" encoding="utf-8"?>
 <p:sld xmlns:a="http://schemas.openxmlformats.org/drawingml/2006/main" xmlns:r="http://schemas.openxmlformats.org/officeDocument/2006/relationships" xmlns:p="http://schemas.openxmlformats.org/presentationml/2006/main">
   <p:cSld>
     <p:spTree>
@@ -10488,156 +7520,6 @@
     <p:extLst>
       <p:ext uri="{BB962C8B-B14F-4D97-AF65-F5344CB8AC3E}">
         <p14:creationId xmlns:p14="http://schemas.microsoft.com/office/powerpoint/2010/main" val="984072111"/>
-      </p:ext>
-    </p:extLst>
-  </p:cSld>
-  <p:clrMapOvr>
-    <a:masterClrMapping/>
-  </p:clrMapOvr>
-</p:sld>
-</file>
-
-<file path=ppt/slides/slide13.xml><?xml version="1.0" encoding="utf-8"?>
-<p:sld xmlns:a="http://schemas.openxmlformats.org/drawingml/2006/main" xmlns:r="http://schemas.openxmlformats.org/officeDocument/2006/relationships" xmlns:p="http://schemas.openxmlformats.org/presentationml/2006/main">
-  <p:cSld>
-    <p:spTree>
-      <p:nvGrpSpPr>
-        <p:cNvPr id="1" name="Shape 53">
-          <a:extLst>
-            <a:ext uri="{FF2B5EF4-FFF2-40B4-BE49-F238E27FC236}">
-              <a16:creationId xmlns:a16="http://schemas.microsoft.com/office/drawing/2014/main" id="{F703F1BC-5418-1765-861E-37AAC3690545}"/>
-            </a:ext>
-          </a:extLst>
-        </p:cNvPr>
-        <p:cNvGrpSpPr/>
-        <p:nvPr/>
-      </p:nvGrpSpPr>
-      <p:grpSpPr>
-        <a:xfrm>
-          <a:off x="0" y="0"/>
-          <a:ext cx="0" cy="0"/>
-          <a:chOff x="0" y="0"/>
-          <a:chExt cx="0" cy="0"/>
-        </a:xfrm>
-      </p:grpSpPr>
-      <p:sp>
-        <p:nvSpPr>
-          <p:cNvPr id="54" name="Google Shape;54;p10">
-            <a:extLst>
-              <a:ext uri="{FF2B5EF4-FFF2-40B4-BE49-F238E27FC236}">
-                <a16:creationId xmlns:a16="http://schemas.microsoft.com/office/drawing/2014/main" id="{CA452516-89F0-80BF-1942-C4D94E1158A6}"/>
-              </a:ext>
-            </a:extLst>
-          </p:cNvPr>
-          <p:cNvSpPr txBox="1">
-            <a:spLocks noGrp="1"/>
-          </p:cNvSpPr>
-          <p:nvPr>
-            <p:ph type="title"/>
-          </p:nvPr>
-        </p:nvSpPr>
-        <p:spPr>
-          <a:xfrm>
-            <a:off x="311700" y="445025"/>
-            <a:ext cx="8520600" cy="572700"/>
-          </a:xfrm>
-          <a:prstGeom prst="rect">
-            <a:avLst/>
-          </a:prstGeom>
-        </p:spPr>
-        <p:txBody>
-          <a:bodyPr spcFirstLastPara="1" wrap="square" lIns="91425" tIns="91425" rIns="91425" bIns="91425" anchor="t" anchorCtr="0">
-            <a:normAutofit fontScale="90000"/>
-          </a:bodyPr>
-          <a:lstStyle/>
-          <a:p>
-            <a:pPr lvl="0"/>
-            <a:r>
-              <a:rPr lang="pt-BR" dirty="0"/>
-              <a:t>Encapsulamento</a:t>
-            </a:r>
-            <a:endParaRPr dirty="0"/>
-          </a:p>
-        </p:txBody>
-      </p:sp>
-      <p:sp>
-        <p:nvSpPr>
-          <p:cNvPr id="55" name="Google Shape;55;p10">
-            <a:extLst>
-              <a:ext uri="{FF2B5EF4-FFF2-40B4-BE49-F238E27FC236}">
-                <a16:creationId xmlns:a16="http://schemas.microsoft.com/office/drawing/2014/main" id="{12B9CDAB-D9B7-4474-0D8F-FD9162FE6D62}"/>
-              </a:ext>
-            </a:extLst>
-          </p:cNvPr>
-          <p:cNvSpPr txBox="1">
-            <a:spLocks noGrp="1"/>
-          </p:cNvSpPr>
-          <p:nvPr>
-            <p:ph type="body" idx="1"/>
-          </p:nvPr>
-        </p:nvSpPr>
-        <p:spPr>
-          <a:xfrm>
-            <a:off x="311700" y="1152475"/>
-            <a:ext cx="8520600" cy="3416400"/>
-          </a:xfrm>
-          <a:prstGeom prst="rect">
-            <a:avLst/>
-          </a:prstGeom>
-        </p:spPr>
-        <p:txBody>
-          <a:bodyPr spcFirstLastPara="1" wrap="square" lIns="91425" tIns="91425" rIns="91425" bIns="91425" anchor="t" anchorCtr="0">
-            <a:normAutofit/>
-          </a:bodyPr>
-          <a:lstStyle/>
-          <a:p>
-            <a:pPr>
-              <a:buFont typeface="Arial" panose="020B0604020202020204" pitchFamily="34" charset="0"/>
-              <a:buChar char="•"/>
-            </a:pPr>
-            <a:r>
-              <a:rPr lang="pt-BR" dirty="0"/>
-              <a:t>Proteger os atributos através de métodos de acesso. Ou seja, outras classes não terão acesso direto aos atributos (privados) e deverão ser criados método públicos GET e SET.</a:t>
-            </a:r>
-          </a:p>
-          <a:p>
-            <a:pPr lvl="1">
-              <a:buFont typeface="Arial" panose="020B0604020202020204" pitchFamily="34" charset="0"/>
-              <a:buChar char="•"/>
-            </a:pPr>
-            <a:r>
-              <a:rPr lang="pt-BR" dirty="0"/>
-              <a:t>GET: pegar</a:t>
-            </a:r>
-          </a:p>
-          <a:p>
-            <a:pPr lvl="1">
-              <a:buFont typeface="Arial" panose="020B0604020202020204" pitchFamily="34" charset="0"/>
-              <a:buChar char="•"/>
-            </a:pPr>
-            <a:r>
-              <a:rPr lang="pt-BR" dirty="0"/>
-              <a:t>SET: atribuir</a:t>
-            </a:r>
-          </a:p>
-          <a:p>
-            <a:pPr marL="0" lvl="0" indent="0" algn="l" rtl="0">
-              <a:spcBef>
-                <a:spcPts val="0"/>
-              </a:spcBef>
-              <a:spcAft>
-                <a:spcPts val="1200"/>
-              </a:spcAft>
-              <a:buNone/>
-            </a:pPr>
-            <a:endParaRPr dirty="0"/>
-          </a:p>
-        </p:txBody>
-      </p:sp>
-    </p:spTree>
-    <p:extLst>
-      <p:ext uri="{BB962C8B-B14F-4D97-AF65-F5344CB8AC3E}">
-        <p14:creationId xmlns:p14="http://schemas.microsoft.com/office/powerpoint/2010/main" val="1996802702"/>
       </p:ext>
     </p:extLst>
   </p:cSld>
@@ -10906,239 +7788,6 @@
         <p:cNvPr id="1" name="Shape 53">
           <a:extLst>
             <a:ext uri="{FF2B5EF4-FFF2-40B4-BE49-F238E27FC236}">
-              <a16:creationId xmlns:a16="http://schemas.microsoft.com/office/drawing/2014/main" id="{D9CCBBAA-DBE7-EF3B-C028-EA89C701B6C6}"/>
-            </a:ext>
-          </a:extLst>
-        </p:cNvPr>
-        <p:cNvGrpSpPr/>
-        <p:nvPr/>
-      </p:nvGrpSpPr>
-      <p:grpSpPr>
-        <a:xfrm>
-          <a:off x="0" y="0"/>
-          <a:ext cx="0" cy="0"/>
-          <a:chOff x="0" y="0"/>
-          <a:chExt cx="0" cy="0"/>
-        </a:xfrm>
-      </p:grpSpPr>
-      <p:sp>
-        <p:nvSpPr>
-          <p:cNvPr id="54" name="Google Shape;54;p10">
-            <a:extLst>
-              <a:ext uri="{FF2B5EF4-FFF2-40B4-BE49-F238E27FC236}">
-                <a16:creationId xmlns:a16="http://schemas.microsoft.com/office/drawing/2014/main" id="{63B28A7D-73EC-EB60-1118-7CB5D27597B4}"/>
-              </a:ext>
-            </a:extLst>
-          </p:cNvPr>
-          <p:cNvSpPr txBox="1">
-            <a:spLocks noGrp="1"/>
-          </p:cNvSpPr>
-          <p:nvPr>
-            <p:ph type="title"/>
-          </p:nvPr>
-        </p:nvSpPr>
-        <p:spPr>
-          <a:xfrm>
-            <a:off x="311700" y="445025"/>
-            <a:ext cx="8520600" cy="572700"/>
-          </a:xfrm>
-          <a:prstGeom prst="rect">
-            <a:avLst/>
-          </a:prstGeom>
-        </p:spPr>
-        <p:txBody>
-          <a:bodyPr spcFirstLastPara="1" wrap="square" lIns="91425" tIns="91425" rIns="91425" bIns="91425" anchor="t" anchorCtr="0">
-            <a:normAutofit fontScale="90000"/>
-          </a:bodyPr>
-          <a:lstStyle/>
-          <a:p>
-            <a:pPr marL="0" lvl="0" indent="0" algn="l" rtl="0">
-              <a:spcBef>
-                <a:spcPts val="0"/>
-              </a:spcBef>
-              <a:spcAft>
-                <a:spcPts val="0"/>
-              </a:spcAft>
-              <a:buNone/>
-            </a:pPr>
-            <a:r>
-              <a:rPr lang="pt-BR" dirty="0"/>
-              <a:t>Exercício</a:t>
-            </a:r>
-            <a:endParaRPr dirty="0"/>
-          </a:p>
-        </p:txBody>
-      </p:sp>
-      <p:sp>
-        <p:nvSpPr>
-          <p:cNvPr id="55" name="Google Shape;55;p10">
-            <a:extLst>
-              <a:ext uri="{FF2B5EF4-FFF2-40B4-BE49-F238E27FC236}">
-                <a16:creationId xmlns:a16="http://schemas.microsoft.com/office/drawing/2014/main" id="{97B5F8B2-E1F5-BD14-C5CB-81823E6E39B4}"/>
-              </a:ext>
-            </a:extLst>
-          </p:cNvPr>
-          <p:cNvSpPr txBox="1">
-            <a:spLocks noGrp="1"/>
-          </p:cNvSpPr>
-          <p:nvPr>
-            <p:ph type="body" idx="1"/>
-          </p:nvPr>
-        </p:nvSpPr>
-        <p:spPr>
-          <a:xfrm>
-            <a:off x="311700" y="1152475"/>
-            <a:ext cx="8520600" cy="3416400"/>
-          </a:xfrm>
-          <a:prstGeom prst="rect">
-            <a:avLst/>
-          </a:prstGeom>
-        </p:spPr>
-        <p:txBody>
-          <a:bodyPr spcFirstLastPara="1" wrap="square" lIns="91425" tIns="91425" rIns="91425" bIns="91425" anchor="t" anchorCtr="0">
-            <a:normAutofit fontScale="62500" lnSpcReduction="20000"/>
-          </a:bodyPr>
-          <a:lstStyle/>
-          <a:p>
-            <a:pPr marL="0" lvl="0" indent="0" algn="l" rtl="0">
-              <a:spcBef>
-                <a:spcPts val="0"/>
-              </a:spcBef>
-              <a:spcAft>
-                <a:spcPts val="1200"/>
-              </a:spcAft>
-              <a:buNone/>
-            </a:pPr>
-            <a:r>
-              <a:rPr lang="pt-BR" dirty="0"/>
-              <a:t> * CRIE UMA CLASSE CHAMADA FUNCIONARIO CONTENDO OS ATRIBUTOS:</a:t>
-            </a:r>
-          </a:p>
-          <a:p>
-            <a:pPr marL="0" lvl="0" indent="0" algn="l" rtl="0">
-              <a:spcBef>
-                <a:spcPts val="0"/>
-              </a:spcBef>
-              <a:spcAft>
-                <a:spcPts val="1200"/>
-              </a:spcAft>
-              <a:buNone/>
-            </a:pPr>
-            <a:r>
-              <a:rPr lang="pt-BR" dirty="0"/>
-              <a:t> * NOME, CARGO, SALARIO, VALORVENDIDO E PERCENTUALCOMISSAO</a:t>
-            </a:r>
-          </a:p>
-          <a:p>
-            <a:pPr marL="0" lvl="0" indent="0" algn="l" rtl="0">
-              <a:spcBef>
-                <a:spcPts val="0"/>
-              </a:spcBef>
-              <a:spcAft>
-                <a:spcPts val="1200"/>
-              </a:spcAft>
-              <a:buNone/>
-            </a:pPr>
-            <a:r>
-              <a:rPr lang="pt-BR" dirty="0"/>
-              <a:t> * O SALÁRIO NÃO PODERÁ SER MENOR DO QUE MEIO SALÁRIO MÍNIMO (550,00)</a:t>
-            </a:r>
-          </a:p>
-          <a:p>
-            <a:pPr marL="0" lvl="0" indent="0" algn="l" rtl="0">
-              <a:spcBef>
-                <a:spcPts val="0"/>
-              </a:spcBef>
-              <a:spcAft>
-                <a:spcPts val="1200"/>
-              </a:spcAft>
-              <a:buNone/>
-            </a:pPr>
-            <a:r>
-              <a:rPr lang="pt-BR" dirty="0"/>
-              <a:t> * O PERCENTUAL DE COMISSÃO NÃO PODERÁ SER NEGATIVO E NEM </a:t>
-            </a:r>
-          </a:p>
-          <a:p>
-            <a:pPr marL="0" lvl="0" indent="0" algn="l" rtl="0">
-              <a:spcBef>
-                <a:spcPts val="0"/>
-              </a:spcBef>
-              <a:spcAft>
-                <a:spcPts val="1200"/>
-              </a:spcAft>
-              <a:buNone/>
-            </a:pPr>
-            <a:r>
-              <a:rPr lang="pt-BR" dirty="0"/>
-              <a:t> * MAIOR QUE 25%.  O VALORVENDIDO NÃO PODERÁ SER NEGATIVO.</a:t>
-            </a:r>
-          </a:p>
-          <a:p>
-            <a:pPr marL="0" lvl="0" indent="0" algn="l" rtl="0">
-              <a:spcBef>
-                <a:spcPts val="0"/>
-              </a:spcBef>
-              <a:spcAft>
-                <a:spcPts val="1200"/>
-              </a:spcAft>
-              <a:buNone/>
-            </a:pPr>
-            <a:r>
-              <a:rPr lang="pt-BR" dirty="0"/>
-              <a:t> * CRIE AINDA UM MÉTODO CAPAZ DE RETORNAR O VALOR DA COMISSAO, CALCULANDO-SE</a:t>
-            </a:r>
-          </a:p>
-          <a:p>
-            <a:pPr marL="0" lvl="0" indent="0" algn="l" rtl="0">
-              <a:spcBef>
-                <a:spcPts val="0"/>
-              </a:spcBef>
-              <a:spcAft>
-                <a:spcPts val="1200"/>
-              </a:spcAft>
-              <a:buNone/>
-            </a:pPr>
-            <a:r>
-              <a:rPr lang="pt-BR" dirty="0"/>
-              <a:t> * O PERCENTUAL DA COMISSÃO SOBRE O VALOR VENDIDO.</a:t>
-            </a:r>
-          </a:p>
-          <a:p>
-            <a:pPr marL="0" lvl="0" indent="0" algn="l" rtl="0">
-              <a:spcBef>
-                <a:spcPts val="0"/>
-              </a:spcBef>
-              <a:spcAft>
-                <a:spcPts val="1200"/>
-              </a:spcAft>
-              <a:buNone/>
-            </a:pPr>
-            <a:endParaRPr dirty="0"/>
-          </a:p>
-        </p:txBody>
-      </p:sp>
-    </p:spTree>
-    <p:extLst>
-      <p:ext uri="{BB962C8B-B14F-4D97-AF65-F5344CB8AC3E}">
-        <p14:creationId xmlns:p14="http://schemas.microsoft.com/office/powerpoint/2010/main" val="1738953229"/>
-      </p:ext>
-    </p:extLst>
-  </p:cSld>
-  <p:clrMapOvr>
-    <a:masterClrMapping/>
-  </p:clrMapOvr>
-</p:sld>
-</file>
-
-<file path=ppt/slides/slide16.xml><?xml version="1.0" encoding="utf-8"?>
-<p:sld xmlns:a="http://schemas.openxmlformats.org/drawingml/2006/main" xmlns:r="http://schemas.openxmlformats.org/officeDocument/2006/relationships" xmlns:p="http://schemas.openxmlformats.org/presentationml/2006/main">
-  <p:cSld>
-    <p:spTree>
-      <p:nvGrpSpPr>
-        <p:cNvPr id="1" name="Shape 53">
-          <a:extLst>
-            <a:ext uri="{FF2B5EF4-FFF2-40B4-BE49-F238E27FC236}">
               <a16:creationId xmlns:a16="http://schemas.microsoft.com/office/drawing/2014/main" id="{C402F3EE-93CB-1285-CEA7-43604F41FE97}"/>
             </a:ext>
           </a:extLst>
@@ -11194,7 +7843,11 @@
               </a:spcAft>
               <a:buNone/>
             </a:pPr>
-            <a:endParaRPr/>
+            <a:r>
+              <a:rPr lang="pt-BR" dirty="0"/>
+              <a:t>Exercício </a:t>
+            </a:r>
+            <a:endParaRPr dirty="0"/>
           </a:p>
         </p:txBody>
       </p:sp>
@@ -11225,20 +7878,102 @@
         </p:spPr>
         <p:txBody>
           <a:bodyPr spcFirstLastPara="1" wrap="square" lIns="91425" tIns="91425" rIns="91425" bIns="91425" anchor="t" anchorCtr="0">
-            <a:normAutofit/>
+            <a:normAutofit fontScale="92500" lnSpcReduction="10000"/>
           </a:bodyPr>
           <a:lstStyle/>
           <a:p>
-            <a:pPr marL="0" lvl="0" indent="0" algn="l" rtl="0">
-              <a:spcBef>
-                <a:spcPts val="0"/>
-              </a:spcBef>
+            <a:pPr marL="0" lvl="0" indent="0">
               <a:spcAft>
                 <a:spcPts val="1200"/>
               </a:spcAft>
               <a:buNone/>
             </a:pPr>
-            <a:endParaRPr/>
+            <a:r>
+              <a:rPr lang="pt-BR" dirty="0"/>
+              <a:t>Crie uma classe chamada </a:t>
+            </a:r>
+            <a:r>
+              <a:rPr lang="pt-BR" dirty="0" err="1"/>
+              <a:t>Funcionario</a:t>
+            </a:r>
+            <a:r>
+              <a:rPr lang="pt-BR" dirty="0"/>
+              <a:t> contendo os atributos:</a:t>
+            </a:r>
+          </a:p>
+          <a:p>
+            <a:pPr marL="0" lvl="0" indent="0">
+              <a:spcAft>
+                <a:spcPts val="1200"/>
+              </a:spcAft>
+              <a:buNone/>
+            </a:pPr>
+            <a:r>
+              <a:rPr lang="pt-BR" dirty="0"/>
+              <a:t>nome, cargo, salario, </a:t>
+            </a:r>
+            <a:r>
+              <a:rPr lang="pt-BR" dirty="0" err="1"/>
+              <a:t>valorvendido</a:t>
+            </a:r>
+            <a:r>
+              <a:rPr lang="pt-BR" dirty="0"/>
+              <a:t> e </a:t>
+            </a:r>
+            <a:r>
+              <a:rPr lang="pt-BR" dirty="0" err="1"/>
+              <a:t>percentualcomissao</a:t>
+            </a:r>
+            <a:endParaRPr lang="pt-BR" dirty="0"/>
+          </a:p>
+          <a:p>
+            <a:pPr marL="0" lvl="0" indent="0">
+              <a:spcAft>
+                <a:spcPts val="1200"/>
+              </a:spcAft>
+              <a:buNone/>
+            </a:pPr>
+            <a:r>
+              <a:rPr lang="pt-BR" dirty="0"/>
+              <a:t>O salário não poderá ser menor do que meio salário mínimo (810,50) o percentual de comissão não poderá ser negativo </a:t>
+            </a:r>
+            <a:r>
+              <a:rPr lang="pt-BR"/>
+              <a:t>e nem maior </a:t>
+            </a:r>
+            <a:r>
+              <a:rPr lang="pt-BR" dirty="0"/>
+              <a:t>que 25%.  O </a:t>
+            </a:r>
+            <a:r>
+              <a:rPr lang="pt-BR" dirty="0" err="1"/>
+              <a:t>valorvendido</a:t>
+            </a:r>
+            <a:r>
+              <a:rPr lang="pt-BR" dirty="0"/>
+              <a:t> não poderá ser negativo.</a:t>
+            </a:r>
+          </a:p>
+          <a:p>
+            <a:pPr marL="0" lvl="0" indent="0">
+              <a:spcAft>
+                <a:spcPts val="1200"/>
+              </a:spcAft>
+              <a:buNone/>
+            </a:pPr>
+            <a:r>
+              <a:rPr lang="pt-BR" dirty="0"/>
+              <a:t>Crie ainda um método capaz de retornar o valor da </a:t>
+            </a:r>
+            <a:r>
+              <a:rPr lang="pt-BR" dirty="0" err="1"/>
+              <a:t>comissao</a:t>
+            </a:r>
+            <a:r>
+              <a:rPr lang="pt-BR" dirty="0"/>
+              <a:t>, calculando-se o percentual da comissão sobre o valor vendido.</a:t>
+            </a:r>
+            <a:endParaRPr dirty="0"/>
           </a:p>
         </p:txBody>
       </p:sp>
@@ -11255,18 +7990,12 @@
 </p:sld>
 </file>
 
-<file path=ppt/slides/slide17.xml><?xml version="1.0" encoding="utf-8"?>
+<file path=ppt/slides/slide16.xml><?xml version="1.0" encoding="utf-8"?>
 <p:sld xmlns:a="http://schemas.openxmlformats.org/drawingml/2006/main" xmlns:r="http://schemas.openxmlformats.org/officeDocument/2006/relationships" xmlns:p="http://schemas.openxmlformats.org/presentationml/2006/main">
   <p:cSld>
     <p:spTree>
       <p:nvGrpSpPr>
-        <p:cNvPr id="1" name="Shape 53">
-          <a:extLst>
-            <a:ext uri="{FF2B5EF4-FFF2-40B4-BE49-F238E27FC236}">
-              <a16:creationId xmlns:a16="http://schemas.microsoft.com/office/drawing/2014/main" id="{DF7441D4-E687-55B0-3A7E-11F0F78A3794}"/>
-            </a:ext>
-          </a:extLst>
-        </p:cNvPr>
+        <p:cNvPr id="1" name="Shape 71"/>
         <p:cNvGrpSpPr/>
         <p:nvPr/>
       </p:nvGrpSpPr>
@@ -11278,348 +8007,7 @@
           <a:chExt cx="0" cy="0"/>
         </a:xfrm>
       </p:grpSpPr>
-      <p:sp>
-        <p:nvSpPr>
-          <p:cNvPr id="54" name="Google Shape;54;p10">
-            <a:extLst>
-              <a:ext uri="{FF2B5EF4-FFF2-40B4-BE49-F238E27FC236}">
-                <a16:creationId xmlns:a16="http://schemas.microsoft.com/office/drawing/2014/main" id="{394AA0E8-49D0-B279-7D6B-523C851BB8C2}"/>
-              </a:ext>
-            </a:extLst>
-          </p:cNvPr>
-          <p:cNvSpPr txBox="1">
-            <a:spLocks noGrp="1"/>
-          </p:cNvSpPr>
-          <p:nvPr>
-            <p:ph type="title"/>
-          </p:nvPr>
-        </p:nvSpPr>
-        <p:spPr>
-          <a:xfrm>
-            <a:off x="311700" y="445025"/>
-            <a:ext cx="8520600" cy="572700"/>
-          </a:xfrm>
-          <a:prstGeom prst="rect">
-            <a:avLst/>
-          </a:prstGeom>
-        </p:spPr>
-        <p:txBody>
-          <a:bodyPr spcFirstLastPara="1" wrap="square" lIns="91425" tIns="91425" rIns="91425" bIns="91425" anchor="t" anchorCtr="0">
-            <a:normAutofit fontScale="90000"/>
-          </a:bodyPr>
-          <a:lstStyle/>
-          <a:p>
-            <a:pPr marL="0" lvl="0" indent="0" algn="l" rtl="0">
-              <a:spcBef>
-                <a:spcPts val="0"/>
-              </a:spcBef>
-              <a:spcAft>
-                <a:spcPts val="0"/>
-              </a:spcAft>
-              <a:buNone/>
-            </a:pPr>
-            <a:endParaRPr/>
-          </a:p>
-        </p:txBody>
-      </p:sp>
-      <p:sp>
-        <p:nvSpPr>
-          <p:cNvPr id="55" name="Google Shape;55;p10">
-            <a:extLst>
-              <a:ext uri="{FF2B5EF4-FFF2-40B4-BE49-F238E27FC236}">
-                <a16:creationId xmlns:a16="http://schemas.microsoft.com/office/drawing/2014/main" id="{A5C68A51-1A10-F3FB-28B2-D533B5745B8E}"/>
-              </a:ext>
-            </a:extLst>
-          </p:cNvPr>
-          <p:cNvSpPr txBox="1">
-            <a:spLocks noGrp="1"/>
-          </p:cNvSpPr>
-          <p:nvPr>
-            <p:ph type="body" idx="1"/>
-          </p:nvPr>
-        </p:nvSpPr>
-        <p:spPr>
-          <a:xfrm>
-            <a:off x="311700" y="1152475"/>
-            <a:ext cx="8520600" cy="3416400"/>
-          </a:xfrm>
-          <a:prstGeom prst="rect">
-            <a:avLst/>
-          </a:prstGeom>
-        </p:spPr>
-        <p:txBody>
-          <a:bodyPr spcFirstLastPara="1" wrap="square" lIns="91425" tIns="91425" rIns="91425" bIns="91425" anchor="t" anchorCtr="0">
-            <a:normAutofit/>
-          </a:bodyPr>
-          <a:lstStyle/>
-          <a:p>
-            <a:pPr marL="0" lvl="0" indent="0" algn="l" rtl="0">
-              <a:spcBef>
-                <a:spcPts val="0"/>
-              </a:spcBef>
-              <a:spcAft>
-                <a:spcPts val="1200"/>
-              </a:spcAft>
-              <a:buNone/>
-            </a:pPr>
-            <a:endParaRPr/>
-          </a:p>
-        </p:txBody>
-      </p:sp>
     </p:spTree>
-    <p:extLst>
-      <p:ext uri="{BB962C8B-B14F-4D97-AF65-F5344CB8AC3E}">
-        <p14:creationId xmlns:p14="http://schemas.microsoft.com/office/powerpoint/2010/main" val="4060089266"/>
-      </p:ext>
-    </p:extLst>
-  </p:cSld>
-  <p:clrMapOvr>
-    <a:masterClrMapping/>
-  </p:clrMapOvr>
-</p:sld>
-</file>
-
-<file path=ppt/slides/slide18.xml><?xml version="1.0" encoding="utf-8"?>
-<p:sld xmlns:a="http://schemas.openxmlformats.org/drawingml/2006/main" xmlns:r="http://schemas.openxmlformats.org/officeDocument/2006/relationships" xmlns:p="http://schemas.openxmlformats.org/presentationml/2006/main">
-  <p:cSld>
-    <p:spTree>
-      <p:nvGrpSpPr>
-        <p:cNvPr id="1" name="Shape 53">
-          <a:extLst>
-            <a:ext uri="{FF2B5EF4-FFF2-40B4-BE49-F238E27FC236}">
-              <a16:creationId xmlns:a16="http://schemas.microsoft.com/office/drawing/2014/main" id="{2B968CF0-E736-71F1-DD4E-514C69A33876}"/>
-            </a:ext>
-          </a:extLst>
-        </p:cNvPr>
-        <p:cNvGrpSpPr/>
-        <p:nvPr/>
-      </p:nvGrpSpPr>
-      <p:grpSpPr>
-        <a:xfrm>
-          <a:off x="0" y="0"/>
-          <a:ext cx="0" cy="0"/>
-          <a:chOff x="0" y="0"/>
-          <a:chExt cx="0" cy="0"/>
-        </a:xfrm>
-      </p:grpSpPr>
-      <p:sp>
-        <p:nvSpPr>
-          <p:cNvPr id="54" name="Google Shape;54;p10">
-            <a:extLst>
-              <a:ext uri="{FF2B5EF4-FFF2-40B4-BE49-F238E27FC236}">
-                <a16:creationId xmlns:a16="http://schemas.microsoft.com/office/drawing/2014/main" id="{36E63F46-B7F6-4B29-6026-528C9E5D268D}"/>
-              </a:ext>
-            </a:extLst>
-          </p:cNvPr>
-          <p:cNvSpPr txBox="1">
-            <a:spLocks noGrp="1"/>
-          </p:cNvSpPr>
-          <p:nvPr>
-            <p:ph type="title"/>
-          </p:nvPr>
-        </p:nvSpPr>
-        <p:spPr>
-          <a:xfrm>
-            <a:off x="311700" y="445025"/>
-            <a:ext cx="8520600" cy="572700"/>
-          </a:xfrm>
-          <a:prstGeom prst="rect">
-            <a:avLst/>
-          </a:prstGeom>
-        </p:spPr>
-        <p:txBody>
-          <a:bodyPr spcFirstLastPara="1" wrap="square" lIns="91425" tIns="91425" rIns="91425" bIns="91425" anchor="t" anchorCtr="0">
-            <a:normAutofit fontScale="90000"/>
-          </a:bodyPr>
-          <a:lstStyle/>
-          <a:p>
-            <a:pPr marL="0" lvl="0" indent="0" algn="l" rtl="0">
-              <a:spcBef>
-                <a:spcPts val="0"/>
-              </a:spcBef>
-              <a:spcAft>
-                <a:spcPts val="0"/>
-              </a:spcAft>
-              <a:buNone/>
-            </a:pPr>
-            <a:endParaRPr/>
-          </a:p>
-        </p:txBody>
-      </p:sp>
-      <p:sp>
-        <p:nvSpPr>
-          <p:cNvPr id="55" name="Google Shape;55;p10">
-            <a:extLst>
-              <a:ext uri="{FF2B5EF4-FFF2-40B4-BE49-F238E27FC236}">
-                <a16:creationId xmlns:a16="http://schemas.microsoft.com/office/drawing/2014/main" id="{A0BC6EEC-3D19-936C-F891-F312D28460C3}"/>
-              </a:ext>
-            </a:extLst>
-          </p:cNvPr>
-          <p:cNvSpPr txBox="1">
-            <a:spLocks noGrp="1"/>
-          </p:cNvSpPr>
-          <p:nvPr>
-            <p:ph type="body" idx="1"/>
-          </p:nvPr>
-        </p:nvSpPr>
-        <p:spPr>
-          <a:xfrm>
-            <a:off x="311700" y="1152475"/>
-            <a:ext cx="8520600" cy="3416400"/>
-          </a:xfrm>
-          <a:prstGeom prst="rect">
-            <a:avLst/>
-          </a:prstGeom>
-        </p:spPr>
-        <p:txBody>
-          <a:bodyPr spcFirstLastPara="1" wrap="square" lIns="91425" tIns="91425" rIns="91425" bIns="91425" anchor="t" anchorCtr="0">
-            <a:normAutofit/>
-          </a:bodyPr>
-          <a:lstStyle/>
-          <a:p>
-            <a:pPr marL="0" lvl="0" indent="0" algn="l" rtl="0">
-              <a:spcBef>
-                <a:spcPts val="0"/>
-              </a:spcBef>
-              <a:spcAft>
-                <a:spcPts val="1200"/>
-              </a:spcAft>
-              <a:buNone/>
-            </a:pPr>
-            <a:endParaRPr/>
-          </a:p>
-        </p:txBody>
-      </p:sp>
-    </p:spTree>
-    <p:extLst>
-      <p:ext uri="{BB962C8B-B14F-4D97-AF65-F5344CB8AC3E}">
-        <p14:creationId xmlns:p14="http://schemas.microsoft.com/office/powerpoint/2010/main" val="3172730970"/>
-      </p:ext>
-    </p:extLst>
-  </p:cSld>
-  <p:clrMapOvr>
-    <a:masterClrMapping/>
-  </p:clrMapOvr>
-</p:sld>
-</file>
-
-<file path=ppt/slides/slide19.xml><?xml version="1.0" encoding="utf-8"?>
-<p:sld xmlns:a="http://schemas.openxmlformats.org/drawingml/2006/main" xmlns:r="http://schemas.openxmlformats.org/officeDocument/2006/relationships" xmlns:p="http://schemas.openxmlformats.org/presentationml/2006/main">
-  <p:cSld>
-    <p:spTree>
-      <p:nvGrpSpPr>
-        <p:cNvPr id="1" name="Shape 53">
-          <a:extLst>
-            <a:ext uri="{FF2B5EF4-FFF2-40B4-BE49-F238E27FC236}">
-              <a16:creationId xmlns:a16="http://schemas.microsoft.com/office/drawing/2014/main" id="{1325F276-7606-B346-C268-C67FD15D72E3}"/>
-            </a:ext>
-          </a:extLst>
-        </p:cNvPr>
-        <p:cNvGrpSpPr/>
-        <p:nvPr/>
-      </p:nvGrpSpPr>
-      <p:grpSpPr>
-        <a:xfrm>
-          <a:off x="0" y="0"/>
-          <a:ext cx="0" cy="0"/>
-          <a:chOff x="0" y="0"/>
-          <a:chExt cx="0" cy="0"/>
-        </a:xfrm>
-      </p:grpSpPr>
-      <p:sp>
-        <p:nvSpPr>
-          <p:cNvPr id="54" name="Google Shape;54;p10">
-            <a:extLst>
-              <a:ext uri="{FF2B5EF4-FFF2-40B4-BE49-F238E27FC236}">
-                <a16:creationId xmlns:a16="http://schemas.microsoft.com/office/drawing/2014/main" id="{B4E2F0AF-32F9-B7CF-893C-5F86373C7AB9}"/>
-              </a:ext>
-            </a:extLst>
-          </p:cNvPr>
-          <p:cNvSpPr txBox="1">
-            <a:spLocks noGrp="1"/>
-          </p:cNvSpPr>
-          <p:nvPr>
-            <p:ph type="title"/>
-          </p:nvPr>
-        </p:nvSpPr>
-        <p:spPr>
-          <a:xfrm>
-            <a:off x="311700" y="445025"/>
-            <a:ext cx="8520600" cy="572700"/>
-          </a:xfrm>
-          <a:prstGeom prst="rect">
-            <a:avLst/>
-          </a:prstGeom>
-        </p:spPr>
-        <p:txBody>
-          <a:bodyPr spcFirstLastPara="1" wrap="square" lIns="91425" tIns="91425" rIns="91425" bIns="91425" anchor="t" anchorCtr="0">
-            <a:normAutofit fontScale="90000"/>
-          </a:bodyPr>
-          <a:lstStyle/>
-          <a:p>
-            <a:pPr marL="0" lvl="0" indent="0" algn="l" rtl="0">
-              <a:spcBef>
-                <a:spcPts val="0"/>
-              </a:spcBef>
-              <a:spcAft>
-                <a:spcPts val="0"/>
-              </a:spcAft>
-              <a:buNone/>
-            </a:pPr>
-            <a:endParaRPr/>
-          </a:p>
-        </p:txBody>
-      </p:sp>
-      <p:sp>
-        <p:nvSpPr>
-          <p:cNvPr id="55" name="Google Shape;55;p10">
-            <a:extLst>
-              <a:ext uri="{FF2B5EF4-FFF2-40B4-BE49-F238E27FC236}">
-                <a16:creationId xmlns:a16="http://schemas.microsoft.com/office/drawing/2014/main" id="{335FC08B-AED2-2591-558C-D9125A7898A1}"/>
-              </a:ext>
-            </a:extLst>
-          </p:cNvPr>
-          <p:cNvSpPr txBox="1">
-            <a:spLocks noGrp="1"/>
-          </p:cNvSpPr>
-          <p:nvPr>
-            <p:ph type="body" idx="1"/>
-          </p:nvPr>
-        </p:nvSpPr>
-        <p:spPr>
-          <a:xfrm>
-            <a:off x="311700" y="1152475"/>
-            <a:ext cx="8520600" cy="3416400"/>
-          </a:xfrm>
-          <a:prstGeom prst="rect">
-            <a:avLst/>
-          </a:prstGeom>
-        </p:spPr>
-        <p:txBody>
-          <a:bodyPr spcFirstLastPara="1" wrap="square" lIns="91425" tIns="91425" rIns="91425" bIns="91425" anchor="t" anchorCtr="0">
-            <a:normAutofit/>
-          </a:bodyPr>
-          <a:lstStyle/>
-          <a:p>
-            <a:pPr marL="0" lvl="0" indent="0" algn="l" rtl="0">
-              <a:spcBef>
-                <a:spcPts val="0"/>
-              </a:spcBef>
-              <a:spcAft>
-                <a:spcPts val="1200"/>
-              </a:spcAft>
-              <a:buNone/>
-            </a:pPr>
-            <a:endParaRPr/>
-          </a:p>
-        </p:txBody>
-      </p:sp>
-    </p:spTree>
-    <p:extLst>
-      <p:ext uri="{BB962C8B-B14F-4D97-AF65-F5344CB8AC3E}">
-        <p14:creationId xmlns:p14="http://schemas.microsoft.com/office/powerpoint/2010/main" val="2976638583"/>
-      </p:ext>
-    </p:extLst>
   </p:cSld>
   <p:clrMapOvr>
     <a:masterClrMapping/>
@@ -11841,1185 +8229,6 @@
               <a:buNone/>
             </a:pPr>
             <a:endParaRPr dirty="0"/>
-          </a:p>
-        </p:txBody>
-      </p:sp>
-    </p:spTree>
-  </p:cSld>
-  <p:clrMapOvr>
-    <a:masterClrMapping/>
-  </p:clrMapOvr>
-</p:sld>
-</file>
-
-<file path=ppt/slides/slide20.xml><?xml version="1.0" encoding="utf-8"?>
-<p:sld xmlns:a="http://schemas.openxmlformats.org/drawingml/2006/main" xmlns:r="http://schemas.openxmlformats.org/officeDocument/2006/relationships" xmlns:p="http://schemas.openxmlformats.org/presentationml/2006/main">
-  <p:cSld>
-    <p:spTree>
-      <p:nvGrpSpPr>
-        <p:cNvPr id="1" name="Shape 53">
-          <a:extLst>
-            <a:ext uri="{FF2B5EF4-FFF2-40B4-BE49-F238E27FC236}">
-              <a16:creationId xmlns:a16="http://schemas.microsoft.com/office/drawing/2014/main" id="{8DC06A74-1383-02DA-B240-692584A39153}"/>
-            </a:ext>
-          </a:extLst>
-        </p:cNvPr>
-        <p:cNvGrpSpPr/>
-        <p:nvPr/>
-      </p:nvGrpSpPr>
-      <p:grpSpPr>
-        <a:xfrm>
-          <a:off x="0" y="0"/>
-          <a:ext cx="0" cy="0"/>
-          <a:chOff x="0" y="0"/>
-          <a:chExt cx="0" cy="0"/>
-        </a:xfrm>
-      </p:grpSpPr>
-      <p:sp>
-        <p:nvSpPr>
-          <p:cNvPr id="54" name="Google Shape;54;p10">
-            <a:extLst>
-              <a:ext uri="{FF2B5EF4-FFF2-40B4-BE49-F238E27FC236}">
-                <a16:creationId xmlns:a16="http://schemas.microsoft.com/office/drawing/2014/main" id="{E838E77E-E4CB-72D6-973D-AAF5E83CAA73}"/>
-              </a:ext>
-            </a:extLst>
-          </p:cNvPr>
-          <p:cNvSpPr txBox="1">
-            <a:spLocks noGrp="1"/>
-          </p:cNvSpPr>
-          <p:nvPr>
-            <p:ph type="title"/>
-          </p:nvPr>
-        </p:nvSpPr>
-        <p:spPr>
-          <a:xfrm>
-            <a:off x="311700" y="445025"/>
-            <a:ext cx="8520600" cy="572700"/>
-          </a:xfrm>
-          <a:prstGeom prst="rect">
-            <a:avLst/>
-          </a:prstGeom>
-        </p:spPr>
-        <p:txBody>
-          <a:bodyPr spcFirstLastPara="1" wrap="square" lIns="91425" tIns="91425" rIns="91425" bIns="91425" anchor="t" anchorCtr="0">
-            <a:normAutofit fontScale="90000"/>
-          </a:bodyPr>
-          <a:lstStyle/>
-          <a:p>
-            <a:pPr marL="0" lvl="0" indent="0" algn="l" rtl="0">
-              <a:spcBef>
-                <a:spcPts val="0"/>
-              </a:spcBef>
-              <a:spcAft>
-                <a:spcPts val="0"/>
-              </a:spcAft>
-              <a:buNone/>
-            </a:pPr>
-            <a:endParaRPr/>
-          </a:p>
-        </p:txBody>
-      </p:sp>
-      <p:sp>
-        <p:nvSpPr>
-          <p:cNvPr id="55" name="Google Shape;55;p10">
-            <a:extLst>
-              <a:ext uri="{FF2B5EF4-FFF2-40B4-BE49-F238E27FC236}">
-                <a16:creationId xmlns:a16="http://schemas.microsoft.com/office/drawing/2014/main" id="{AF83619D-63A6-4700-C19F-F5E7BC741D0F}"/>
-              </a:ext>
-            </a:extLst>
-          </p:cNvPr>
-          <p:cNvSpPr txBox="1">
-            <a:spLocks noGrp="1"/>
-          </p:cNvSpPr>
-          <p:nvPr>
-            <p:ph type="body" idx="1"/>
-          </p:nvPr>
-        </p:nvSpPr>
-        <p:spPr>
-          <a:xfrm>
-            <a:off x="311700" y="1152475"/>
-            <a:ext cx="8520600" cy="3416400"/>
-          </a:xfrm>
-          <a:prstGeom prst="rect">
-            <a:avLst/>
-          </a:prstGeom>
-        </p:spPr>
-        <p:txBody>
-          <a:bodyPr spcFirstLastPara="1" wrap="square" lIns="91425" tIns="91425" rIns="91425" bIns="91425" anchor="t" anchorCtr="0">
-            <a:normAutofit/>
-          </a:bodyPr>
-          <a:lstStyle/>
-          <a:p>
-            <a:pPr marL="0" lvl="0" indent="0" algn="l" rtl="0">
-              <a:spcBef>
-                <a:spcPts val="0"/>
-              </a:spcBef>
-              <a:spcAft>
-                <a:spcPts val="1200"/>
-              </a:spcAft>
-              <a:buNone/>
-            </a:pPr>
-            <a:endParaRPr/>
-          </a:p>
-        </p:txBody>
-      </p:sp>
-    </p:spTree>
-    <p:extLst>
-      <p:ext uri="{BB962C8B-B14F-4D97-AF65-F5344CB8AC3E}">
-        <p14:creationId xmlns:p14="http://schemas.microsoft.com/office/powerpoint/2010/main" val="2014060074"/>
-      </p:ext>
-    </p:extLst>
-  </p:cSld>
-  <p:clrMapOvr>
-    <a:masterClrMapping/>
-  </p:clrMapOvr>
-</p:sld>
-</file>
-
-<file path=ppt/slides/slide21.xml><?xml version="1.0" encoding="utf-8"?>
-<p:sld xmlns:a="http://schemas.openxmlformats.org/drawingml/2006/main" xmlns:r="http://schemas.openxmlformats.org/officeDocument/2006/relationships" xmlns:p="http://schemas.openxmlformats.org/presentationml/2006/main">
-  <p:cSld>
-    <p:spTree>
-      <p:nvGrpSpPr>
-        <p:cNvPr id="1" name="Shape 53">
-          <a:extLst>
-            <a:ext uri="{FF2B5EF4-FFF2-40B4-BE49-F238E27FC236}">
-              <a16:creationId xmlns:a16="http://schemas.microsoft.com/office/drawing/2014/main" id="{F1F3137D-1FA7-0D14-F136-F110E78D2F2F}"/>
-            </a:ext>
-          </a:extLst>
-        </p:cNvPr>
-        <p:cNvGrpSpPr/>
-        <p:nvPr/>
-      </p:nvGrpSpPr>
-      <p:grpSpPr>
-        <a:xfrm>
-          <a:off x="0" y="0"/>
-          <a:ext cx="0" cy="0"/>
-          <a:chOff x="0" y="0"/>
-          <a:chExt cx="0" cy="0"/>
-        </a:xfrm>
-      </p:grpSpPr>
-      <p:sp>
-        <p:nvSpPr>
-          <p:cNvPr id="54" name="Google Shape;54;p10">
-            <a:extLst>
-              <a:ext uri="{FF2B5EF4-FFF2-40B4-BE49-F238E27FC236}">
-                <a16:creationId xmlns:a16="http://schemas.microsoft.com/office/drawing/2014/main" id="{AAA23898-3D57-E9F8-04AE-EB040D10F6AE}"/>
-              </a:ext>
-            </a:extLst>
-          </p:cNvPr>
-          <p:cNvSpPr txBox="1">
-            <a:spLocks noGrp="1"/>
-          </p:cNvSpPr>
-          <p:nvPr>
-            <p:ph type="title"/>
-          </p:nvPr>
-        </p:nvSpPr>
-        <p:spPr>
-          <a:xfrm>
-            <a:off x="311700" y="445025"/>
-            <a:ext cx="8520600" cy="572700"/>
-          </a:xfrm>
-          <a:prstGeom prst="rect">
-            <a:avLst/>
-          </a:prstGeom>
-        </p:spPr>
-        <p:txBody>
-          <a:bodyPr spcFirstLastPara="1" wrap="square" lIns="91425" tIns="91425" rIns="91425" bIns="91425" anchor="t" anchorCtr="0">
-            <a:normAutofit fontScale="90000"/>
-          </a:bodyPr>
-          <a:lstStyle/>
-          <a:p>
-            <a:pPr marL="0" lvl="0" indent="0" algn="l" rtl="0">
-              <a:spcBef>
-                <a:spcPts val="0"/>
-              </a:spcBef>
-              <a:spcAft>
-                <a:spcPts val="0"/>
-              </a:spcAft>
-              <a:buNone/>
-            </a:pPr>
-            <a:endParaRPr/>
-          </a:p>
-        </p:txBody>
-      </p:sp>
-      <p:sp>
-        <p:nvSpPr>
-          <p:cNvPr id="55" name="Google Shape;55;p10">
-            <a:extLst>
-              <a:ext uri="{FF2B5EF4-FFF2-40B4-BE49-F238E27FC236}">
-                <a16:creationId xmlns:a16="http://schemas.microsoft.com/office/drawing/2014/main" id="{25458E2A-3312-9747-1B5E-54EA99F94D2B}"/>
-              </a:ext>
-            </a:extLst>
-          </p:cNvPr>
-          <p:cNvSpPr txBox="1">
-            <a:spLocks noGrp="1"/>
-          </p:cNvSpPr>
-          <p:nvPr>
-            <p:ph type="body" idx="1"/>
-          </p:nvPr>
-        </p:nvSpPr>
-        <p:spPr>
-          <a:xfrm>
-            <a:off x="311700" y="1152475"/>
-            <a:ext cx="8520600" cy="3416400"/>
-          </a:xfrm>
-          <a:prstGeom prst="rect">
-            <a:avLst/>
-          </a:prstGeom>
-        </p:spPr>
-        <p:txBody>
-          <a:bodyPr spcFirstLastPara="1" wrap="square" lIns="91425" tIns="91425" rIns="91425" bIns="91425" anchor="t" anchorCtr="0">
-            <a:normAutofit/>
-          </a:bodyPr>
-          <a:lstStyle/>
-          <a:p>
-            <a:pPr marL="0" lvl="0" indent="0" algn="l" rtl="0">
-              <a:spcBef>
-                <a:spcPts val="0"/>
-              </a:spcBef>
-              <a:spcAft>
-                <a:spcPts val="1200"/>
-              </a:spcAft>
-              <a:buNone/>
-            </a:pPr>
-            <a:endParaRPr/>
-          </a:p>
-        </p:txBody>
-      </p:sp>
-    </p:spTree>
-    <p:extLst>
-      <p:ext uri="{BB962C8B-B14F-4D97-AF65-F5344CB8AC3E}">
-        <p14:creationId xmlns:p14="http://schemas.microsoft.com/office/powerpoint/2010/main" val="2110169700"/>
-      </p:ext>
-    </p:extLst>
-  </p:cSld>
-  <p:clrMapOvr>
-    <a:masterClrMapping/>
-  </p:clrMapOvr>
-</p:sld>
-</file>
-
-<file path=ppt/slides/slide22.xml><?xml version="1.0" encoding="utf-8"?>
-<p:sld xmlns:a="http://schemas.openxmlformats.org/drawingml/2006/main" xmlns:r="http://schemas.openxmlformats.org/officeDocument/2006/relationships" xmlns:p="http://schemas.openxmlformats.org/presentationml/2006/main">
-  <p:cSld>
-    <p:spTree>
-      <p:nvGrpSpPr>
-        <p:cNvPr id="1" name="Shape 53">
-          <a:extLst>
-            <a:ext uri="{FF2B5EF4-FFF2-40B4-BE49-F238E27FC236}">
-              <a16:creationId xmlns:a16="http://schemas.microsoft.com/office/drawing/2014/main" id="{E405D22A-E39B-2073-930E-3AFEBFAD7E00}"/>
-            </a:ext>
-          </a:extLst>
-        </p:cNvPr>
-        <p:cNvGrpSpPr/>
-        <p:nvPr/>
-      </p:nvGrpSpPr>
-      <p:grpSpPr>
-        <a:xfrm>
-          <a:off x="0" y="0"/>
-          <a:ext cx="0" cy="0"/>
-          <a:chOff x="0" y="0"/>
-          <a:chExt cx="0" cy="0"/>
-        </a:xfrm>
-      </p:grpSpPr>
-      <p:sp>
-        <p:nvSpPr>
-          <p:cNvPr id="54" name="Google Shape;54;p10">
-            <a:extLst>
-              <a:ext uri="{FF2B5EF4-FFF2-40B4-BE49-F238E27FC236}">
-                <a16:creationId xmlns:a16="http://schemas.microsoft.com/office/drawing/2014/main" id="{CB7192BB-959E-8678-BFA4-E05D912141F4}"/>
-              </a:ext>
-            </a:extLst>
-          </p:cNvPr>
-          <p:cNvSpPr txBox="1">
-            <a:spLocks noGrp="1"/>
-          </p:cNvSpPr>
-          <p:nvPr>
-            <p:ph type="title"/>
-          </p:nvPr>
-        </p:nvSpPr>
-        <p:spPr>
-          <a:xfrm>
-            <a:off x="311700" y="445025"/>
-            <a:ext cx="8520600" cy="572700"/>
-          </a:xfrm>
-          <a:prstGeom prst="rect">
-            <a:avLst/>
-          </a:prstGeom>
-        </p:spPr>
-        <p:txBody>
-          <a:bodyPr spcFirstLastPara="1" wrap="square" lIns="91425" tIns="91425" rIns="91425" bIns="91425" anchor="t" anchorCtr="0">
-            <a:normAutofit fontScale="90000"/>
-          </a:bodyPr>
-          <a:lstStyle/>
-          <a:p>
-            <a:pPr marL="0" lvl="0" indent="0" algn="l" rtl="0">
-              <a:spcBef>
-                <a:spcPts val="0"/>
-              </a:spcBef>
-              <a:spcAft>
-                <a:spcPts val="0"/>
-              </a:spcAft>
-              <a:buNone/>
-            </a:pPr>
-            <a:endParaRPr/>
-          </a:p>
-        </p:txBody>
-      </p:sp>
-      <p:sp>
-        <p:nvSpPr>
-          <p:cNvPr id="55" name="Google Shape;55;p10">
-            <a:extLst>
-              <a:ext uri="{FF2B5EF4-FFF2-40B4-BE49-F238E27FC236}">
-                <a16:creationId xmlns:a16="http://schemas.microsoft.com/office/drawing/2014/main" id="{4473816E-E350-D756-9767-55EB72CFEE13}"/>
-              </a:ext>
-            </a:extLst>
-          </p:cNvPr>
-          <p:cNvSpPr txBox="1">
-            <a:spLocks noGrp="1"/>
-          </p:cNvSpPr>
-          <p:nvPr>
-            <p:ph type="body" idx="1"/>
-          </p:nvPr>
-        </p:nvSpPr>
-        <p:spPr>
-          <a:xfrm>
-            <a:off x="311700" y="1152475"/>
-            <a:ext cx="8520600" cy="3416400"/>
-          </a:xfrm>
-          <a:prstGeom prst="rect">
-            <a:avLst/>
-          </a:prstGeom>
-        </p:spPr>
-        <p:txBody>
-          <a:bodyPr spcFirstLastPara="1" wrap="square" lIns="91425" tIns="91425" rIns="91425" bIns="91425" anchor="t" anchorCtr="0">
-            <a:normAutofit/>
-          </a:bodyPr>
-          <a:lstStyle/>
-          <a:p>
-            <a:pPr marL="0" lvl="0" indent="0" algn="l" rtl="0">
-              <a:spcBef>
-                <a:spcPts val="0"/>
-              </a:spcBef>
-              <a:spcAft>
-                <a:spcPts val="1200"/>
-              </a:spcAft>
-              <a:buNone/>
-            </a:pPr>
-            <a:endParaRPr/>
-          </a:p>
-        </p:txBody>
-      </p:sp>
-    </p:spTree>
-    <p:extLst>
-      <p:ext uri="{BB962C8B-B14F-4D97-AF65-F5344CB8AC3E}">
-        <p14:creationId xmlns:p14="http://schemas.microsoft.com/office/powerpoint/2010/main" val="2494323231"/>
-      </p:ext>
-    </p:extLst>
-  </p:cSld>
-  <p:clrMapOvr>
-    <a:masterClrMapping/>
-  </p:clrMapOvr>
-</p:sld>
-</file>
-
-<file path=ppt/slides/slide23.xml><?xml version="1.0" encoding="utf-8"?>
-<p:sld xmlns:a="http://schemas.openxmlformats.org/drawingml/2006/main" xmlns:r="http://schemas.openxmlformats.org/officeDocument/2006/relationships" xmlns:p="http://schemas.openxmlformats.org/presentationml/2006/main">
-  <p:cSld>
-    <p:spTree>
-      <p:nvGrpSpPr>
-        <p:cNvPr id="1" name="Shape 53">
-          <a:extLst>
-            <a:ext uri="{FF2B5EF4-FFF2-40B4-BE49-F238E27FC236}">
-              <a16:creationId xmlns:a16="http://schemas.microsoft.com/office/drawing/2014/main" id="{FBFFAF46-8424-C94F-7932-FB9B7908CC4F}"/>
-            </a:ext>
-          </a:extLst>
-        </p:cNvPr>
-        <p:cNvGrpSpPr/>
-        <p:nvPr/>
-      </p:nvGrpSpPr>
-      <p:grpSpPr>
-        <a:xfrm>
-          <a:off x="0" y="0"/>
-          <a:ext cx="0" cy="0"/>
-          <a:chOff x="0" y="0"/>
-          <a:chExt cx="0" cy="0"/>
-        </a:xfrm>
-      </p:grpSpPr>
-      <p:sp>
-        <p:nvSpPr>
-          <p:cNvPr id="54" name="Google Shape;54;p10">
-            <a:extLst>
-              <a:ext uri="{FF2B5EF4-FFF2-40B4-BE49-F238E27FC236}">
-                <a16:creationId xmlns:a16="http://schemas.microsoft.com/office/drawing/2014/main" id="{6A18154A-35C0-16E9-9A49-0CBFE8391983}"/>
-              </a:ext>
-            </a:extLst>
-          </p:cNvPr>
-          <p:cNvSpPr txBox="1">
-            <a:spLocks noGrp="1"/>
-          </p:cNvSpPr>
-          <p:nvPr>
-            <p:ph type="title"/>
-          </p:nvPr>
-        </p:nvSpPr>
-        <p:spPr>
-          <a:xfrm>
-            <a:off x="311700" y="445025"/>
-            <a:ext cx="8520600" cy="572700"/>
-          </a:xfrm>
-          <a:prstGeom prst="rect">
-            <a:avLst/>
-          </a:prstGeom>
-        </p:spPr>
-        <p:txBody>
-          <a:bodyPr spcFirstLastPara="1" wrap="square" lIns="91425" tIns="91425" rIns="91425" bIns="91425" anchor="t" anchorCtr="0">
-            <a:normAutofit fontScale="90000"/>
-          </a:bodyPr>
-          <a:lstStyle/>
-          <a:p>
-            <a:pPr marL="0" lvl="0" indent="0" algn="l" rtl="0">
-              <a:spcBef>
-                <a:spcPts val="0"/>
-              </a:spcBef>
-              <a:spcAft>
-                <a:spcPts val="0"/>
-              </a:spcAft>
-              <a:buNone/>
-            </a:pPr>
-            <a:endParaRPr/>
-          </a:p>
-        </p:txBody>
-      </p:sp>
-      <p:sp>
-        <p:nvSpPr>
-          <p:cNvPr id="55" name="Google Shape;55;p10">
-            <a:extLst>
-              <a:ext uri="{FF2B5EF4-FFF2-40B4-BE49-F238E27FC236}">
-                <a16:creationId xmlns:a16="http://schemas.microsoft.com/office/drawing/2014/main" id="{851D7059-7843-1715-FE72-B20323E35A42}"/>
-              </a:ext>
-            </a:extLst>
-          </p:cNvPr>
-          <p:cNvSpPr txBox="1">
-            <a:spLocks noGrp="1"/>
-          </p:cNvSpPr>
-          <p:nvPr>
-            <p:ph type="body" idx="1"/>
-          </p:nvPr>
-        </p:nvSpPr>
-        <p:spPr>
-          <a:xfrm>
-            <a:off x="311700" y="1152475"/>
-            <a:ext cx="8520600" cy="3416400"/>
-          </a:xfrm>
-          <a:prstGeom prst="rect">
-            <a:avLst/>
-          </a:prstGeom>
-        </p:spPr>
-        <p:txBody>
-          <a:bodyPr spcFirstLastPara="1" wrap="square" lIns="91425" tIns="91425" rIns="91425" bIns="91425" anchor="t" anchorCtr="0">
-            <a:normAutofit/>
-          </a:bodyPr>
-          <a:lstStyle/>
-          <a:p>
-            <a:pPr marL="0" lvl="0" indent="0" algn="l" rtl="0">
-              <a:spcBef>
-                <a:spcPts val="0"/>
-              </a:spcBef>
-              <a:spcAft>
-                <a:spcPts val="1200"/>
-              </a:spcAft>
-              <a:buNone/>
-            </a:pPr>
-            <a:endParaRPr/>
-          </a:p>
-        </p:txBody>
-      </p:sp>
-    </p:spTree>
-    <p:extLst>
-      <p:ext uri="{BB962C8B-B14F-4D97-AF65-F5344CB8AC3E}">
-        <p14:creationId xmlns:p14="http://schemas.microsoft.com/office/powerpoint/2010/main" val="1918477156"/>
-      </p:ext>
-    </p:extLst>
-  </p:cSld>
-  <p:clrMapOvr>
-    <a:masterClrMapping/>
-  </p:clrMapOvr>
-</p:sld>
-</file>
-
-<file path=ppt/slides/slide24.xml><?xml version="1.0" encoding="utf-8"?>
-<p:sld xmlns:a="http://schemas.openxmlformats.org/drawingml/2006/main" xmlns:r="http://schemas.openxmlformats.org/officeDocument/2006/relationships" xmlns:p="http://schemas.openxmlformats.org/presentationml/2006/main">
-  <p:cSld>
-    <p:spTree>
-      <p:nvGrpSpPr>
-        <p:cNvPr id="1" name="Shape 53">
-          <a:extLst>
-            <a:ext uri="{FF2B5EF4-FFF2-40B4-BE49-F238E27FC236}">
-              <a16:creationId xmlns:a16="http://schemas.microsoft.com/office/drawing/2014/main" id="{EFD7BC09-2E64-8A41-D078-6751E20D2FD9}"/>
-            </a:ext>
-          </a:extLst>
-        </p:cNvPr>
-        <p:cNvGrpSpPr/>
-        <p:nvPr/>
-      </p:nvGrpSpPr>
-      <p:grpSpPr>
-        <a:xfrm>
-          <a:off x="0" y="0"/>
-          <a:ext cx="0" cy="0"/>
-          <a:chOff x="0" y="0"/>
-          <a:chExt cx="0" cy="0"/>
-        </a:xfrm>
-      </p:grpSpPr>
-      <p:sp>
-        <p:nvSpPr>
-          <p:cNvPr id="54" name="Google Shape;54;p10">
-            <a:extLst>
-              <a:ext uri="{FF2B5EF4-FFF2-40B4-BE49-F238E27FC236}">
-                <a16:creationId xmlns:a16="http://schemas.microsoft.com/office/drawing/2014/main" id="{FCAEC428-D28A-9C25-796A-39920FC2E8F6}"/>
-              </a:ext>
-            </a:extLst>
-          </p:cNvPr>
-          <p:cNvSpPr txBox="1">
-            <a:spLocks noGrp="1"/>
-          </p:cNvSpPr>
-          <p:nvPr>
-            <p:ph type="title"/>
-          </p:nvPr>
-        </p:nvSpPr>
-        <p:spPr>
-          <a:xfrm>
-            <a:off x="311700" y="445025"/>
-            <a:ext cx="8520600" cy="572700"/>
-          </a:xfrm>
-          <a:prstGeom prst="rect">
-            <a:avLst/>
-          </a:prstGeom>
-        </p:spPr>
-        <p:txBody>
-          <a:bodyPr spcFirstLastPara="1" wrap="square" lIns="91425" tIns="91425" rIns="91425" bIns="91425" anchor="t" anchorCtr="0">
-            <a:normAutofit fontScale="90000"/>
-          </a:bodyPr>
-          <a:lstStyle/>
-          <a:p>
-            <a:pPr marL="0" lvl="0" indent="0" algn="l" rtl="0">
-              <a:spcBef>
-                <a:spcPts val="0"/>
-              </a:spcBef>
-              <a:spcAft>
-                <a:spcPts val="0"/>
-              </a:spcAft>
-              <a:buNone/>
-            </a:pPr>
-            <a:endParaRPr/>
-          </a:p>
-        </p:txBody>
-      </p:sp>
-      <p:sp>
-        <p:nvSpPr>
-          <p:cNvPr id="55" name="Google Shape;55;p10">
-            <a:extLst>
-              <a:ext uri="{FF2B5EF4-FFF2-40B4-BE49-F238E27FC236}">
-                <a16:creationId xmlns:a16="http://schemas.microsoft.com/office/drawing/2014/main" id="{54D2E731-80F9-2178-6ED7-95485C82E756}"/>
-              </a:ext>
-            </a:extLst>
-          </p:cNvPr>
-          <p:cNvSpPr txBox="1">
-            <a:spLocks noGrp="1"/>
-          </p:cNvSpPr>
-          <p:nvPr>
-            <p:ph type="body" idx="1"/>
-          </p:nvPr>
-        </p:nvSpPr>
-        <p:spPr>
-          <a:xfrm>
-            <a:off x="311700" y="1152475"/>
-            <a:ext cx="8520600" cy="3416400"/>
-          </a:xfrm>
-          <a:prstGeom prst="rect">
-            <a:avLst/>
-          </a:prstGeom>
-        </p:spPr>
-        <p:txBody>
-          <a:bodyPr spcFirstLastPara="1" wrap="square" lIns="91425" tIns="91425" rIns="91425" bIns="91425" anchor="t" anchorCtr="0">
-            <a:normAutofit/>
-          </a:bodyPr>
-          <a:lstStyle/>
-          <a:p>
-            <a:pPr marL="0" lvl="0" indent="0" algn="l" rtl="0">
-              <a:spcBef>
-                <a:spcPts val="0"/>
-              </a:spcBef>
-              <a:spcAft>
-                <a:spcPts val="1200"/>
-              </a:spcAft>
-              <a:buNone/>
-            </a:pPr>
-            <a:endParaRPr/>
-          </a:p>
-        </p:txBody>
-      </p:sp>
-    </p:spTree>
-    <p:extLst>
-      <p:ext uri="{BB962C8B-B14F-4D97-AF65-F5344CB8AC3E}">
-        <p14:creationId xmlns:p14="http://schemas.microsoft.com/office/powerpoint/2010/main" val="1028916533"/>
-      </p:ext>
-    </p:extLst>
-  </p:cSld>
-  <p:clrMapOvr>
-    <a:masterClrMapping/>
-  </p:clrMapOvr>
-</p:sld>
-</file>
-
-<file path=ppt/slides/slide25.xml><?xml version="1.0" encoding="utf-8"?>
-<p:sld xmlns:a="http://schemas.openxmlformats.org/drawingml/2006/main" xmlns:r="http://schemas.openxmlformats.org/officeDocument/2006/relationships" xmlns:p="http://schemas.openxmlformats.org/presentationml/2006/main">
-  <p:cSld>
-    <p:spTree>
-      <p:nvGrpSpPr>
-        <p:cNvPr id="1" name="Shape 53">
-          <a:extLst>
-            <a:ext uri="{FF2B5EF4-FFF2-40B4-BE49-F238E27FC236}">
-              <a16:creationId xmlns:a16="http://schemas.microsoft.com/office/drawing/2014/main" id="{23D1C90C-D757-840B-A4C7-F58AAAED3130}"/>
-            </a:ext>
-          </a:extLst>
-        </p:cNvPr>
-        <p:cNvGrpSpPr/>
-        <p:nvPr/>
-      </p:nvGrpSpPr>
-      <p:grpSpPr>
-        <a:xfrm>
-          <a:off x="0" y="0"/>
-          <a:ext cx="0" cy="0"/>
-          <a:chOff x="0" y="0"/>
-          <a:chExt cx="0" cy="0"/>
-        </a:xfrm>
-      </p:grpSpPr>
-      <p:sp>
-        <p:nvSpPr>
-          <p:cNvPr id="54" name="Google Shape;54;p10">
-            <a:extLst>
-              <a:ext uri="{FF2B5EF4-FFF2-40B4-BE49-F238E27FC236}">
-                <a16:creationId xmlns:a16="http://schemas.microsoft.com/office/drawing/2014/main" id="{720D35D8-1F43-0CCA-AEF8-2D07E2979F91}"/>
-              </a:ext>
-            </a:extLst>
-          </p:cNvPr>
-          <p:cNvSpPr txBox="1">
-            <a:spLocks noGrp="1"/>
-          </p:cNvSpPr>
-          <p:nvPr>
-            <p:ph type="title"/>
-          </p:nvPr>
-        </p:nvSpPr>
-        <p:spPr>
-          <a:xfrm>
-            <a:off x="311700" y="445025"/>
-            <a:ext cx="8520600" cy="572700"/>
-          </a:xfrm>
-          <a:prstGeom prst="rect">
-            <a:avLst/>
-          </a:prstGeom>
-        </p:spPr>
-        <p:txBody>
-          <a:bodyPr spcFirstLastPara="1" wrap="square" lIns="91425" tIns="91425" rIns="91425" bIns="91425" anchor="t" anchorCtr="0">
-            <a:normAutofit fontScale="90000"/>
-          </a:bodyPr>
-          <a:lstStyle/>
-          <a:p>
-            <a:pPr marL="0" lvl="0" indent="0" algn="l" rtl="0">
-              <a:spcBef>
-                <a:spcPts val="0"/>
-              </a:spcBef>
-              <a:spcAft>
-                <a:spcPts val="0"/>
-              </a:spcAft>
-              <a:buNone/>
-            </a:pPr>
-            <a:endParaRPr/>
-          </a:p>
-        </p:txBody>
-      </p:sp>
-      <p:sp>
-        <p:nvSpPr>
-          <p:cNvPr id="55" name="Google Shape;55;p10">
-            <a:extLst>
-              <a:ext uri="{FF2B5EF4-FFF2-40B4-BE49-F238E27FC236}">
-                <a16:creationId xmlns:a16="http://schemas.microsoft.com/office/drawing/2014/main" id="{CCF3B739-9817-F116-A8CB-EE5DF0ABDF71}"/>
-              </a:ext>
-            </a:extLst>
-          </p:cNvPr>
-          <p:cNvSpPr txBox="1">
-            <a:spLocks noGrp="1"/>
-          </p:cNvSpPr>
-          <p:nvPr>
-            <p:ph type="body" idx="1"/>
-          </p:nvPr>
-        </p:nvSpPr>
-        <p:spPr>
-          <a:xfrm>
-            <a:off x="311700" y="1152475"/>
-            <a:ext cx="8520600" cy="3416400"/>
-          </a:xfrm>
-          <a:prstGeom prst="rect">
-            <a:avLst/>
-          </a:prstGeom>
-        </p:spPr>
-        <p:txBody>
-          <a:bodyPr spcFirstLastPara="1" wrap="square" lIns="91425" tIns="91425" rIns="91425" bIns="91425" anchor="t" anchorCtr="0">
-            <a:normAutofit/>
-          </a:bodyPr>
-          <a:lstStyle/>
-          <a:p>
-            <a:pPr marL="0" lvl="0" indent="0" algn="l" rtl="0">
-              <a:spcBef>
-                <a:spcPts val="0"/>
-              </a:spcBef>
-              <a:spcAft>
-                <a:spcPts val="1200"/>
-              </a:spcAft>
-              <a:buNone/>
-            </a:pPr>
-            <a:endParaRPr/>
-          </a:p>
-        </p:txBody>
-      </p:sp>
-    </p:spTree>
-    <p:extLst>
-      <p:ext uri="{BB962C8B-B14F-4D97-AF65-F5344CB8AC3E}">
-        <p14:creationId xmlns:p14="http://schemas.microsoft.com/office/powerpoint/2010/main" val="4163941482"/>
-      </p:ext>
-    </p:extLst>
-  </p:cSld>
-  <p:clrMapOvr>
-    <a:masterClrMapping/>
-  </p:clrMapOvr>
-</p:sld>
-</file>
-
-<file path=ppt/slides/slide26.xml><?xml version="1.0" encoding="utf-8"?>
-<p:sld xmlns:a="http://schemas.openxmlformats.org/drawingml/2006/main" xmlns:r="http://schemas.openxmlformats.org/officeDocument/2006/relationships" xmlns:p="http://schemas.openxmlformats.org/presentationml/2006/main">
-  <p:cSld>
-    <p:spTree>
-      <p:nvGrpSpPr>
-        <p:cNvPr id="1" name="Shape 53">
-          <a:extLst>
-            <a:ext uri="{FF2B5EF4-FFF2-40B4-BE49-F238E27FC236}">
-              <a16:creationId xmlns:a16="http://schemas.microsoft.com/office/drawing/2014/main" id="{709DCA12-AFE4-63D7-A3AD-0463BA67C882}"/>
-            </a:ext>
-          </a:extLst>
-        </p:cNvPr>
-        <p:cNvGrpSpPr/>
-        <p:nvPr/>
-      </p:nvGrpSpPr>
-      <p:grpSpPr>
-        <a:xfrm>
-          <a:off x="0" y="0"/>
-          <a:ext cx="0" cy="0"/>
-          <a:chOff x="0" y="0"/>
-          <a:chExt cx="0" cy="0"/>
-        </a:xfrm>
-      </p:grpSpPr>
-      <p:sp>
-        <p:nvSpPr>
-          <p:cNvPr id="54" name="Google Shape;54;p10">
-            <a:extLst>
-              <a:ext uri="{FF2B5EF4-FFF2-40B4-BE49-F238E27FC236}">
-                <a16:creationId xmlns:a16="http://schemas.microsoft.com/office/drawing/2014/main" id="{4C32A69C-5F16-EB0D-CA72-8AE26E28AA9F}"/>
-              </a:ext>
-            </a:extLst>
-          </p:cNvPr>
-          <p:cNvSpPr txBox="1">
-            <a:spLocks noGrp="1"/>
-          </p:cNvSpPr>
-          <p:nvPr>
-            <p:ph type="title"/>
-          </p:nvPr>
-        </p:nvSpPr>
-        <p:spPr>
-          <a:xfrm>
-            <a:off x="311700" y="445025"/>
-            <a:ext cx="8520600" cy="572700"/>
-          </a:xfrm>
-          <a:prstGeom prst="rect">
-            <a:avLst/>
-          </a:prstGeom>
-        </p:spPr>
-        <p:txBody>
-          <a:bodyPr spcFirstLastPara="1" wrap="square" lIns="91425" tIns="91425" rIns="91425" bIns="91425" anchor="t" anchorCtr="0">
-            <a:normAutofit fontScale="90000"/>
-          </a:bodyPr>
-          <a:lstStyle/>
-          <a:p>
-            <a:pPr marL="0" lvl="0" indent="0" algn="l" rtl="0">
-              <a:spcBef>
-                <a:spcPts val="0"/>
-              </a:spcBef>
-              <a:spcAft>
-                <a:spcPts val="0"/>
-              </a:spcAft>
-              <a:buNone/>
-            </a:pPr>
-            <a:endParaRPr/>
-          </a:p>
-        </p:txBody>
-      </p:sp>
-      <p:sp>
-        <p:nvSpPr>
-          <p:cNvPr id="55" name="Google Shape;55;p10">
-            <a:extLst>
-              <a:ext uri="{FF2B5EF4-FFF2-40B4-BE49-F238E27FC236}">
-                <a16:creationId xmlns:a16="http://schemas.microsoft.com/office/drawing/2014/main" id="{63DA6977-7353-0CC5-FB44-C87ED35D9A9D}"/>
-              </a:ext>
-            </a:extLst>
-          </p:cNvPr>
-          <p:cNvSpPr txBox="1">
-            <a:spLocks noGrp="1"/>
-          </p:cNvSpPr>
-          <p:nvPr>
-            <p:ph type="body" idx="1"/>
-          </p:nvPr>
-        </p:nvSpPr>
-        <p:spPr>
-          <a:xfrm>
-            <a:off x="311700" y="1152475"/>
-            <a:ext cx="8520600" cy="3416400"/>
-          </a:xfrm>
-          <a:prstGeom prst="rect">
-            <a:avLst/>
-          </a:prstGeom>
-        </p:spPr>
-        <p:txBody>
-          <a:bodyPr spcFirstLastPara="1" wrap="square" lIns="91425" tIns="91425" rIns="91425" bIns="91425" anchor="t" anchorCtr="0">
-            <a:normAutofit/>
-          </a:bodyPr>
-          <a:lstStyle/>
-          <a:p>
-            <a:pPr marL="0" lvl="0" indent="0" algn="l" rtl="0">
-              <a:spcBef>
-                <a:spcPts val="0"/>
-              </a:spcBef>
-              <a:spcAft>
-                <a:spcPts val="1200"/>
-              </a:spcAft>
-              <a:buNone/>
-            </a:pPr>
-            <a:endParaRPr/>
-          </a:p>
-        </p:txBody>
-      </p:sp>
-    </p:spTree>
-    <p:extLst>
-      <p:ext uri="{BB962C8B-B14F-4D97-AF65-F5344CB8AC3E}">
-        <p14:creationId xmlns:p14="http://schemas.microsoft.com/office/powerpoint/2010/main" val="2024057871"/>
-      </p:ext>
-    </p:extLst>
-  </p:cSld>
-  <p:clrMapOvr>
-    <a:masterClrMapping/>
-  </p:clrMapOvr>
-</p:sld>
-</file>
-
-<file path=ppt/slides/slide27.xml><?xml version="1.0" encoding="utf-8"?>
-<p:sld xmlns:a="http://schemas.openxmlformats.org/drawingml/2006/main" xmlns:r="http://schemas.openxmlformats.org/officeDocument/2006/relationships" xmlns:p="http://schemas.openxmlformats.org/presentationml/2006/main">
-  <p:cSld>
-    <p:spTree>
-      <p:nvGrpSpPr>
-        <p:cNvPr id="1" name="Shape 53">
-          <a:extLst>
-            <a:ext uri="{FF2B5EF4-FFF2-40B4-BE49-F238E27FC236}">
-              <a16:creationId xmlns:a16="http://schemas.microsoft.com/office/drawing/2014/main" id="{0F3C1506-D9FB-9150-FE6E-5B040689838C}"/>
-            </a:ext>
-          </a:extLst>
-        </p:cNvPr>
-        <p:cNvGrpSpPr/>
-        <p:nvPr/>
-      </p:nvGrpSpPr>
-      <p:grpSpPr>
-        <a:xfrm>
-          <a:off x="0" y="0"/>
-          <a:ext cx="0" cy="0"/>
-          <a:chOff x="0" y="0"/>
-          <a:chExt cx="0" cy="0"/>
-        </a:xfrm>
-      </p:grpSpPr>
-      <p:sp>
-        <p:nvSpPr>
-          <p:cNvPr id="54" name="Google Shape;54;p10">
-            <a:extLst>
-              <a:ext uri="{FF2B5EF4-FFF2-40B4-BE49-F238E27FC236}">
-                <a16:creationId xmlns:a16="http://schemas.microsoft.com/office/drawing/2014/main" id="{6F5271F2-3932-6772-7389-02DA0F84510D}"/>
-              </a:ext>
-            </a:extLst>
-          </p:cNvPr>
-          <p:cNvSpPr txBox="1">
-            <a:spLocks noGrp="1"/>
-          </p:cNvSpPr>
-          <p:nvPr>
-            <p:ph type="title"/>
-          </p:nvPr>
-        </p:nvSpPr>
-        <p:spPr>
-          <a:xfrm>
-            <a:off x="311700" y="445025"/>
-            <a:ext cx="8520600" cy="572700"/>
-          </a:xfrm>
-          <a:prstGeom prst="rect">
-            <a:avLst/>
-          </a:prstGeom>
-        </p:spPr>
-        <p:txBody>
-          <a:bodyPr spcFirstLastPara="1" wrap="square" lIns="91425" tIns="91425" rIns="91425" bIns="91425" anchor="t" anchorCtr="0">
-            <a:normAutofit fontScale="90000"/>
-          </a:bodyPr>
-          <a:lstStyle/>
-          <a:p>
-            <a:pPr marL="0" lvl="0" indent="0" algn="l" rtl="0">
-              <a:spcBef>
-                <a:spcPts val="0"/>
-              </a:spcBef>
-              <a:spcAft>
-                <a:spcPts val="0"/>
-              </a:spcAft>
-              <a:buNone/>
-            </a:pPr>
-            <a:endParaRPr/>
-          </a:p>
-        </p:txBody>
-      </p:sp>
-      <p:sp>
-        <p:nvSpPr>
-          <p:cNvPr id="55" name="Google Shape;55;p10">
-            <a:extLst>
-              <a:ext uri="{FF2B5EF4-FFF2-40B4-BE49-F238E27FC236}">
-                <a16:creationId xmlns:a16="http://schemas.microsoft.com/office/drawing/2014/main" id="{55A3ADD7-78E6-FA43-2904-633D43C50E34}"/>
-              </a:ext>
-            </a:extLst>
-          </p:cNvPr>
-          <p:cNvSpPr txBox="1">
-            <a:spLocks noGrp="1"/>
-          </p:cNvSpPr>
-          <p:nvPr>
-            <p:ph type="body" idx="1"/>
-          </p:nvPr>
-        </p:nvSpPr>
-        <p:spPr>
-          <a:xfrm>
-            <a:off x="311700" y="1152475"/>
-            <a:ext cx="8520600" cy="3416400"/>
-          </a:xfrm>
-          <a:prstGeom prst="rect">
-            <a:avLst/>
-          </a:prstGeom>
-        </p:spPr>
-        <p:txBody>
-          <a:bodyPr spcFirstLastPara="1" wrap="square" lIns="91425" tIns="91425" rIns="91425" bIns="91425" anchor="t" anchorCtr="0">
-            <a:normAutofit/>
-          </a:bodyPr>
-          <a:lstStyle/>
-          <a:p>
-            <a:pPr marL="0" lvl="0" indent="0" algn="l" rtl="0">
-              <a:spcBef>
-                <a:spcPts val="0"/>
-              </a:spcBef>
-              <a:spcAft>
-                <a:spcPts val="1200"/>
-              </a:spcAft>
-              <a:buNone/>
-            </a:pPr>
-            <a:endParaRPr/>
-          </a:p>
-        </p:txBody>
-      </p:sp>
-    </p:spTree>
-    <p:extLst>
-      <p:ext uri="{BB962C8B-B14F-4D97-AF65-F5344CB8AC3E}">
-        <p14:creationId xmlns:p14="http://schemas.microsoft.com/office/powerpoint/2010/main" val="1020829624"/>
-      </p:ext>
-    </p:extLst>
-  </p:cSld>
-  <p:clrMapOvr>
-    <a:masterClrMapping/>
-  </p:clrMapOvr>
-</p:sld>
-</file>
-
-<file path=ppt/slides/slide28.xml><?xml version="1.0" encoding="utf-8"?>
-<p:sld xmlns:a="http://schemas.openxmlformats.org/drawingml/2006/main" xmlns:r="http://schemas.openxmlformats.org/officeDocument/2006/relationships" xmlns:p="http://schemas.openxmlformats.org/presentationml/2006/main">
-  <p:cSld>
-    <p:spTree>
-      <p:nvGrpSpPr>
-        <p:cNvPr id="1" name="Shape 53">
-          <a:extLst>
-            <a:ext uri="{FF2B5EF4-FFF2-40B4-BE49-F238E27FC236}">
-              <a16:creationId xmlns:a16="http://schemas.microsoft.com/office/drawing/2014/main" id="{8571EC20-78E1-F78D-27D6-516F21BBEEAD}"/>
-            </a:ext>
-          </a:extLst>
-        </p:cNvPr>
-        <p:cNvGrpSpPr/>
-        <p:nvPr/>
-      </p:nvGrpSpPr>
-      <p:grpSpPr>
-        <a:xfrm>
-          <a:off x="0" y="0"/>
-          <a:ext cx="0" cy="0"/>
-          <a:chOff x="0" y="0"/>
-          <a:chExt cx="0" cy="0"/>
-        </a:xfrm>
-      </p:grpSpPr>
-      <p:sp>
-        <p:nvSpPr>
-          <p:cNvPr id="54" name="Google Shape;54;p10">
-            <a:extLst>
-              <a:ext uri="{FF2B5EF4-FFF2-40B4-BE49-F238E27FC236}">
-                <a16:creationId xmlns:a16="http://schemas.microsoft.com/office/drawing/2014/main" id="{4FD9832C-EBEA-0BB9-2BEA-4C3FD2D02EC2}"/>
-              </a:ext>
-            </a:extLst>
-          </p:cNvPr>
-          <p:cNvSpPr txBox="1">
-            <a:spLocks noGrp="1"/>
-          </p:cNvSpPr>
-          <p:nvPr>
-            <p:ph type="title"/>
-          </p:nvPr>
-        </p:nvSpPr>
-        <p:spPr>
-          <a:xfrm>
-            <a:off x="311700" y="445025"/>
-            <a:ext cx="8520600" cy="572700"/>
-          </a:xfrm>
-          <a:prstGeom prst="rect">
-            <a:avLst/>
-          </a:prstGeom>
-        </p:spPr>
-        <p:txBody>
-          <a:bodyPr spcFirstLastPara="1" wrap="square" lIns="91425" tIns="91425" rIns="91425" bIns="91425" anchor="t" anchorCtr="0">
-            <a:normAutofit fontScale="90000"/>
-          </a:bodyPr>
-          <a:lstStyle/>
-          <a:p>
-            <a:pPr marL="0" lvl="0" indent="0" algn="l" rtl="0">
-              <a:spcBef>
-                <a:spcPts val="0"/>
-              </a:spcBef>
-              <a:spcAft>
-                <a:spcPts val="0"/>
-              </a:spcAft>
-              <a:buNone/>
-            </a:pPr>
-            <a:endParaRPr/>
-          </a:p>
-        </p:txBody>
-      </p:sp>
-      <p:sp>
-        <p:nvSpPr>
-          <p:cNvPr id="55" name="Google Shape;55;p10">
-            <a:extLst>
-              <a:ext uri="{FF2B5EF4-FFF2-40B4-BE49-F238E27FC236}">
-                <a16:creationId xmlns:a16="http://schemas.microsoft.com/office/drawing/2014/main" id="{033A1A81-D76D-F68D-FA41-D62577DF35AD}"/>
-              </a:ext>
-            </a:extLst>
-          </p:cNvPr>
-          <p:cNvSpPr txBox="1">
-            <a:spLocks noGrp="1"/>
-          </p:cNvSpPr>
-          <p:nvPr>
-            <p:ph type="body" idx="1"/>
-          </p:nvPr>
-        </p:nvSpPr>
-        <p:spPr>
-          <a:xfrm>
-            <a:off x="311700" y="1152475"/>
-            <a:ext cx="8520600" cy="3416400"/>
-          </a:xfrm>
-          <a:prstGeom prst="rect">
-            <a:avLst/>
-          </a:prstGeom>
-        </p:spPr>
-        <p:txBody>
-          <a:bodyPr spcFirstLastPara="1" wrap="square" lIns="91425" tIns="91425" rIns="91425" bIns="91425" anchor="t" anchorCtr="0">
-            <a:normAutofit/>
-          </a:bodyPr>
-          <a:lstStyle/>
-          <a:p>
-            <a:pPr marL="0" lvl="0" indent="0" algn="l" rtl="0">
-              <a:spcBef>
-                <a:spcPts val="0"/>
-              </a:spcBef>
-              <a:spcAft>
-                <a:spcPts val="1200"/>
-              </a:spcAft>
-              <a:buNone/>
-            </a:pPr>
-            <a:endParaRPr/>
-          </a:p>
-        </p:txBody>
-      </p:sp>
-    </p:spTree>
-    <p:extLst>
-      <p:ext uri="{BB962C8B-B14F-4D97-AF65-F5344CB8AC3E}">
-        <p14:creationId xmlns:p14="http://schemas.microsoft.com/office/powerpoint/2010/main" val="2739944814"/>
-      </p:ext>
-    </p:extLst>
-  </p:cSld>
-  <p:clrMapOvr>
-    <a:masterClrMapping/>
-  </p:clrMapOvr>
-</p:sld>
-</file>
-
-<file path=ppt/slides/slide29.xml><?xml version="1.0" encoding="utf-8"?>
-<p:sld xmlns:a="http://schemas.openxmlformats.org/drawingml/2006/main" xmlns:r="http://schemas.openxmlformats.org/officeDocument/2006/relationships" xmlns:p="http://schemas.openxmlformats.org/presentationml/2006/main">
-  <p:cSld>
-    <p:spTree>
-      <p:nvGrpSpPr>
-        <p:cNvPr id="1" name="Shape 59"/>
-        <p:cNvGrpSpPr/>
-        <p:nvPr/>
-      </p:nvGrpSpPr>
-      <p:grpSpPr>
-        <a:xfrm>
-          <a:off x="0" y="0"/>
-          <a:ext cx="0" cy="0"/>
-          <a:chOff x="0" y="0"/>
-          <a:chExt cx="0" cy="0"/>
-        </a:xfrm>
-      </p:grpSpPr>
-      <p:sp>
-        <p:nvSpPr>
-          <p:cNvPr id="60" name="Google Shape;60;p11"/>
-          <p:cNvSpPr txBox="1">
-            <a:spLocks noGrp="1"/>
-          </p:cNvSpPr>
-          <p:nvPr>
-            <p:ph type="title"/>
-          </p:nvPr>
-        </p:nvSpPr>
-        <p:spPr>
-          <a:xfrm>
-            <a:off x="371975" y="525675"/>
-            <a:ext cx="5128500" cy="4207800"/>
-          </a:xfrm>
-          <a:prstGeom prst="rect">
-            <a:avLst/>
-          </a:prstGeom>
-        </p:spPr>
-        <p:txBody>
-          <a:bodyPr spcFirstLastPara="1" wrap="square" lIns="91425" tIns="91425" rIns="91425" bIns="91425" anchor="t" anchorCtr="0">
-            <a:normAutofit/>
-          </a:bodyPr>
-          <a:lstStyle/>
-          <a:p>
-            <a:pPr marL="0" lvl="0" indent="0" algn="ctr" rtl="0">
-              <a:spcBef>
-                <a:spcPts val="0"/>
-              </a:spcBef>
-              <a:spcAft>
-                <a:spcPts val="0"/>
-              </a:spcAft>
-              <a:buNone/>
-            </a:pPr>
-            <a:endParaRPr/>
           </a:p>
         </p:txBody>
       </p:sp>
@@ -13335,229 +8544,6 @@
         <p14:creationId xmlns:p14="http://schemas.microsoft.com/office/powerpoint/2010/main" val="1786908920"/>
       </p:ext>
     </p:extLst>
-  </p:cSld>
-  <p:clrMapOvr>
-    <a:masterClrMapping/>
-  </p:clrMapOvr>
-</p:sld>
-</file>
-
-<file path=ppt/slides/slide30.xml><?xml version="1.0" encoding="utf-8"?>
-<p:sld xmlns:a="http://schemas.openxmlformats.org/drawingml/2006/main" xmlns:r="http://schemas.openxmlformats.org/officeDocument/2006/relationships" xmlns:p="http://schemas.openxmlformats.org/presentationml/2006/main">
-  <p:cSld>
-    <p:spTree>
-      <p:nvGrpSpPr>
-        <p:cNvPr id="1" name="Shape 48"/>
-        <p:cNvGrpSpPr/>
-        <p:nvPr/>
-      </p:nvGrpSpPr>
-      <p:grpSpPr>
-        <a:xfrm>
-          <a:off x="0" y="0"/>
-          <a:ext cx="0" cy="0"/>
-          <a:chOff x="0" y="0"/>
-          <a:chExt cx="0" cy="0"/>
-        </a:xfrm>
-      </p:grpSpPr>
-      <p:sp>
-        <p:nvSpPr>
-          <p:cNvPr id="49" name="Google Shape;49;p9"/>
-          <p:cNvSpPr txBox="1">
-            <a:spLocks noGrp="1"/>
-          </p:cNvSpPr>
-          <p:nvPr>
-            <p:ph type="title"/>
-          </p:nvPr>
-        </p:nvSpPr>
-        <p:spPr>
-          <a:xfrm>
-            <a:off x="311700" y="2150850"/>
-            <a:ext cx="8520600" cy="841800"/>
-          </a:xfrm>
-          <a:prstGeom prst="rect">
-            <a:avLst/>
-          </a:prstGeom>
-        </p:spPr>
-        <p:txBody>
-          <a:bodyPr spcFirstLastPara="1" wrap="square" lIns="91425" tIns="91425" rIns="91425" bIns="91425" anchor="ctr" anchorCtr="0">
-            <a:normAutofit/>
-          </a:bodyPr>
-          <a:lstStyle/>
-          <a:p>
-            <a:pPr marL="0" lvl="0" indent="0" algn="ctr" rtl="0">
-              <a:spcBef>
-                <a:spcPts val="0"/>
-              </a:spcBef>
-              <a:spcAft>
-                <a:spcPts val="0"/>
-              </a:spcAft>
-              <a:buNone/>
-            </a:pPr>
-            <a:endParaRPr/>
-          </a:p>
-        </p:txBody>
-      </p:sp>
-    </p:spTree>
-  </p:cSld>
-  <p:clrMapOvr>
-    <a:masterClrMapping/>
-  </p:clrMapOvr>
-</p:sld>
-</file>
-
-<file path=ppt/slides/slide31.xml><?xml version="1.0" encoding="utf-8"?>
-<p:sld xmlns:a="http://schemas.openxmlformats.org/drawingml/2006/main" xmlns:r="http://schemas.openxmlformats.org/officeDocument/2006/relationships" xmlns:p="http://schemas.openxmlformats.org/presentationml/2006/main">
-  <p:cSld>
-    <p:spTree>
-      <p:nvGrpSpPr>
-        <p:cNvPr id="1" name="Shape 64"/>
-        <p:cNvGrpSpPr/>
-        <p:nvPr/>
-      </p:nvGrpSpPr>
-      <p:grpSpPr>
-        <a:xfrm>
-          <a:off x="0" y="0"/>
-          <a:ext cx="0" cy="0"/>
-          <a:chOff x="0" y="0"/>
-          <a:chExt cx="0" cy="0"/>
-        </a:xfrm>
-      </p:grpSpPr>
-      <p:sp>
-        <p:nvSpPr>
-          <p:cNvPr id="65" name="Google Shape;65;p12"/>
-          <p:cNvSpPr txBox="1">
-            <a:spLocks noGrp="1"/>
-          </p:cNvSpPr>
-          <p:nvPr>
-            <p:ph type="title"/>
-          </p:nvPr>
-        </p:nvSpPr>
-        <p:spPr>
-          <a:xfrm>
-            <a:off x="1063425" y="324450"/>
-            <a:ext cx="4213800" cy="876300"/>
-          </a:xfrm>
-          <a:prstGeom prst="rect">
-            <a:avLst/>
-          </a:prstGeom>
-        </p:spPr>
-        <p:txBody>
-          <a:bodyPr spcFirstLastPara="1" wrap="square" lIns="91425" tIns="91425" rIns="91425" bIns="91425" anchor="t" anchorCtr="0">
-            <a:normAutofit/>
-          </a:bodyPr>
-          <a:lstStyle/>
-          <a:p>
-            <a:pPr marL="0" lvl="0" indent="0" algn="l" rtl="0">
-              <a:spcBef>
-                <a:spcPts val="0"/>
-              </a:spcBef>
-              <a:spcAft>
-                <a:spcPts val="0"/>
-              </a:spcAft>
-              <a:buNone/>
-            </a:pPr>
-            <a:endParaRPr/>
-          </a:p>
-        </p:txBody>
-      </p:sp>
-      <p:sp>
-        <p:nvSpPr>
-          <p:cNvPr id="66" name="Google Shape;66;p12"/>
-          <p:cNvSpPr txBox="1">
-            <a:spLocks noGrp="1"/>
-          </p:cNvSpPr>
-          <p:nvPr>
-            <p:ph type="body" idx="1"/>
-          </p:nvPr>
-        </p:nvSpPr>
-        <p:spPr>
-          <a:xfrm>
-            <a:off x="1063425" y="1152475"/>
-            <a:ext cx="4213800" cy="3416400"/>
-          </a:xfrm>
-          <a:prstGeom prst="rect">
-            <a:avLst/>
-          </a:prstGeom>
-        </p:spPr>
-        <p:txBody>
-          <a:bodyPr spcFirstLastPara="1" wrap="square" lIns="91425" tIns="91425" rIns="91425" bIns="91425" anchor="t" anchorCtr="0">
-            <a:normAutofit/>
-          </a:bodyPr>
-          <a:lstStyle/>
-          <a:p>
-            <a:pPr marL="0" lvl="0" indent="0" algn="l" rtl="0">
-              <a:spcBef>
-                <a:spcPts val="0"/>
-              </a:spcBef>
-              <a:spcAft>
-                <a:spcPts val="1200"/>
-              </a:spcAft>
-              <a:buNone/>
-            </a:pPr>
-            <a:endParaRPr/>
-          </a:p>
-        </p:txBody>
-      </p:sp>
-      <p:pic>
-        <p:nvPicPr>
-          <p:cNvPr id="67" name="Google Shape;67;p12"/>
-          <p:cNvPicPr preferRelativeResize="0"/>
-          <p:nvPr/>
-        </p:nvPicPr>
-        <p:blipFill rotWithShape="1">
-          <a:blip r:embed="rId3">
-            <a:alphaModFix/>
-          </a:blip>
-          <a:srcRect l="39044" t="-230" r="26203" b="230"/>
-          <a:stretch/>
-        </p:blipFill>
-        <p:spPr>
-          <a:xfrm>
-            <a:off x="5476200" y="0"/>
-            <a:ext cx="3667799" cy="5143499"/>
-          </a:xfrm>
-          <a:prstGeom prst="rect">
-            <a:avLst/>
-          </a:prstGeom>
-          <a:noFill/>
-          <a:ln>
-            <a:noFill/>
-          </a:ln>
-          <a:effectLst>
-            <a:outerShdw blurRad="57150" dist="19050" dir="12000000" algn="bl" rotWithShape="0">
-              <a:srgbClr val="000000">
-                <a:alpha val="50000"/>
-              </a:srgbClr>
-            </a:outerShdw>
-          </a:effectLst>
-        </p:spPr>
-      </p:pic>
-    </p:spTree>
-  </p:cSld>
-  <p:clrMapOvr>
-    <a:masterClrMapping/>
-  </p:clrMapOvr>
-</p:sld>
-</file>
-
-<file path=ppt/slides/slide32.xml><?xml version="1.0" encoding="utf-8"?>
-<p:sld xmlns:a="http://schemas.openxmlformats.org/drawingml/2006/main" xmlns:r="http://schemas.openxmlformats.org/officeDocument/2006/relationships" xmlns:p="http://schemas.openxmlformats.org/presentationml/2006/main">
-  <p:cSld>
-    <p:spTree>
-      <p:nvGrpSpPr>
-        <p:cNvPr id="1" name="Shape 71"/>
-        <p:cNvGrpSpPr/>
-        <p:nvPr/>
-      </p:nvGrpSpPr>
-      <p:grpSpPr>
-        <a:xfrm>
-          <a:off x="0" y="0"/>
-          <a:ext cx="0" cy="0"/>
-          <a:chOff x="0" y="0"/>
-          <a:chExt cx="0" cy="0"/>
-        </a:xfrm>
-      </p:grpSpPr>
-    </p:spTree>
   </p:cSld>
   <p:clrMapOvr>
     <a:masterClrMapping/>
@@ -14466,15 +9452,7 @@
             </a:pPr>
             <a:r>
               <a:rPr lang="pt-BR" altLang="pt-BR" dirty="0"/>
-              <a:t>Nomeamos um método </a:t>
-            </a:r>
-            <a:r>
-              <a:rPr lang="pt-BR" altLang="pt-BR" dirty="0" err="1"/>
-              <a:t>acessor</a:t>
-            </a:r>
-            <a:r>
-              <a:rPr lang="pt-BR" altLang="pt-BR" dirty="0"/>
-              <a:t> com “</a:t>
+              <a:t>Nomeamos um método assessor com “</a:t>
             </a:r>
             <a:r>
               <a:rPr lang="pt-BR" altLang="pt-BR" b="1" i="1" dirty="0">
